--- a/Raspberry_Pi/contents/Module04_ConfigurationAndBuildProcess/Lecture04_ConfigurationAndBuildProcess.pptx
+++ b/Raspberry_Pi/contents/Module04_ConfigurationAndBuildProcess/Lecture04_ConfigurationAndBuildProcess.pptx
@@ -326,7 +326,7 @@
               <a:pPr>
                 <a:defRPr/>
               </a:pPr>
-              <a:t>3/5/2019</a:t>
+              <a:t>2/10/2026</a:t>
             </a:fld>
             <a:endParaRPr lang="en-US" altLang="en-US"/>
           </a:p>
@@ -435,6 +435,11 @@
         </p:txBody>
       </p:sp>
     </p:spTree>
+    <p:extLst>
+      <p:ext uri="{BB962C8B-B14F-4D97-AF65-F5344CB8AC3E}">
+        <p14:creationId xmlns:p14="http://schemas.microsoft.com/office/powerpoint/2010/main" val="1"/>
+      </p:ext>
+    </p:extLst>
   </p:cSld>
   <p:clrMap bg1="lt1" tx1="dk1" bg2="lt2" tx2="dk2" accent1="accent1" accent2="accent2" accent3="accent3" accent4="accent4" accent5="accent5" accent6="accent6" hlink="hlink" folHlink="folHlink"/>
 </p:handoutMaster>
@@ -561,7 +566,7 @@
               <a:pPr>
                 <a:defRPr/>
               </a:pPr>
-              <a:t>3/5/2019</a:t>
+              <a:t>2/10/2026</a:t>
             </a:fld>
             <a:endParaRPr lang="en-US" altLang="en-US"/>
           </a:p>
@@ -1074,10 +1079,105 @@
                 </a:solidFill>
                 <a:effectLst/>
                 <a:latin typeface="+mn-lt"/>
-                <a:ea typeface="ＭＳ Ｐゴシック" charset="0"/>
-                <a:cs typeface="ＭＳ Ｐゴシック" charset="0"/>
-              </a:rPr>
-              <a:t>The system programs source code can be obtained in a few different ways, whether it is downloaded from a source on the Internet or received from an operating system vendor.</a:t>
+                <a:ea typeface="ＭＳ Ｐゴシック"/>
+                <a:cs typeface="Calibri"/>
+              </a:rPr>
+              <a:t>The system programs source code can be obtained in a few different ways, </a:t>
+            </a:r>
+            <a:r>
+              <a:rPr lang="en-US" dirty="0">
+                <a:ea typeface="ＭＳ Ｐゴシック"/>
+                <a:cs typeface="Calibri"/>
+              </a:rPr>
+              <a:t>either</a:t>
+            </a:r>
+            <a:r>
+              <a:rPr lang="en-US" sz="1200" kern="1200" dirty="0">
+                <a:solidFill>
+                  <a:schemeClr val="tx1"/>
+                </a:solidFill>
+                <a:effectLst/>
+                <a:latin typeface="+mn-lt"/>
+                <a:ea typeface="ＭＳ Ｐゴシック"/>
+                <a:cs typeface="Calibri"/>
+              </a:rPr>
+              <a:t> </a:t>
+            </a:r>
+            <a:r>
+              <a:rPr lang="en-US" dirty="0">
+                <a:ea typeface="ＭＳ Ｐゴシック"/>
+                <a:cs typeface="Calibri"/>
+              </a:rPr>
+              <a:t>by downloading</a:t>
+            </a:r>
+            <a:r>
+              <a:rPr lang="en-US" sz="1200" kern="1200" dirty="0">
+                <a:solidFill>
+                  <a:schemeClr val="tx1"/>
+                </a:solidFill>
+                <a:effectLst/>
+                <a:latin typeface="+mn-lt"/>
+                <a:ea typeface="ＭＳ Ｐゴシック"/>
+                <a:cs typeface="Calibri"/>
+              </a:rPr>
+              <a:t> </a:t>
+            </a:r>
+            <a:r>
+              <a:rPr lang="en-US" dirty="0">
+                <a:ea typeface="ＭＳ Ｐゴシック"/>
+                <a:cs typeface="Calibri"/>
+              </a:rPr>
+              <a:t>it </a:t>
+            </a:r>
+            <a:r>
+              <a:rPr lang="en-US" sz="1200" kern="1200" dirty="0">
+                <a:solidFill>
+                  <a:schemeClr val="tx1"/>
+                </a:solidFill>
+                <a:effectLst/>
+                <a:latin typeface="+mn-lt"/>
+                <a:ea typeface="ＭＳ Ｐゴシック"/>
+                <a:cs typeface="Calibri"/>
+              </a:rPr>
+              <a:t>from a source on the Internet or </a:t>
+            </a:r>
+            <a:r>
+              <a:rPr lang="en-US" dirty="0">
+                <a:ea typeface="ＭＳ Ｐゴシック"/>
+                <a:cs typeface="Calibri"/>
+              </a:rPr>
+              <a:t>by receiving</a:t>
+            </a:r>
+            <a:r>
+              <a:rPr lang="en-US" sz="1200" kern="1200" dirty="0">
+                <a:solidFill>
+                  <a:schemeClr val="tx1"/>
+                </a:solidFill>
+                <a:effectLst/>
+                <a:latin typeface="+mn-lt"/>
+                <a:ea typeface="ＭＳ Ｐゴシック"/>
+                <a:cs typeface="Calibri"/>
+              </a:rPr>
+              <a:t> </a:t>
+            </a:r>
+            <a:r>
+              <a:rPr lang="en-US" dirty="0">
+                <a:ea typeface="ＭＳ Ｐゴシック"/>
+                <a:cs typeface="Calibri"/>
+              </a:rPr>
+              <a:t>it </a:t>
+            </a:r>
+            <a:r>
+              <a:rPr lang="en-US" sz="1200" kern="1200" dirty="0">
+                <a:solidFill>
+                  <a:schemeClr val="tx1"/>
+                </a:solidFill>
+                <a:effectLst/>
+                <a:latin typeface="+mn-lt"/>
+                <a:ea typeface="ＭＳ Ｐゴシック"/>
+                <a:cs typeface="Calibri"/>
+              </a:rPr>
+              <a:t>from an operating system vendor.</a:t>
             </a:r>
           </a:p>
           <a:p>
@@ -1124,16 +1224,23 @@
           </a:p>
           <a:p>
             <a:r>
+              <a:rPr lang="en-US" dirty="0">
+                <a:ea typeface="ＭＳ Ｐゴシック"/>
+                <a:cs typeface="Calibri"/>
+              </a:rPr>
+              <a:t>Next, they</a:t>
+            </a:r>
+            <a:r>
               <a:rPr lang="en-US" sz="1200" kern="1200" dirty="0">
                 <a:solidFill>
                   <a:schemeClr val="tx1"/>
                 </a:solidFill>
                 <a:effectLst/>
                 <a:latin typeface="+mn-lt"/>
-                <a:ea typeface="ＭＳ Ｐゴシック" charset="0"/>
-                <a:cs typeface="ＭＳ Ｐゴシック" charset="0"/>
-              </a:rPr>
-              <a:t>They are then cross-compiled, which provides the executable system program binaries. </a:t>
+                <a:ea typeface="ＭＳ Ｐゴシック"/>
+                <a:cs typeface="Calibri"/>
+              </a:rPr>
+              <a:t> are cross-compiled, which provides the executable system program binaries. </a:t>
             </a:r>
           </a:p>
           <a:p>
@@ -1234,14 +1341,209 @@
                 </a:solidFill>
                 <a:effectLst/>
                 <a:latin typeface="+mn-lt"/>
-                <a:ea typeface="ＭＳ Ｐゴシック" charset="0"/>
-                <a:cs typeface="ＭＳ Ｐゴシック" charset="0"/>
-              </a:rPr>
-              <a:t>The root file system is also prepared in the workflow. This requires a number of things: </a:t>
+                <a:ea typeface="ＭＳ Ｐゴシック"/>
+                <a:cs typeface="Calibri"/>
+              </a:rPr>
+              <a:t>The root file system is also prepared in the workflow. This </a:t>
+            </a:r>
+            <a:r>
+              <a:rPr lang="en-US" dirty="0">
+                <a:ea typeface="ＭＳ Ｐゴシック"/>
+                <a:cs typeface="Calibri"/>
+              </a:rPr>
+              <a:t>process involves a</a:t>
+            </a:r>
+            <a:r>
+              <a:rPr lang="en-US" sz="1200" kern="1200" dirty="0">
+                <a:solidFill>
+                  <a:schemeClr val="tx1"/>
+                </a:solidFill>
+                <a:effectLst/>
+                <a:latin typeface="+mn-lt"/>
+                <a:ea typeface="ＭＳ Ｐゴシック"/>
+                <a:cs typeface="Calibri"/>
+              </a:rPr>
+              <a:t> number of things: </a:t>
             </a:r>
           </a:p>
           <a:p>
             <a:pPr lvl="1"/>
+            <a:r>
+              <a:rPr lang="en-US" sz="1200" kern="1200" dirty="0">
+                <a:solidFill>
+                  <a:schemeClr val="tx1"/>
+                </a:solidFill>
+                <a:effectLst/>
+                <a:latin typeface="+mn-lt"/>
+                <a:ea typeface="ＭＳ Ｐゴシック"/>
+                <a:cs typeface="Calibri"/>
+              </a:rPr>
+              <a:t>- Creating a file and mounting it as a volume on the development host</a:t>
+            </a:r>
+            <a:r>
+              <a:rPr lang="en-US" dirty="0">
+                <a:ea typeface="ＭＳ Ｐゴシック"/>
+                <a:cs typeface="Calibri"/>
+              </a:rPr>
+              <a:t>.</a:t>
+            </a:r>
+            <a:r>
+              <a:rPr lang="en-US" sz="1200" kern="1200" dirty="0">
+                <a:solidFill>
+                  <a:schemeClr val="tx1"/>
+                </a:solidFill>
+                <a:effectLst/>
+                <a:latin typeface="+mn-lt"/>
+                <a:ea typeface="ＭＳ Ｐゴシック"/>
+                <a:cs typeface="Calibri"/>
+              </a:rPr>
+              <a:t> </a:t>
+            </a:r>
+          </a:p>
+          <a:p>
+            <a:pPr lvl="1"/>
+            <a:r>
+              <a:rPr lang="en-US" sz="1200" kern="1200" dirty="0">
+                <a:solidFill>
+                  <a:schemeClr val="tx1"/>
+                </a:solidFill>
+                <a:effectLst/>
+                <a:latin typeface="+mn-lt"/>
+                <a:ea typeface="ＭＳ Ｐゴシック"/>
+                <a:cs typeface="Calibri"/>
+              </a:rPr>
+              <a:t>- Formatting it using one of the file systems </a:t>
+            </a:r>
+            <a:r>
+              <a:rPr lang="en-US" dirty="0">
+                <a:ea typeface="ＭＳ Ｐゴシック"/>
+                <a:cs typeface="Calibri"/>
+              </a:rPr>
+              <a:t>supported by Linux</a:t>
+            </a:r>
+            <a:r>
+              <a:rPr lang="en-US" sz="1200" kern="1200" dirty="0">
+                <a:solidFill>
+                  <a:schemeClr val="tx1"/>
+                </a:solidFill>
+                <a:effectLst/>
+                <a:latin typeface="+mn-lt"/>
+                <a:ea typeface="ＭＳ Ｐゴシック"/>
+                <a:cs typeface="Calibri"/>
+              </a:rPr>
+              <a:t>, for example ext3</a:t>
+            </a:r>
+            <a:r>
+              <a:rPr lang="en-US" dirty="0">
+                <a:ea typeface="ＭＳ Ｐゴシック"/>
+                <a:cs typeface="Calibri"/>
+              </a:rPr>
+              <a:t>.</a:t>
+            </a:r>
+            <a:endParaRPr lang="en-US" sz="1200" kern="1200" dirty="0">
+              <a:solidFill>
+                <a:schemeClr val="tx1"/>
+              </a:solidFill>
+              <a:effectLst/>
+              <a:latin typeface="+mn-lt"/>
+              <a:ea typeface="ＭＳ Ｐゴシック" charset="0"/>
+              <a:cs typeface="Calibri"/>
+            </a:endParaRPr>
+          </a:p>
+          <a:p>
+            <a:pPr lvl="1"/>
+            <a:r>
+              <a:rPr lang="en-US" sz="1200" kern="1200" dirty="0">
+                <a:solidFill>
+                  <a:schemeClr val="tx1"/>
+                </a:solidFill>
+                <a:effectLst/>
+                <a:latin typeface="+mn-lt"/>
+                <a:ea typeface="ＭＳ Ｐゴシック"/>
+                <a:cs typeface="Calibri"/>
+              </a:rPr>
+              <a:t>- Creating the required directory tree</a:t>
+            </a:r>
+            <a:r>
+              <a:rPr lang="en-US" dirty="0">
+                <a:ea typeface="ＭＳ Ｐゴシック"/>
+                <a:cs typeface="Calibri"/>
+              </a:rPr>
+              <a:t>.</a:t>
+            </a:r>
+            <a:endParaRPr lang="en-US" sz="1200" kern="1200" dirty="0">
+              <a:solidFill>
+                <a:schemeClr val="tx1"/>
+              </a:solidFill>
+              <a:effectLst/>
+              <a:latin typeface="+mn-lt"/>
+              <a:ea typeface="ＭＳ Ｐゴシック" charset="0"/>
+              <a:cs typeface="Calibri"/>
+            </a:endParaRPr>
+          </a:p>
+          <a:p>
+            <a:pPr lvl="1"/>
+            <a:r>
+              <a:rPr lang="en-US" sz="1200" kern="1200" dirty="0">
+                <a:solidFill>
+                  <a:schemeClr val="tx1"/>
+                </a:solidFill>
+                <a:effectLst/>
+                <a:latin typeface="+mn-lt"/>
+                <a:ea typeface="ＭＳ Ｐゴシック"/>
+                <a:cs typeface="Calibri"/>
+              </a:rPr>
+              <a:t>- Populating it with the needed configuration files</a:t>
+            </a:r>
+            <a:r>
+              <a:rPr lang="en-US" dirty="0">
+                <a:ea typeface="ＭＳ Ｐゴシック"/>
+                <a:cs typeface="Calibri"/>
+              </a:rPr>
+              <a:t>.</a:t>
+            </a:r>
+            <a:endParaRPr lang="en-US" sz="1200" kern="1200" dirty="0">
+              <a:solidFill>
+                <a:schemeClr val="tx1"/>
+              </a:solidFill>
+              <a:effectLst/>
+              <a:latin typeface="+mn-lt"/>
+              <a:ea typeface="ＭＳ Ｐゴシック" charset="0"/>
+              <a:cs typeface="Calibri"/>
+            </a:endParaRPr>
+          </a:p>
+          <a:p>
+            <a:pPr lvl="1"/>
+            <a:r>
+              <a:rPr lang="en-US" sz="1200" kern="1200">
+                <a:solidFill>
+                  <a:schemeClr val="tx1"/>
+                </a:solidFill>
+                <a:effectLst/>
+                <a:latin typeface="+mn-lt"/>
+                <a:ea typeface="ＭＳ Ｐゴシック"/>
+                <a:cs typeface="Calibri"/>
+              </a:rPr>
+              <a:t>- Populating it with the system program binary</a:t>
+            </a:r>
+            <a:r>
+              <a:rPr lang="en-US">
+                <a:ea typeface="ＭＳ Ｐゴシック"/>
+                <a:cs typeface="Calibri"/>
+              </a:rPr>
+              <a:t>.</a:t>
+            </a:r>
+            <a:endParaRPr lang="en-US" sz="1200" kern="1200">
+              <a:solidFill>
+                <a:schemeClr val="tx1"/>
+              </a:solidFill>
+              <a:effectLst/>
+              <a:latin typeface="+mn-lt"/>
+              <a:ea typeface="ＭＳ Ｐゴシック" charset="0"/>
+              <a:cs typeface="Calibri"/>
+            </a:endParaRPr>
+          </a:p>
+          <a:p>
             <a:r>
               <a:rPr lang="en-US" sz="1200" kern="1200" dirty="0">
                 <a:solidFill>
@@ -1252,11 +1554,10 @@
                 <a:ea typeface="ＭＳ Ｐゴシック" charset="0"/>
                 <a:cs typeface="ＭＳ Ｐゴシック" charset="0"/>
               </a:rPr>
-              <a:t>- Creating a file and mounting it as a volume on the development host </a:t>
-            </a:r>
-          </a:p>
-          <a:p>
-            <a:pPr lvl="1"/>
+              <a:t> </a:t>
+            </a:r>
+          </a:p>
+          <a:p>
             <a:r>
               <a:rPr lang="en-US" sz="1200" kern="1200" dirty="0">
                 <a:solidFill>
@@ -1264,14 +1565,18 @@
                 </a:solidFill>
                 <a:effectLst/>
                 <a:latin typeface="+mn-lt"/>
-                <a:ea typeface="ＭＳ Ｐゴシック" charset="0"/>
-                <a:cs typeface="ＭＳ Ｐゴシック" charset="0"/>
-              </a:rPr>
-              <a:t>- Formatting it using one of the file systems Linux supports, for example ext3</a:t>
-            </a:r>
-          </a:p>
-          <a:p>
-            <a:pPr lvl="1"/>
+                <a:ea typeface="ＭＳ Ｐゴシック"/>
+                <a:cs typeface="Calibri"/>
+              </a:rPr>
+              <a:t>The root file system is copied onto the embedded system’s persistent storage. </a:t>
+            </a:r>
+            <a:r>
+              <a:rPr lang="en-US" dirty="0">
+                <a:ea typeface="ＭＳ Ｐゴシック"/>
+                <a:cs typeface="Calibri"/>
+              </a:rPr>
+              <a:t>This</a:t>
+            </a:r>
             <a:r>
               <a:rPr lang="en-US" sz="1200" kern="1200" dirty="0">
                 <a:solidFill>
@@ -1279,14 +1584,18 @@
                 </a:solidFill>
                 <a:effectLst/>
                 <a:latin typeface="+mn-lt"/>
-                <a:ea typeface="ＭＳ Ｐゴシック" charset="0"/>
-                <a:cs typeface="ＭＳ Ｐゴシック" charset="0"/>
-              </a:rPr>
-              <a:t>- Creating the required directory tree</a:t>
-            </a:r>
-          </a:p>
-          <a:p>
-            <a:pPr lvl="1"/>
+                <a:ea typeface="ＭＳ Ｐゴシック"/>
+                <a:cs typeface="Calibri"/>
+              </a:rPr>
+              <a:t> </a:t>
+            </a:r>
+            <a:r>
+              <a:rPr lang="en-US" dirty="0">
+                <a:ea typeface="ＭＳ Ｐゴシック"/>
+                <a:cs typeface="Calibri"/>
+              </a:rPr>
+              <a:t>may</a:t>
+            </a:r>
             <a:r>
               <a:rPr lang="en-US" sz="1200" kern="1200" dirty="0">
                 <a:solidFill>
@@ -1294,53 +1603,10 @@
                 </a:solidFill>
                 <a:effectLst/>
                 <a:latin typeface="+mn-lt"/>
-                <a:ea typeface="ＭＳ Ｐゴシック" charset="0"/>
-                <a:cs typeface="ＭＳ Ｐゴシック" charset="0"/>
-              </a:rPr>
-              <a:t>- Populating it with the needed configuration files</a:t>
-            </a:r>
-          </a:p>
-          <a:p>
-            <a:pPr lvl="1"/>
-            <a:r>
-              <a:rPr lang="en-US" sz="1200" kern="1200" dirty="0">
-                <a:solidFill>
-                  <a:schemeClr val="tx1"/>
-                </a:solidFill>
-                <a:effectLst/>
-                <a:latin typeface="+mn-lt"/>
-                <a:ea typeface="ＭＳ Ｐゴシック" charset="0"/>
-                <a:cs typeface="ＭＳ Ｐゴシック" charset="0"/>
-              </a:rPr>
-              <a:t>- Populating it with the system program binary</a:t>
-            </a:r>
-          </a:p>
-          <a:p>
-            <a:r>
-              <a:rPr lang="en-US" sz="1200" kern="1200" dirty="0">
-                <a:solidFill>
-                  <a:schemeClr val="tx1"/>
-                </a:solidFill>
-                <a:effectLst/>
-                <a:latin typeface="+mn-lt"/>
-                <a:ea typeface="ＭＳ Ｐゴシック" charset="0"/>
-                <a:cs typeface="ＭＳ Ｐゴシック" charset="0"/>
-              </a:rPr>
-              <a:t> </a:t>
-            </a:r>
-          </a:p>
-          <a:p>
-            <a:r>
-              <a:rPr lang="en-US" sz="1200" kern="1200" dirty="0">
-                <a:solidFill>
-                  <a:schemeClr val="tx1"/>
-                </a:solidFill>
-                <a:effectLst/>
-                <a:latin typeface="+mn-lt"/>
-                <a:ea typeface="ＭＳ Ｐゴシック" charset="0"/>
-                <a:cs typeface="ＭＳ Ｐゴシック" charset="0"/>
-              </a:rPr>
-              <a:t>The root file system is copied onto the embedded system’s persistent storage. Again, this could be a microSD card or a boot flash device on the board itself.</a:t>
+                <a:ea typeface="ＭＳ Ｐゴシック"/>
+                <a:cs typeface="Calibri"/>
+              </a:rPr>
+              <a:t> be a microSD card or a boot flash device on the board itself.</a:t>
             </a:r>
           </a:p>
           <a:p>
@@ -1539,6 +1805,46 @@
           <a:lstStyle/>
           <a:p>
             <a:r>
+              <a:rPr lang="en-US" dirty="0">
+                <a:ea typeface="ＭＳ Ｐゴシック"/>
+                <a:cs typeface="Calibri"/>
+              </a:rPr>
+              <a:t>Building</a:t>
+            </a:r>
+            <a:r>
+              <a:rPr lang="en-US" sz="1200" kern="1200" dirty="0">
+                <a:solidFill>
+                  <a:schemeClr val="tx1"/>
+                </a:solidFill>
+                <a:effectLst/>
+                <a:latin typeface="+mn-lt"/>
+                <a:ea typeface="ＭＳ Ｐゴシック"/>
+                <a:cs typeface="Calibri"/>
+              </a:rPr>
+              <a:t> an embedded Linux system is a complex process for a few reasons. First, it requires the configuration and compilation of multiple sources with different dependencies. This can easily cause issues if the requirements are not fulfilled or if there is conflict between sources. The root file system is updated at each build, which is a non-trivial task. When it comes to the case of multiple hardware, as well as multiple hardware configurations, manual iteration is </a:t>
+            </a:r>
+            <a:r>
+              <a:rPr lang="en-US" dirty="0">
+                <a:ea typeface="ＭＳ Ｐゴシック"/>
+                <a:cs typeface="Calibri"/>
+              </a:rPr>
+              <a:t>often</a:t>
+            </a:r>
+            <a:r>
+              <a:rPr lang="en-US" sz="1200" kern="1200" dirty="0">
+                <a:solidFill>
+                  <a:schemeClr val="tx1"/>
+                </a:solidFill>
+                <a:effectLst/>
+                <a:latin typeface="+mn-lt"/>
+                <a:ea typeface="ＭＳ Ｐゴシック"/>
+                <a:cs typeface="Calibri"/>
+              </a:rPr>
+              <a:t> required.</a:t>
+            </a:r>
+          </a:p>
+          <a:p>
+            <a:r>
               <a:rPr lang="en-US" sz="1200" kern="1200" dirty="0">
                 <a:solidFill>
                   <a:schemeClr val="tx1"/>
@@ -1548,7 +1854,40 @@
                 <a:ea typeface="ＭＳ Ｐゴシック" charset="0"/>
                 <a:cs typeface="ＭＳ Ｐゴシック" charset="0"/>
               </a:rPr>
-              <a:t>The building of an embedded Linux system is a complex process for a few reasons. First of all, it requires the configuration and compilation of multiple sources with different dependencies. This can easily cause issues if the requirements are not fulfilled or if there is conflict between sources. The root file system is updated at each build, which is a non-trivial task. When it comes to the case of multiple hardware, as well as multiple hardware configurations, manual iteration is typically required.</a:t>
+              <a:t> </a:t>
+            </a:r>
+          </a:p>
+          <a:p>
+            <a:r>
+              <a:rPr lang="en-US" sz="1200" kern="1200" dirty="0">
+                <a:solidFill>
+                  <a:schemeClr val="tx1"/>
+                </a:solidFill>
+                <a:effectLst/>
+                <a:latin typeface="+mn-lt"/>
+                <a:ea typeface="ＭＳ Ｐゴシック"/>
+                <a:cs typeface="Calibri"/>
+              </a:rPr>
+              <a:t>There are tools, known as build </a:t>
+            </a:r>
+            <a:r>
+              <a:rPr lang="en-US" dirty="0">
+                <a:ea typeface="ＭＳ Ｐゴシック"/>
+                <a:cs typeface="Calibri"/>
+              </a:rPr>
+              <a:t>systems</a:t>
+            </a:r>
+            <a:r>
+              <a:rPr lang="en-US" sz="1200" kern="1200" dirty="0">
+                <a:solidFill>
+                  <a:schemeClr val="tx1"/>
+                </a:solidFill>
+                <a:effectLst/>
+                <a:latin typeface="+mn-lt"/>
+                <a:ea typeface="ＭＳ Ｐゴシック"/>
+                <a:cs typeface="Calibri"/>
+              </a:rPr>
+              <a:t>, which are readily available, that automate this process.</a:t>
             </a:r>
           </a:p>
           <a:p>
@@ -1573,13 +1912,18 @@
                 </a:solidFill>
                 <a:effectLst/>
                 <a:latin typeface="+mn-lt"/>
-                <a:ea typeface="ＭＳ Ｐゴシック" charset="0"/>
-                <a:cs typeface="ＭＳ Ｐゴシック" charset="0"/>
-              </a:rPr>
-              <a:t>There are tools, known as build system, which are readily available, that automate this process.</a:t>
-            </a:r>
-          </a:p>
-          <a:p>
+                <a:ea typeface="ＭＳ Ｐゴシック"/>
+                <a:cs typeface="Calibri"/>
+              </a:rPr>
+              <a:t>The build system </a:t>
+            </a:r>
+            <a:r>
+              <a:rPr lang="en-US" dirty="0">
+                <a:ea typeface="ＭＳ Ｐゴシック"/>
+                <a:cs typeface="Calibri"/>
+              </a:rPr>
+              <a:t>manages</a:t>
+            </a:r>
             <a:r>
               <a:rPr lang="en-US" sz="1200" kern="1200" dirty="0">
                 <a:solidFill>
@@ -1587,24 +1931,10 @@
                 </a:solidFill>
                 <a:effectLst/>
                 <a:latin typeface="+mn-lt"/>
-                <a:ea typeface="ＭＳ Ｐゴシック" charset="0"/>
-                <a:cs typeface="ＭＳ Ｐゴシック" charset="0"/>
-              </a:rPr>
-              <a:t> </a:t>
-            </a:r>
-          </a:p>
-          <a:p>
-            <a:r>
-              <a:rPr lang="en-US" sz="1200" kern="1200" dirty="0">
-                <a:solidFill>
-                  <a:schemeClr val="tx1"/>
-                </a:solidFill>
-                <a:effectLst/>
-                <a:latin typeface="+mn-lt"/>
-                <a:ea typeface="ＭＳ Ｐゴシック" charset="0"/>
-                <a:cs typeface="ＭＳ Ｐゴシック" charset="0"/>
-              </a:rPr>
-              <a:t>The build system handles building the cross compiler for the selected embedded system CPU and manages the bootloader, kernel and system program configuration, and build process. Finally, it also prepares the root file system and boot device image.</a:t>
+                <a:ea typeface="ＭＳ Ｐゴシック"/>
+                <a:cs typeface="Calibri"/>
+              </a:rPr>
+              <a:t> building the cross compiler for the selected embedded system CPU and manages the bootloader, kernel and system program configuration, and build process. Finally, it also prepares the root file system and boot device image.</a:t>
             </a:r>
           </a:p>
           <a:p>
@@ -1705,10 +2035,29 @@
                 </a:solidFill>
                 <a:effectLst/>
                 <a:latin typeface="+mn-lt"/>
-                <a:ea typeface="ＭＳ Ｐゴシック" charset="0"/>
-                <a:cs typeface="ＭＳ Ｐゴシック" charset="0"/>
-              </a:rPr>
-              <a:t>When it comes to build systems, there are a variety of solutions available.</a:t>
+                <a:ea typeface="ＭＳ Ｐゴシック"/>
+                <a:cs typeface="Calibri"/>
+              </a:rPr>
+              <a:t>When it comes to build systems, there are </a:t>
+            </a:r>
+            <a:r>
+              <a:rPr lang="en-US" dirty="0">
+                <a:ea typeface="ＭＳ Ｐゴシック"/>
+                <a:cs typeface="Calibri"/>
+              </a:rPr>
+              <a:t>several</a:t>
+            </a:r>
+            <a:r>
+              <a:rPr lang="en-US" sz="1200" kern="1200" dirty="0">
+                <a:solidFill>
+                  <a:schemeClr val="tx1"/>
+                </a:solidFill>
+                <a:effectLst/>
+                <a:latin typeface="+mn-lt"/>
+                <a:ea typeface="ＭＳ Ｐゴシック"/>
+                <a:cs typeface="Calibri"/>
+              </a:rPr>
+              <a:t> solutions available.</a:t>
             </a:r>
           </a:p>
           <a:p>
@@ -1733,10 +2082,86 @@
                 </a:solidFill>
                 <a:effectLst/>
                 <a:latin typeface="+mn-lt"/>
-                <a:ea typeface="ＭＳ Ｐゴシック" charset="0"/>
-                <a:cs typeface="ＭＳ Ｐゴシック" charset="0"/>
-              </a:rPr>
-              <a:t>One option is for hardware vendors to custom build systems. These are designed for particular hardware, one example being the NXP Linux Target Image Builder.</a:t>
+                <a:ea typeface="ＭＳ Ｐゴシック"/>
+                <a:cs typeface="Calibri"/>
+              </a:rPr>
+              <a:t>One option is for hardware vendors to custom build systems. These are designed for particular hardware</a:t>
+            </a:r>
+            <a:r>
+              <a:rPr lang="en-US" dirty="0">
+                <a:ea typeface="ＭＳ Ｐゴシック"/>
+                <a:cs typeface="Calibri"/>
+              </a:rPr>
+              <a:t>.</a:t>
+            </a:r>
+            <a:r>
+              <a:rPr lang="en-US" sz="1200" kern="1200" dirty="0">
+                <a:solidFill>
+                  <a:schemeClr val="tx1"/>
+                </a:solidFill>
+                <a:effectLst/>
+                <a:latin typeface="+mn-lt"/>
+                <a:ea typeface="ＭＳ Ｐゴシック"/>
+                <a:cs typeface="Calibri"/>
+              </a:rPr>
+              <a:t> </a:t>
+            </a:r>
+            <a:r>
+              <a:rPr lang="en-US" dirty="0">
+                <a:ea typeface="ＭＳ Ｐゴシック"/>
+                <a:cs typeface="Calibri"/>
+              </a:rPr>
+              <a:t>An</a:t>
+            </a:r>
+            <a:r>
+              <a:rPr lang="en-US" sz="1200" kern="1200" dirty="0">
+                <a:solidFill>
+                  <a:schemeClr val="tx1"/>
+                </a:solidFill>
+                <a:effectLst/>
+                <a:latin typeface="+mn-lt"/>
+                <a:ea typeface="ＭＳ Ｐゴシック"/>
+                <a:cs typeface="Calibri"/>
+              </a:rPr>
+              <a:t> example </a:t>
+            </a:r>
+            <a:r>
+              <a:rPr lang="en-US" dirty="0">
+                <a:ea typeface="ＭＳ Ｐゴシック"/>
+                <a:cs typeface="Calibri"/>
+              </a:rPr>
+              <a:t>of this</a:t>
+            </a:r>
+            <a:r>
+              <a:rPr lang="en-US" sz="1200" kern="1200" dirty="0">
+                <a:solidFill>
+                  <a:schemeClr val="tx1"/>
+                </a:solidFill>
+                <a:effectLst/>
+                <a:latin typeface="+mn-lt"/>
+                <a:ea typeface="ＭＳ Ｐゴシック"/>
+                <a:cs typeface="Calibri"/>
+              </a:rPr>
+              <a:t> </a:t>
+            </a:r>
+            <a:r>
+              <a:rPr lang="en-US" dirty="0">
+                <a:ea typeface="ＭＳ Ｐゴシック"/>
+                <a:cs typeface="Calibri"/>
+              </a:rPr>
+              <a:t>is </a:t>
+            </a:r>
+            <a:r>
+              <a:rPr lang="en-US" sz="1200" kern="1200" dirty="0">
+                <a:solidFill>
+                  <a:schemeClr val="tx1"/>
+                </a:solidFill>
+                <a:effectLst/>
+                <a:latin typeface="+mn-lt"/>
+                <a:ea typeface="ＭＳ Ｐゴシック"/>
+                <a:cs typeface="Calibri"/>
+              </a:rPr>
+              <a:t>the NXP Linux Target Image Builder.</a:t>
             </a:r>
           </a:p>
           <a:p>
@@ -1761,58 +2186,134 @@
                 </a:solidFill>
                 <a:effectLst/>
                 <a:latin typeface="+mn-lt"/>
-                <a:ea typeface="ＭＳ Ｐゴシック" charset="0"/>
-                <a:cs typeface="ＭＳ Ｐゴシック" charset="0"/>
-              </a:rPr>
-              <a:t>Another option is one of the many open-source build systems, such as </a:t>
-            </a:r>
-            <a:r>
-              <a:rPr lang="en-US" sz="1200" kern="1200" dirty="0" err="1">
+                <a:ea typeface="ＭＳ Ｐゴシック"/>
+                <a:cs typeface="Calibri"/>
+              </a:rPr>
+              <a:t>Another option is </a:t>
+            </a:r>
+            <a:r>
+              <a:rPr lang="en-US" dirty="0">
+                <a:ea typeface="ＭＳ Ｐゴシック"/>
+                <a:cs typeface="Calibri"/>
+              </a:rPr>
+              <a:t>to use </a:t>
+            </a:r>
+            <a:r>
+              <a:rPr lang="en-US" sz="1200" kern="1200" dirty="0">
                 <a:solidFill>
                   <a:schemeClr val="tx1"/>
                 </a:solidFill>
                 <a:effectLst/>
                 <a:latin typeface="+mn-lt"/>
-                <a:ea typeface="ＭＳ Ｐゴシック" charset="0"/>
-                <a:cs typeface="ＭＳ Ｐゴシック" charset="0"/>
-              </a:rPr>
-              <a:t>Yocto</a:t>
-            </a:r>
-            <a:r>
-              <a:rPr lang="en-US" sz="1200" kern="1200" dirty="0">
+                <a:ea typeface="ＭＳ Ｐゴシック"/>
+                <a:cs typeface="Calibri"/>
+              </a:rPr>
+              <a:t>one of the many open-source build systems, such as </a:t>
+            </a:r>
+            <a:r>
+              <a:rPr lang="en-US" sz="1200" kern="1200" dirty="0" err="1">
                 <a:solidFill>
                   <a:schemeClr val="tx1"/>
                 </a:solidFill>
                 <a:effectLst/>
                 <a:latin typeface="+mn-lt"/>
-                <a:ea typeface="ＭＳ Ｐゴシック" charset="0"/>
-                <a:cs typeface="ＭＳ Ｐゴシック" charset="0"/>
-              </a:rPr>
-              <a:t> or </a:t>
-            </a:r>
-            <a:r>
-              <a:rPr lang="en-US" sz="1200" kern="1200" dirty="0" err="1">
+                <a:ea typeface="ＭＳ Ｐゴシック"/>
+                <a:cs typeface="Calibri"/>
+              </a:rPr>
+              <a:t>Yocto</a:t>
+            </a:r>
+            <a:r>
+              <a:rPr lang="en-US" sz="1200" kern="1200" dirty="0">
                 <a:solidFill>
                   <a:schemeClr val="tx1"/>
                 </a:solidFill>
                 <a:effectLst/>
                 <a:latin typeface="+mn-lt"/>
-                <a:ea typeface="ＭＳ Ｐゴシック" charset="0"/>
-                <a:cs typeface="ＭＳ Ｐゴシック" charset="0"/>
-              </a:rPr>
-              <a:t>Buildroot</a:t>
-            </a:r>
-            <a:r>
-              <a:rPr lang="en-US" sz="1200" kern="1200" dirty="0">
+                <a:ea typeface="ＭＳ Ｐゴシック"/>
+                <a:cs typeface="Calibri"/>
+              </a:rPr>
+              <a:t> or </a:t>
+            </a:r>
+            <a:r>
+              <a:rPr lang="en-US" sz="1200" kern="1200" dirty="0" err="1">
                 <a:solidFill>
                   <a:schemeClr val="tx1"/>
                 </a:solidFill>
                 <a:effectLst/>
                 <a:latin typeface="+mn-lt"/>
-                <a:ea typeface="ＭＳ Ｐゴシック" charset="0"/>
-                <a:cs typeface="ＭＳ Ｐゴシック" charset="0"/>
-              </a:rPr>
-              <a:t>, which are the most popular. These projects are typically actively developed and maintained, ensuring that they are up-to-date. They are also widely used in the industry. </a:t>
+                <a:ea typeface="ＭＳ Ｐゴシック"/>
+                <a:cs typeface="Calibri"/>
+              </a:rPr>
+              <a:t>Buildroot</a:t>
+            </a:r>
+            <a:r>
+              <a:rPr lang="en-US" sz="1200" kern="1200" dirty="0">
+                <a:solidFill>
+                  <a:schemeClr val="tx1"/>
+                </a:solidFill>
+                <a:effectLst/>
+                <a:latin typeface="+mn-lt"/>
+                <a:ea typeface="ＭＳ Ｐゴシック"/>
+                <a:cs typeface="Calibri"/>
+              </a:rPr>
+              <a:t>, which are </a:t>
+            </a:r>
+            <a:r>
+              <a:rPr lang="en-US" dirty="0">
+                <a:ea typeface="ＭＳ Ｐゴシック"/>
+                <a:cs typeface="Calibri"/>
+              </a:rPr>
+              <a:t>among the</a:t>
+            </a:r>
+            <a:r>
+              <a:rPr lang="en-US" sz="1200" kern="1200" dirty="0">
+                <a:solidFill>
+                  <a:schemeClr val="tx1"/>
+                </a:solidFill>
+                <a:effectLst/>
+                <a:latin typeface="+mn-lt"/>
+                <a:ea typeface="ＭＳ Ｐゴシック"/>
+                <a:cs typeface="Calibri"/>
+              </a:rPr>
+              <a:t> most popular. These projects are typically actively developed and maintained, ensuring that they </a:t>
+            </a:r>
+            <a:r>
+              <a:rPr lang="en-US" dirty="0">
+                <a:ea typeface="ＭＳ Ｐゴシック"/>
+                <a:cs typeface="Calibri"/>
+              </a:rPr>
+              <a:t>remain </a:t>
+            </a:r>
+            <a:r>
+              <a:rPr lang="en-US" sz="1200" kern="1200" dirty="0">
+                <a:solidFill>
+                  <a:schemeClr val="tx1"/>
+                </a:solidFill>
+                <a:effectLst/>
+                <a:latin typeface="+mn-lt"/>
+                <a:ea typeface="ＭＳ Ｐゴシック"/>
+                <a:cs typeface="Calibri"/>
+              </a:rPr>
+              <a:t>up-to-date. They are widely used </a:t>
+            </a:r>
+            <a:r>
+              <a:rPr lang="en-US" dirty="0">
+                <a:ea typeface="ＭＳ Ｐゴシック"/>
+                <a:cs typeface="Calibri"/>
+              </a:rPr>
+              <a:t>across </a:t>
+            </a:r>
+            <a:r>
+              <a:rPr lang="en-US" sz="1200" kern="1200" dirty="0">
+                <a:solidFill>
+                  <a:schemeClr val="tx1"/>
+                </a:solidFill>
+                <a:effectLst/>
+                <a:latin typeface="+mn-lt"/>
+                <a:ea typeface="ＭＳ Ｐゴシック"/>
+                <a:cs typeface="Calibri"/>
+              </a:rPr>
+              <a:t>the industry. </a:t>
             </a:r>
           </a:p>
           <a:p>
@@ -1913,13 +2414,101 @@
                 </a:solidFill>
                 <a:effectLst/>
                 <a:latin typeface="+mn-lt"/>
-                <a:ea typeface="ＭＳ Ｐゴシック" charset="0"/>
-                <a:cs typeface="ＭＳ Ｐゴシック" charset="0"/>
-              </a:rPr>
-              <a:t>Here is a small comparison between </a:t>
+                <a:ea typeface="ＭＳ Ｐゴシック"/>
+                <a:cs typeface="Calibri"/>
+              </a:rPr>
+              <a:t>Here is a </a:t>
+            </a:r>
+            <a:r>
+              <a:rPr lang="en-US" dirty="0">
+                <a:ea typeface="ＭＳ Ｐゴシック"/>
+                <a:cs typeface="Calibri"/>
+              </a:rPr>
+              <a:t>brief</a:t>
+            </a:r>
+            <a:r>
+              <a:rPr lang="en-US" sz="1200" kern="1200" dirty="0">
+                <a:solidFill>
+                  <a:schemeClr val="tx1"/>
+                </a:solidFill>
+                <a:effectLst/>
+                <a:latin typeface="+mn-lt"/>
+                <a:ea typeface="ＭＳ Ｐゴシック"/>
+                <a:cs typeface="Calibri"/>
+              </a:rPr>
+              <a:t> comparison between </a:t>
             </a:r>
             <a:r>
               <a:rPr lang="en-US" sz="1200" kern="1200" dirty="0" err="1">
+                <a:solidFill>
+                  <a:schemeClr val="tx1"/>
+                </a:solidFill>
+                <a:effectLst/>
+                <a:latin typeface="+mn-lt"/>
+                <a:ea typeface="ＭＳ Ｐゴシック"/>
+                <a:cs typeface="Calibri"/>
+              </a:rPr>
+              <a:t>Yocto</a:t>
+            </a:r>
+            <a:r>
+              <a:rPr lang="en-US" sz="1200" kern="1200" dirty="0">
+                <a:solidFill>
+                  <a:schemeClr val="tx1"/>
+                </a:solidFill>
+                <a:effectLst/>
+                <a:latin typeface="+mn-lt"/>
+                <a:ea typeface="ＭＳ Ｐゴシック"/>
+                <a:cs typeface="Calibri"/>
+              </a:rPr>
+              <a:t> and </a:t>
+            </a:r>
+            <a:r>
+              <a:rPr lang="en-US" sz="1200" kern="1200" dirty="0" err="1">
+                <a:solidFill>
+                  <a:schemeClr val="tx1"/>
+                </a:solidFill>
+                <a:effectLst/>
+                <a:latin typeface="+mn-lt"/>
+                <a:ea typeface="ＭＳ Ｐゴシック"/>
+                <a:cs typeface="Calibri"/>
+              </a:rPr>
+              <a:t>Buildroot</a:t>
+            </a:r>
+            <a:r>
+              <a:rPr lang="en-US" sz="1200" kern="1200" dirty="0">
+                <a:solidFill>
+                  <a:schemeClr val="tx1"/>
+                </a:solidFill>
+                <a:effectLst/>
+                <a:latin typeface="+mn-lt"/>
+                <a:ea typeface="ＭＳ Ｐゴシック"/>
+                <a:cs typeface="Calibri"/>
+              </a:rPr>
+              <a:t> in </a:t>
+            </a:r>
+            <a:r>
+              <a:rPr lang="en-US" dirty="0">
+                <a:ea typeface="ＭＳ Ｐゴシック"/>
+                <a:cs typeface="Calibri"/>
+              </a:rPr>
+              <a:t>terms of</a:t>
+            </a:r>
+            <a:r>
+              <a:rPr lang="en-US" sz="1200" kern="1200" dirty="0">
+                <a:solidFill>
+                  <a:schemeClr val="tx1"/>
+                </a:solidFill>
+                <a:effectLst/>
+                <a:latin typeface="+mn-lt"/>
+                <a:ea typeface="ＭＳ Ｐゴシック"/>
+                <a:cs typeface="Calibri"/>
+              </a:rPr>
+              <a:t> their general workings. </a:t>
+            </a:r>
+          </a:p>
+          <a:p>
+            <a:r>
+              <a:rPr lang="en-US" sz="1200" kern="1200" dirty="0">
                 <a:solidFill>
                   <a:schemeClr val="tx1"/>
                 </a:solidFill>
@@ -1928,8 +2517,98 @@
                 <a:ea typeface="ＭＳ Ｐゴシック" charset="0"/>
                 <a:cs typeface="ＭＳ Ｐゴシック" charset="0"/>
               </a:rPr>
-              <a:t>Yocto</a:t>
-            </a:r>
+              <a:t> </a:t>
+            </a:r>
+          </a:p>
+          <a:p>
+            <a:r>
+              <a:rPr lang="en-US" sz="1200" kern="1200" dirty="0" err="1">
+                <a:solidFill>
+                  <a:schemeClr val="tx1"/>
+                </a:solidFill>
+                <a:effectLst/>
+                <a:latin typeface="+mn-lt"/>
+                <a:ea typeface="ＭＳ Ｐゴシック"/>
+                <a:cs typeface="Calibri"/>
+              </a:rPr>
+              <a:t>Buildroot</a:t>
+            </a:r>
+            <a:r>
+              <a:rPr lang="en-US" sz="1200" kern="1200" dirty="0">
+                <a:solidFill>
+                  <a:schemeClr val="tx1"/>
+                </a:solidFill>
+                <a:effectLst/>
+                <a:latin typeface="+mn-lt"/>
+                <a:ea typeface="ＭＳ Ｐゴシック"/>
+                <a:cs typeface="Calibri"/>
+              </a:rPr>
+              <a:t> is </a:t>
+            </a:r>
+            <a:r>
+              <a:rPr lang="en-US" dirty="0">
+                <a:ea typeface="ＭＳ Ｐゴシック"/>
+                <a:cs typeface="Calibri"/>
+              </a:rPr>
+              <a:t>focused on</a:t>
+            </a:r>
+            <a:r>
+              <a:rPr lang="en-US" sz="1200" kern="1200" dirty="0">
+                <a:solidFill>
+                  <a:schemeClr val="tx1"/>
+                </a:solidFill>
+                <a:effectLst/>
+                <a:latin typeface="+mn-lt"/>
+                <a:ea typeface="ＭＳ Ｐゴシック"/>
+                <a:cs typeface="Calibri"/>
+              </a:rPr>
+              <a:t> simplicity and uses existing technologies such as “</a:t>
+            </a:r>
+            <a:r>
+              <a:rPr lang="en-US" sz="1200" kern="1200" dirty="0" err="1">
+                <a:solidFill>
+                  <a:schemeClr val="tx1"/>
+                </a:solidFill>
+                <a:effectLst/>
+                <a:latin typeface="+mn-lt"/>
+                <a:ea typeface="ＭＳ Ｐゴシック"/>
+                <a:cs typeface="Calibri"/>
+              </a:rPr>
+              <a:t>kconfig</a:t>
+            </a:r>
+            <a:r>
+              <a:rPr lang="en-US" sz="1200" kern="1200" dirty="0">
+                <a:solidFill>
+                  <a:schemeClr val="tx1"/>
+                </a:solidFill>
+                <a:effectLst/>
+                <a:latin typeface="+mn-lt"/>
+                <a:ea typeface="ＭＳ Ｐゴシック"/>
+                <a:cs typeface="Calibri"/>
+              </a:rPr>
+              <a:t>” and “make”. It also </a:t>
+            </a:r>
+            <a:r>
+              <a:rPr lang="en-US" dirty="0">
+                <a:ea typeface="ＭＳ Ｐゴシック"/>
+                <a:cs typeface="Calibri"/>
+              </a:rPr>
+              <a:t>benefits from </a:t>
+            </a:r>
+            <a:r>
+              <a:rPr lang="en-US" sz="1200" kern="1200" dirty="0">
+                <a:solidFill>
+                  <a:schemeClr val="tx1"/>
+                </a:solidFill>
+                <a:effectLst/>
+                <a:latin typeface="+mn-lt"/>
+                <a:ea typeface="ＭＳ Ｐゴシック"/>
+                <a:cs typeface="Calibri"/>
+              </a:rPr>
+              <a:t>an open community.</a:t>
+            </a:r>
+          </a:p>
+          <a:p>
             <a:r>
               <a:rPr lang="en-US" sz="1200" kern="1200" dirty="0">
                 <a:solidFill>
@@ -1940,8 +2619,10 @@
                 <a:ea typeface="ＭＳ Ｐゴシック" charset="0"/>
                 <a:cs typeface="ＭＳ Ｐゴシック" charset="0"/>
               </a:rPr>
-              <a:t> and </a:t>
-            </a:r>
+              <a:t> </a:t>
+            </a:r>
+          </a:p>
+          <a:p>
             <a:r>
               <a:rPr lang="en-US" sz="1200" kern="1200" dirty="0" err="1">
                 <a:solidFill>
@@ -1949,10 +2630,17 @@
                 </a:solidFill>
                 <a:effectLst/>
                 <a:latin typeface="+mn-lt"/>
-                <a:ea typeface="ＭＳ Ｐゴシック" charset="0"/>
-                <a:cs typeface="ＭＳ Ｐゴシック" charset="0"/>
-              </a:rPr>
-              <a:t>Buildroot</a:t>
+                <a:ea typeface="ＭＳ Ｐゴシック"/>
+                <a:cs typeface="Calibri"/>
+              </a:rPr>
+              <a:t>Yocto</a:t>
+            </a:r>
+            <a:r>
+              <a:rPr lang="en-US" dirty="0">
+                <a:ea typeface="ＭＳ Ｐゴシック"/>
+                <a:cs typeface="Calibri"/>
+              </a:rPr>
+              <a:t> </a:t>
             </a:r>
             <a:r>
               <a:rPr lang="en-US" sz="1200" kern="1200" dirty="0">
@@ -1961,13 +2649,18 @@
                 </a:solidFill>
                 <a:effectLst/>
                 <a:latin typeface="+mn-lt"/>
-                <a:ea typeface="ＭＳ Ｐゴシック" charset="0"/>
-                <a:cs typeface="ＭＳ Ｐゴシック" charset="0"/>
-              </a:rPr>
-              <a:t> in regard to their general workings. </a:t>
-            </a:r>
-          </a:p>
-          <a:p>
+                <a:ea typeface="ＭＳ Ｐゴシック"/>
+                <a:cs typeface="Calibri"/>
+              </a:rPr>
+              <a:t>is slightly more complex</a:t>
+            </a:r>
+            <a:r>
+              <a:rPr lang="en-US" dirty="0">
+                <a:ea typeface="ＭＳ Ｐゴシック"/>
+                <a:cs typeface="Calibri"/>
+              </a:rPr>
+              <a:t>.</a:t>
+            </a:r>
             <a:r>
               <a:rPr lang="en-US" sz="1200" kern="1200" dirty="0">
                 <a:solidFill>
@@ -1975,100 +2668,143 @@
                 </a:solidFill>
                 <a:effectLst/>
                 <a:latin typeface="+mn-lt"/>
-                <a:ea typeface="ＭＳ Ｐゴシック" charset="0"/>
-                <a:cs typeface="ＭＳ Ｐゴシック" charset="0"/>
-              </a:rPr>
-              <a:t> </a:t>
-            </a:r>
-          </a:p>
-          <a:p>
-            <a:r>
-              <a:rPr lang="en-US" sz="1200" kern="1200" dirty="0" err="1">
+                <a:ea typeface="ＭＳ Ｐゴシック"/>
+                <a:cs typeface="Calibri"/>
+              </a:rPr>
+              <a:t> </a:t>
+            </a:r>
+            <a:r>
+              <a:rPr lang="en-US" dirty="0">
+                <a:ea typeface="ＭＳ Ｐゴシック"/>
+                <a:cs typeface="Calibri"/>
+              </a:rPr>
+              <a:t>It</a:t>
+            </a:r>
+            <a:r>
+              <a:rPr lang="en-US" sz="1200" kern="1200" dirty="0">
                 <a:solidFill>
                   <a:schemeClr val="tx1"/>
                 </a:solidFill>
                 <a:effectLst/>
                 <a:latin typeface="+mn-lt"/>
-                <a:ea typeface="ＭＳ Ｐゴシック" charset="0"/>
-                <a:cs typeface="ＭＳ Ｐゴシック" charset="0"/>
-              </a:rPr>
-              <a:t>Buildroot</a:t>
-            </a:r>
-            <a:r>
-              <a:rPr lang="en-US" sz="1200" kern="1200" dirty="0">
+                <a:ea typeface="ＭＳ Ｐゴシック"/>
+                <a:cs typeface="Calibri"/>
+              </a:rPr>
+              <a:t> provides the core recipes, but layers need to be included in order to get support for more packages or machines. Any custom modifications made should stay in a separate layer. Given this use of layers and recipes, </a:t>
+            </a:r>
+            <a:r>
+              <a:rPr lang="en-US" dirty="0" err="1">
+                <a:ea typeface="ＭＳ Ｐゴシック"/>
+                <a:cs typeface="Calibri"/>
+              </a:rPr>
+              <a:t>Yocto</a:t>
+            </a:r>
+            <a:r>
+              <a:rPr lang="en-US" sz="1200" kern="1200">
                 <a:solidFill>
                   <a:schemeClr val="tx1"/>
                 </a:solidFill>
                 <a:effectLst/>
                 <a:latin typeface="+mn-lt"/>
-                <a:ea typeface="ＭＳ Ｐゴシック" charset="0"/>
-                <a:cs typeface="ＭＳ Ｐゴシック" charset="0"/>
-              </a:rPr>
-              <a:t> is more concerned with simplicity and uses existing technologies such as “</a:t>
-            </a:r>
-            <a:r>
-              <a:rPr lang="en-US" sz="1200" kern="1200" dirty="0" err="1">
+                <a:ea typeface="ＭＳ Ｐゴシック"/>
+                <a:cs typeface="Calibri"/>
+              </a:rPr>
+              <a:t> is a </a:t>
+            </a:r>
+            <a:r>
+              <a:rPr lang="en-US">
+                <a:ea typeface="ＭＳ Ｐゴシック"/>
+                <a:cs typeface="Calibri"/>
+              </a:rPr>
+              <a:t>highly </a:t>
+            </a:r>
+            <a:r>
+              <a:rPr lang="en-US" sz="1200" kern="1200">
                 <a:solidFill>
                   <a:schemeClr val="tx1"/>
                 </a:solidFill>
                 <a:effectLst/>
                 <a:latin typeface="+mn-lt"/>
-                <a:ea typeface="ＭＳ Ｐゴシック" charset="0"/>
-                <a:cs typeface="ＭＳ Ｐゴシック" charset="0"/>
-              </a:rPr>
-              <a:t>kconfig</a:t>
-            </a:r>
-            <a:r>
-              <a:rPr lang="en-US" sz="1200" kern="1200" dirty="0">
+                <a:ea typeface="ＭＳ Ｐゴシック"/>
+                <a:cs typeface="Calibri"/>
+              </a:rPr>
+              <a:t>versatile </a:t>
+            </a:r>
+            <a:r>
+              <a:rPr lang="en-US">
+                <a:ea typeface="ＭＳ Ｐゴシック"/>
+                <a:cs typeface="Calibri"/>
+              </a:rPr>
+              <a:t>and flexible </a:t>
+            </a:r>
+            <a:r>
+              <a:rPr lang="en-US" sz="1200" kern="1200">
                 <a:solidFill>
                   <a:schemeClr val="tx1"/>
                 </a:solidFill>
                 <a:effectLst/>
                 <a:latin typeface="+mn-lt"/>
-                <a:ea typeface="ＭＳ Ｐゴシック" charset="0"/>
-                <a:cs typeface="ＭＳ Ｐゴシック" charset="0"/>
-              </a:rPr>
-              <a:t>” and “make”. It also has an open community.</a:t>
-            </a:r>
-          </a:p>
-          <a:p>
-            <a:r>
-              <a:rPr lang="en-US" sz="1200" kern="1200" dirty="0">
+                <a:ea typeface="ＭＳ Ｐゴシック"/>
+                <a:cs typeface="Calibri"/>
+              </a:rPr>
+              <a:t>build system, </a:t>
+            </a:r>
+            <a:r>
+              <a:rPr lang="en-US">
+                <a:ea typeface="ＭＳ Ｐゴシック"/>
+                <a:cs typeface="Calibri"/>
+              </a:rPr>
+              <a:t>capable of</a:t>
+            </a:r>
+            <a:r>
+              <a:rPr lang="en-US" sz="1200" kern="1200">
                 <a:solidFill>
                   <a:schemeClr val="tx1"/>
                 </a:solidFill>
                 <a:effectLst/>
                 <a:latin typeface="+mn-lt"/>
-                <a:ea typeface="ＭＳ Ｐゴシック" charset="0"/>
-                <a:cs typeface="ＭＳ Ｐゴシック" charset="0"/>
-              </a:rPr>
-              <a:t> </a:t>
-            </a:r>
-          </a:p>
-          <a:p>
-            <a:r>
-              <a:rPr lang="en-US" sz="1200" kern="1200" dirty="0" err="1">
+                <a:ea typeface="ＭＳ Ｐゴシック"/>
+                <a:cs typeface="Calibri"/>
+              </a:rPr>
+              <a:t> </a:t>
+            </a:r>
+            <a:r>
+              <a:rPr lang="en-US">
+                <a:ea typeface="ＭＳ Ｐゴシック"/>
+                <a:cs typeface="Calibri"/>
+              </a:rPr>
+              <a:t>handling</a:t>
+            </a:r>
+            <a:r>
+              <a:rPr lang="en-US" sz="1200" kern="1200">
                 <a:solidFill>
                   <a:schemeClr val="tx1"/>
                 </a:solidFill>
                 <a:effectLst/>
                 <a:latin typeface="+mn-lt"/>
-                <a:ea typeface="ＭＳ Ｐゴシック" charset="0"/>
-                <a:cs typeface="ＭＳ Ｐゴシック" charset="0"/>
-              </a:rPr>
-              <a:t>Yocto</a:t>
-            </a:r>
-            <a:r>
-              <a:rPr lang="en-US" sz="1200" kern="1200" dirty="0">
+                <a:ea typeface="ＭＳ Ｐゴシック"/>
+                <a:cs typeface="Calibri"/>
+              </a:rPr>
+              <a:t> most use cases. The community is open, but </a:t>
+            </a:r>
+            <a:r>
+              <a:rPr lang="en-US">
+                <a:ea typeface="ＭＳ Ｐゴシック"/>
+                <a:cs typeface="Calibri"/>
+              </a:rPr>
+              <a:t>it is also </a:t>
+            </a:r>
+            <a:r>
+              <a:rPr lang="en-US" sz="1200" kern="1200">
                 <a:solidFill>
                   <a:schemeClr val="tx1"/>
                 </a:solidFill>
                 <a:effectLst/>
                 <a:latin typeface="+mn-lt"/>
-                <a:ea typeface="ＭＳ Ｐゴシック" charset="0"/>
-                <a:cs typeface="ＭＳ Ｐゴシック" charset="0"/>
-              </a:rPr>
-              <a:t> is slightly more complex and provides the core recipes, but layers need to be included in order to get support for more packages or machines. Any custom modifications made should stay in a separate layer. Given this use of layers and recipes, it is a very versatile build system and is very flexible, typically being able to handle most use cases. The community is open, but it is also governed by the </a:t>
+                <a:ea typeface="ＭＳ Ｐゴシック"/>
+                <a:cs typeface="Calibri"/>
+              </a:rPr>
+              <a:t>governed by the </a:t>
             </a:r>
             <a:r>
               <a:rPr lang="en-US" sz="1200" kern="1200" dirty="0" err="1">
@@ -2077,8 +2813,8 @@
                 </a:solidFill>
                 <a:effectLst/>
                 <a:latin typeface="+mn-lt"/>
-                <a:ea typeface="ＭＳ Ｐゴシック" charset="0"/>
-                <a:cs typeface="ＭＳ Ｐゴシック" charset="0"/>
+                <a:ea typeface="ＭＳ Ｐゴシック"/>
+                <a:cs typeface="Calibri"/>
               </a:rPr>
               <a:t>Yocto</a:t>
             </a:r>
@@ -2089,8 +2825,8 @@
                 </a:solidFill>
                 <a:effectLst/>
                 <a:latin typeface="+mn-lt"/>
-                <a:ea typeface="ＭＳ Ｐゴシック" charset="0"/>
-                <a:cs typeface="ＭＳ Ｐゴシック" charset="0"/>
+                <a:ea typeface="ＭＳ Ｐゴシック"/>
+                <a:cs typeface="Calibri"/>
               </a:rPr>
               <a:t> Project Advisory Board.</a:t>
             </a:r>
@@ -2187,6 +2923,55 @@
           <a:lstStyle/>
           <a:p>
             <a:r>
+              <a:rPr lang="en-US" dirty="0">
+                <a:ea typeface="ＭＳ Ｐゴシック"/>
+                <a:cs typeface="Calibri"/>
+              </a:rPr>
+              <a:t>Next, is a comparison of </a:t>
+            </a:r>
+            <a:r>
+              <a:rPr lang="en-US" dirty="0" err="1">
+                <a:ea typeface="ＭＳ Ｐゴシック"/>
+                <a:cs typeface="Calibri"/>
+              </a:rPr>
+              <a:t>Buildroot</a:t>
+            </a:r>
+            <a:r>
+              <a:rPr lang="en-US" dirty="0">
+                <a:ea typeface="ＭＳ Ｐゴシック"/>
+                <a:cs typeface="Calibri"/>
+              </a:rPr>
+              <a:t> and </a:t>
+            </a:r>
+            <a:r>
+              <a:rPr lang="en-US" dirty="0" err="1">
+                <a:ea typeface="ＭＳ Ｐゴシック"/>
+                <a:cs typeface="Calibri"/>
+              </a:rPr>
+              <a:t>Yocto</a:t>
+            </a:r>
+            <a:r>
+              <a:rPr lang="en-US" dirty="0">
+                <a:ea typeface="ＭＳ Ｐゴシック"/>
+                <a:cs typeface="Calibri"/>
+              </a:rPr>
+              <a:t> in </a:t>
+            </a:r>
+            <a:r>
+              <a:rPr lang="en-US" sz="1200" kern="1200" dirty="0">
+                <a:solidFill>
+                  <a:schemeClr val="tx1"/>
+                </a:solidFill>
+                <a:effectLst/>
+                <a:latin typeface="+mn-lt"/>
+                <a:ea typeface="ＭＳ Ｐゴシック"/>
+                <a:cs typeface="Calibri"/>
+              </a:rPr>
+              <a:t>terms of configuration. </a:t>
+            </a:r>
+          </a:p>
+          <a:p>
+            <a:r>
               <a:rPr lang="en-US" sz="1200" kern="1200" dirty="0">
                 <a:solidFill>
                   <a:schemeClr val="tx1"/>
@@ -2196,7 +2981,100 @@
                 <a:ea typeface="ＭＳ Ｐゴシック" charset="0"/>
                 <a:cs typeface="ＭＳ Ｐゴシック" charset="0"/>
               </a:rPr>
-              <a:t>Now for a comparison between the two in terms of configuration. </a:t>
+              <a:t> </a:t>
+            </a:r>
+          </a:p>
+          <a:p>
+            <a:r>
+              <a:rPr lang="en-US" sz="1200" kern="1200" dirty="0" err="1">
+                <a:solidFill>
+                  <a:schemeClr val="tx1"/>
+                </a:solidFill>
+                <a:effectLst/>
+                <a:latin typeface="+mn-lt"/>
+                <a:ea typeface="ＭＳ Ｐゴシック"/>
+                <a:cs typeface="Calibri"/>
+              </a:rPr>
+              <a:t>Buildroot</a:t>
+            </a:r>
+            <a:r>
+              <a:rPr lang="en-US" sz="1200" kern="1200" dirty="0">
+                <a:solidFill>
+                  <a:schemeClr val="tx1"/>
+                </a:solidFill>
+                <a:effectLst/>
+                <a:latin typeface="+mn-lt"/>
+                <a:ea typeface="ＭＳ Ｐゴシック"/>
+                <a:cs typeface="Calibri"/>
+              </a:rPr>
+              <a:t> reuses the “</a:t>
+            </a:r>
+            <a:r>
+              <a:rPr lang="en-US" sz="1200" kern="1200" dirty="0" err="1">
+                <a:solidFill>
+                  <a:schemeClr val="tx1"/>
+                </a:solidFill>
+                <a:effectLst/>
+                <a:latin typeface="+mn-lt"/>
+                <a:ea typeface="ＭＳ Ｐゴシック"/>
+                <a:cs typeface="Calibri"/>
+              </a:rPr>
+              <a:t>kconfig</a:t>
+            </a:r>
+            <a:r>
+              <a:rPr lang="en-US" sz="1200" kern="1200" dirty="0">
+                <a:solidFill>
+                  <a:schemeClr val="tx1"/>
+                </a:solidFill>
+                <a:effectLst/>
+                <a:latin typeface="+mn-lt"/>
+                <a:ea typeface="ＭＳ Ｐゴシック"/>
+                <a:cs typeface="Calibri"/>
+              </a:rPr>
+              <a:t>” functionality already provided by the Linux kernel. The entire configuration is stored in a single file called “.config/</a:t>
+            </a:r>
+            <a:r>
+              <a:rPr lang="en-US" sz="1200" kern="1200" dirty="0" err="1">
+                <a:solidFill>
+                  <a:schemeClr val="tx1"/>
+                </a:solidFill>
+                <a:effectLst/>
+                <a:latin typeface="+mn-lt"/>
+                <a:ea typeface="ＭＳ Ｐゴシック"/>
+                <a:cs typeface="Calibri"/>
+              </a:rPr>
+              <a:t>defconfig</a:t>
+            </a:r>
+            <a:r>
+              <a:rPr lang="en-US" sz="1200" kern="1200" dirty="0">
+                <a:solidFill>
+                  <a:schemeClr val="tx1"/>
+                </a:solidFill>
+                <a:effectLst/>
+                <a:latin typeface="+mn-lt"/>
+                <a:ea typeface="ＭＳ Ｐゴシック"/>
+                <a:cs typeface="Calibri"/>
+              </a:rPr>
+              <a:t>”. This file defines all aspects of the system, such as architecture, kernel version, bootloaders, user-space packages,</a:t>
+            </a:r>
+            <a:r>
+              <a:rPr lang="en-US" dirty="0">
+                <a:ea typeface="ＭＳ Ｐゴシック"/>
+                <a:cs typeface="Calibri"/>
+              </a:rPr>
+              <a:t> </a:t>
+            </a:r>
+            <a:r>
+              <a:rPr lang="en-US" sz="1200" kern="1200" dirty="0">
+                <a:solidFill>
+                  <a:schemeClr val="tx1"/>
+                </a:solidFill>
+                <a:effectLst/>
+                <a:latin typeface="+mn-lt"/>
+                <a:ea typeface="ＭＳ Ｐゴシック"/>
+                <a:cs typeface="Calibri"/>
+              </a:rPr>
+              <a:t>etc. Building the same system for different machines is to be handled separately. </a:t>
             </a:r>
           </a:p>
           <a:p>
@@ -2215,7 +3093,52 @@
           </a:p>
           <a:p>
             <a:r>
+              <a:rPr lang="en-US" dirty="0">
+                <a:ea typeface="ＭＳ Ｐゴシック"/>
+                <a:cs typeface="Calibri"/>
+              </a:rPr>
+              <a:t>In</a:t>
+            </a:r>
+            <a:r>
+              <a:rPr lang="en-US" sz="1200" kern="1200" dirty="0">
+                <a:solidFill>
+                  <a:schemeClr val="tx1"/>
+                </a:solidFill>
+                <a:effectLst/>
+                <a:latin typeface="+mn-lt"/>
+                <a:ea typeface="ＭＳ Ｐゴシック"/>
+                <a:cs typeface="Calibri"/>
+              </a:rPr>
+              <a:t> </a:t>
+            </a:r>
+            <a:r>
               <a:rPr lang="en-US" sz="1200" kern="1200" dirty="0" err="1">
+                <a:solidFill>
+                  <a:schemeClr val="tx1"/>
+                </a:solidFill>
+                <a:effectLst/>
+                <a:latin typeface="+mn-lt"/>
+                <a:ea typeface="ＭＳ Ｐゴシック"/>
+                <a:cs typeface="Calibri"/>
+              </a:rPr>
+              <a:t>Yocto</a:t>
+            </a:r>
+            <a:r>
+              <a:rPr lang="en-US" sz="1200" kern="1200" dirty="0">
+                <a:solidFill>
+                  <a:schemeClr val="tx1"/>
+                </a:solidFill>
+                <a:effectLst/>
+                <a:latin typeface="+mn-lt"/>
+                <a:ea typeface="ＭＳ Ｐゴシック"/>
+                <a:cs typeface="Calibri"/>
+              </a:rPr>
+              <a:t>, the configuration is split into multiple parts. There is distribution configuration, which handles the general configuration and toolchain selection. There is also machine configuration, which defines the hardware architecture, features, and the board support package (BSP). It also configures an image recipe, which will include details of which system programs should be installed on the target. Finally, there is the local configuration, which details how many threads to use when compiling, whether to remove build artifacts, and other information.</a:t>
+            </a:r>
+          </a:p>
+          <a:p>
+            <a:r>
+              <a:rPr lang="en-US" sz="1200" kern="1200" dirty="0">
                 <a:solidFill>
                   <a:schemeClr val="tx1"/>
                 </a:solidFill>
@@ -2224,31 +3147,40 @@
                 <a:ea typeface="ＭＳ Ｐゴシック" charset="0"/>
                 <a:cs typeface="ＭＳ Ｐゴシック" charset="0"/>
               </a:rPr>
-              <a:t>Buildroot</a:t>
-            </a:r>
-            <a:r>
-              <a:rPr lang="en-US" sz="1200" kern="1200" dirty="0">
+              <a:t> </a:t>
+            </a:r>
+          </a:p>
+          <a:p>
+            <a:r>
+              <a:rPr lang="en-US" sz="1200" kern="1200" dirty="0" err="1">
                 <a:solidFill>
                   <a:schemeClr val="tx1"/>
                 </a:solidFill>
                 <a:effectLst/>
                 <a:latin typeface="+mn-lt"/>
-                <a:ea typeface="ＭＳ Ｐゴシック" charset="0"/>
-                <a:cs typeface="ＭＳ Ｐゴシック" charset="0"/>
-              </a:rPr>
-              <a:t> reuses the “</a:t>
-            </a:r>
-            <a:r>
-              <a:rPr lang="en-US" sz="1200" kern="1200" dirty="0" err="1">
+                <a:ea typeface="ＭＳ Ｐゴシック"/>
+                <a:cs typeface="Calibri"/>
+              </a:rPr>
+              <a:t>Yocto</a:t>
+            </a:r>
+            <a:r>
+              <a:rPr lang="en-US" sz="1200" kern="1200" dirty="0">
                 <a:solidFill>
                   <a:schemeClr val="tx1"/>
                 </a:solidFill>
                 <a:effectLst/>
                 <a:latin typeface="+mn-lt"/>
-                <a:ea typeface="ＭＳ Ｐゴシック" charset="0"/>
-                <a:cs typeface="ＭＳ Ｐゴシック" charset="0"/>
-              </a:rPr>
-              <a:t>kconfig</a:t>
+                <a:ea typeface="ＭＳ Ｐゴシック"/>
+                <a:cs typeface="Calibri"/>
+              </a:rPr>
+              <a:t> provides the ability to build the same image for different machines or distributions, or even a variety of images for one machine. This makes it a </a:t>
+            </a:r>
+            <a:r>
+              <a:rPr lang="en-US" dirty="0">
+                <a:ea typeface="ＭＳ Ｐゴシック"/>
+                <a:cs typeface="Calibri"/>
+              </a:rPr>
+              <a:t>highly versatile</a:t>
             </a:r>
             <a:r>
               <a:rPr lang="en-US" sz="1200" kern="1200" dirty="0">
@@ -2257,126 +3189,10 @@
                 </a:solidFill>
                 <a:effectLst/>
                 <a:latin typeface="+mn-lt"/>
-                <a:ea typeface="ＭＳ Ｐゴシック" charset="0"/>
-                <a:cs typeface="ＭＳ Ｐゴシック" charset="0"/>
-              </a:rPr>
-              <a:t>” functionality already provided by the Linux kernel. The entire configuration is stored in a single file called “.config/</a:t>
-            </a:r>
-            <a:r>
-              <a:rPr lang="en-US" sz="1200" kern="1200" dirty="0" err="1">
-                <a:solidFill>
-                  <a:schemeClr val="tx1"/>
-                </a:solidFill>
-                <a:effectLst/>
-                <a:latin typeface="+mn-lt"/>
-                <a:ea typeface="ＭＳ Ｐゴシック" charset="0"/>
-                <a:cs typeface="ＭＳ Ｐゴシック" charset="0"/>
-              </a:rPr>
-              <a:t>defconfig</a:t>
-            </a:r>
-            <a:r>
-              <a:rPr lang="en-US" sz="1200" kern="1200" dirty="0">
-                <a:solidFill>
-                  <a:schemeClr val="tx1"/>
-                </a:solidFill>
-                <a:effectLst/>
-                <a:latin typeface="+mn-lt"/>
-                <a:ea typeface="ＭＳ Ｐゴシック" charset="0"/>
-                <a:cs typeface="ＭＳ Ｐゴシック" charset="0"/>
-              </a:rPr>
-              <a:t>”. This file defines all aspects of the system, such as architecture, kernel version, bootloaders, user-space packages, etc. Building the same system for different machines is to be handled separately. </a:t>
-            </a:r>
-          </a:p>
-          <a:p>
-            <a:r>
-              <a:rPr lang="en-US" sz="1200" kern="1200" dirty="0">
-                <a:solidFill>
-                  <a:schemeClr val="tx1"/>
-                </a:solidFill>
-                <a:effectLst/>
-                <a:latin typeface="+mn-lt"/>
-                <a:ea typeface="ＭＳ Ｐゴシック" charset="0"/>
-                <a:cs typeface="ＭＳ Ｐゴシック" charset="0"/>
-              </a:rPr>
-              <a:t> </a:t>
-            </a:r>
-          </a:p>
-          <a:p>
-            <a:r>
-              <a:rPr lang="en-US" sz="1200" kern="1200" dirty="0">
-                <a:solidFill>
-                  <a:schemeClr val="tx1"/>
-                </a:solidFill>
-                <a:effectLst/>
-                <a:latin typeface="+mn-lt"/>
-                <a:ea typeface="ＭＳ Ｐゴシック" charset="0"/>
-                <a:cs typeface="ＭＳ Ｐゴシック" charset="0"/>
-              </a:rPr>
-              <a:t>As for </a:t>
-            </a:r>
-            <a:r>
-              <a:rPr lang="en-US" sz="1200" kern="1200" dirty="0" err="1">
-                <a:solidFill>
-                  <a:schemeClr val="tx1"/>
-                </a:solidFill>
-                <a:effectLst/>
-                <a:latin typeface="+mn-lt"/>
-                <a:ea typeface="ＭＳ Ｐゴシック" charset="0"/>
-                <a:cs typeface="ＭＳ Ｐゴシック" charset="0"/>
-              </a:rPr>
-              <a:t>Yocto</a:t>
-            </a:r>
-            <a:r>
-              <a:rPr lang="en-US" sz="1200" kern="1200" dirty="0">
-                <a:solidFill>
-                  <a:schemeClr val="tx1"/>
-                </a:solidFill>
-                <a:effectLst/>
-                <a:latin typeface="+mn-lt"/>
-                <a:ea typeface="ＭＳ Ｐゴシック" charset="0"/>
-                <a:cs typeface="ＭＳ Ｐゴシック" charset="0"/>
-              </a:rPr>
-              <a:t>, the configuration is split into multiple parts. There is distribution configuration, which handles the general configuration and toolchain selection. There is also machine configuration, which defines the hardware architecture, features, and the board support package (BSP). It also configures an image recipe, which will include details of which system programs should be installed on the target. Finally, there is the local configuration, which details how many threads to use when compiling, whether to remove build artifacts, and other information.</a:t>
-            </a:r>
-          </a:p>
-          <a:p>
-            <a:r>
-              <a:rPr lang="en-US" sz="1200" kern="1200" dirty="0">
-                <a:solidFill>
-                  <a:schemeClr val="tx1"/>
-                </a:solidFill>
-                <a:effectLst/>
-                <a:latin typeface="+mn-lt"/>
-                <a:ea typeface="ＭＳ Ｐゴシック" charset="0"/>
-                <a:cs typeface="ＭＳ Ｐゴシック" charset="0"/>
-              </a:rPr>
-              <a:t> </a:t>
-            </a:r>
-          </a:p>
-          <a:p>
-            <a:r>
-              <a:rPr lang="en-US" sz="1200" kern="1200" dirty="0" err="1">
-                <a:solidFill>
-                  <a:schemeClr val="tx1"/>
-                </a:solidFill>
-                <a:effectLst/>
-                <a:latin typeface="+mn-lt"/>
-                <a:ea typeface="ＭＳ Ｐゴシック" charset="0"/>
-                <a:cs typeface="ＭＳ Ｐゴシック" charset="0"/>
-              </a:rPr>
-              <a:t>Yocto</a:t>
-            </a:r>
-            <a:r>
-              <a:rPr lang="en-US" sz="1200" kern="1200" dirty="0">
-                <a:solidFill>
-                  <a:schemeClr val="tx1"/>
-                </a:solidFill>
-                <a:effectLst/>
-                <a:latin typeface="+mn-lt"/>
-                <a:ea typeface="ＭＳ Ｐゴシック" charset="0"/>
-                <a:cs typeface="ＭＳ Ｐゴシック" charset="0"/>
-              </a:rPr>
-              <a:t> provides the ability to build the same image for different machines or distributions, or even a variety of images for one machine. This makes it a very versatile and powerful tool.</a:t>
+                <a:ea typeface="ＭＳ Ｐゴシック"/>
+                <a:cs typeface="Calibri"/>
+              </a:rPr>
+              <a:t> and powerful tool.</a:t>
             </a:r>
           </a:p>
           <a:p>
@@ -2477,10 +3293,48 @@
                 </a:solidFill>
                 <a:effectLst/>
                 <a:latin typeface="+mn-lt"/>
-                <a:ea typeface="ＭＳ Ｐゴシック" charset="0"/>
-                <a:cs typeface="ＭＳ Ｐゴシック" charset="0"/>
-              </a:rPr>
-              <a:t>Finally, we will look at a small comparison between the purpose of the two systems.</a:t>
+                <a:ea typeface="ＭＳ Ｐゴシック"/>
+                <a:cs typeface="Calibri"/>
+              </a:rPr>
+              <a:t>Finally, we </a:t>
+            </a:r>
+            <a:r>
+              <a:rPr lang="en-US" dirty="0">
+                <a:ea typeface="ＭＳ Ｐゴシック"/>
+                <a:cs typeface="Calibri"/>
+              </a:rPr>
+              <a:t>will compare</a:t>
+            </a:r>
+            <a:r>
+              <a:rPr lang="en-US" sz="1200" kern="1200" dirty="0">
+                <a:solidFill>
+                  <a:schemeClr val="tx1"/>
+                </a:solidFill>
+                <a:effectLst/>
+                <a:latin typeface="+mn-lt"/>
+                <a:ea typeface="ＭＳ Ｐゴシック"/>
+                <a:cs typeface="Calibri"/>
+              </a:rPr>
+              <a:t> the purpose of the two </a:t>
+            </a:r>
+            <a:r>
+              <a:rPr lang="en-US" dirty="0">
+                <a:ea typeface="ＭＳ Ｐゴシック"/>
+                <a:cs typeface="Calibri"/>
+              </a:rPr>
+              <a:t>build </a:t>
+            </a:r>
+            <a:r>
+              <a:rPr lang="en-US" sz="1200" kern="1200" dirty="0">
+                <a:solidFill>
+                  <a:schemeClr val="tx1"/>
+                </a:solidFill>
+                <a:effectLst/>
+                <a:latin typeface="+mn-lt"/>
+                <a:ea typeface="ＭＳ Ｐゴシック"/>
+                <a:cs typeface="Calibri"/>
+              </a:rPr>
+              <a:t>systems.</a:t>
             </a:r>
           </a:p>
           <a:p>
@@ -2505,8 +3359,8 @@
                 </a:solidFill>
                 <a:effectLst/>
                 <a:latin typeface="+mn-lt"/>
-                <a:ea typeface="ＭＳ Ｐゴシック" charset="0"/>
-                <a:cs typeface="ＭＳ Ｐゴシック" charset="0"/>
+                <a:ea typeface="ＭＳ Ｐゴシック"/>
+                <a:cs typeface="Calibri"/>
               </a:rPr>
               <a:t>Buildroot</a:t>
             </a:r>
@@ -2517,10 +3371,48 @@
                 </a:solidFill>
                 <a:effectLst/>
                 <a:latin typeface="+mn-lt"/>
-                <a:ea typeface="ＭＳ Ｐゴシック" charset="0"/>
-                <a:cs typeface="ＭＳ Ｐゴシック" charset="0"/>
-              </a:rPr>
-              <a:t> is typically intended for small root file systems, under 8 MB in most cases. They are generally used for simple embedded systems that only require a limited amount of system programs. It can be considered to be more geared towards use from non-dedicated build engineers. This means engineers that are not focused only on building embedded Linux systems.</a:t>
+                <a:ea typeface="ＭＳ Ｐゴシック"/>
+                <a:cs typeface="Calibri"/>
+              </a:rPr>
+              <a:t> is typically intended for small root file systems, </a:t>
+            </a:r>
+            <a:r>
+              <a:rPr lang="en-US" dirty="0">
+                <a:ea typeface="ＭＳ Ｐゴシック"/>
+                <a:cs typeface="Calibri"/>
+              </a:rPr>
+              <a:t>usually under</a:t>
+            </a:r>
+            <a:r>
+              <a:rPr lang="en-US" sz="1200" kern="1200" dirty="0">
+                <a:solidFill>
+                  <a:schemeClr val="tx1"/>
+                </a:solidFill>
+                <a:effectLst/>
+                <a:latin typeface="+mn-lt"/>
+                <a:ea typeface="ＭＳ Ｐゴシック"/>
+                <a:cs typeface="Calibri"/>
+              </a:rPr>
+              <a:t> 8 MB. </a:t>
+            </a:r>
+            <a:r>
+              <a:rPr lang="en-US" dirty="0">
+                <a:ea typeface="ＭＳ Ｐゴシック"/>
+                <a:cs typeface="Calibri"/>
+              </a:rPr>
+              <a:t>It is</a:t>
+            </a:r>
+            <a:r>
+              <a:rPr lang="en-US" sz="1200" kern="1200" dirty="0">
+                <a:solidFill>
+                  <a:schemeClr val="tx1"/>
+                </a:solidFill>
+                <a:effectLst/>
+                <a:latin typeface="+mn-lt"/>
+                <a:ea typeface="ＭＳ Ｐゴシック"/>
+                <a:cs typeface="Calibri"/>
+              </a:rPr>
+              <a:t> generally used for simple embedded systems that only require a limited amount of system programs. It can be considered to be more geared towards use from non-dedicated build engineers. This means engineers that are not focused only on building embedded Linux systems.</a:t>
             </a:r>
           </a:p>
           <a:p>
@@ -2813,13 +3705,82 @@
                 </a:solidFill>
                 <a:effectLst/>
                 <a:latin typeface="+mn-lt"/>
-                <a:ea typeface="ＭＳ Ｐゴシック" charset="0"/>
-                <a:cs typeface="ＭＳ Ｐゴシック" charset="0"/>
+                <a:ea typeface="ＭＳ Ｐゴシック"/>
+                <a:cs typeface="Calibri"/>
               </a:rPr>
               <a:t>The </a:t>
             </a:r>
             <a:r>
               <a:rPr lang="en-US" sz="1200" kern="1200" dirty="0" err="1">
+                <a:solidFill>
+                  <a:schemeClr val="tx1"/>
+                </a:solidFill>
+                <a:effectLst/>
+                <a:latin typeface="+mn-lt"/>
+                <a:ea typeface="ＭＳ Ｐゴシック"/>
+                <a:cs typeface="Calibri"/>
+              </a:rPr>
+              <a:t>Yocto</a:t>
+            </a:r>
+            <a:r>
+              <a:rPr lang="en-US" sz="1200" kern="1200" dirty="0">
+                <a:solidFill>
+                  <a:schemeClr val="tx1"/>
+                </a:solidFill>
+                <a:effectLst/>
+                <a:latin typeface="+mn-lt"/>
+                <a:ea typeface="ＭＳ Ｐゴシック"/>
+                <a:cs typeface="Calibri"/>
+              </a:rPr>
+              <a:t> Project is an open source project that is hosted by the Linux Foundation. It brings together </a:t>
+            </a:r>
+            <a:r>
+              <a:rPr lang="en-US" dirty="0">
+                <a:ea typeface="ＭＳ Ｐゴシック"/>
+                <a:cs typeface="Calibri"/>
+              </a:rPr>
+              <a:t>several related</a:t>
+            </a:r>
+            <a:r>
+              <a:rPr lang="en-US" sz="1200" kern="1200" dirty="0">
+                <a:solidFill>
+                  <a:schemeClr val="tx1"/>
+                </a:solidFill>
+                <a:effectLst/>
+                <a:latin typeface="+mn-lt"/>
+                <a:ea typeface="ＭＳ Ｐゴシック"/>
+                <a:cs typeface="Calibri"/>
+              </a:rPr>
+              <a:t> projects to offer an overall package called the “</a:t>
+            </a:r>
+            <a:r>
+              <a:rPr lang="en-US" sz="1200" kern="1200" dirty="0" err="1">
+                <a:solidFill>
+                  <a:schemeClr val="tx1"/>
+                </a:solidFill>
+                <a:effectLst/>
+                <a:latin typeface="+mn-lt"/>
+                <a:ea typeface="ＭＳ Ｐゴシック"/>
+                <a:cs typeface="Calibri"/>
+              </a:rPr>
+              <a:t>Yocto</a:t>
+            </a:r>
+            <a:r>
+              <a:rPr lang="en-US" sz="1200" kern="1200" dirty="0">
+                <a:solidFill>
+                  <a:schemeClr val="tx1"/>
+                </a:solidFill>
+                <a:effectLst/>
+                <a:latin typeface="+mn-lt"/>
+                <a:ea typeface="ＭＳ Ｐゴシック"/>
+                <a:cs typeface="Calibri"/>
+              </a:rPr>
+              <a:t> Project”. </a:t>
+            </a:r>
+          </a:p>
+          <a:p>
+            <a:r>
+              <a:rPr lang="en-US" sz="1200" kern="1200" dirty="0">
                 <a:solidFill>
                   <a:schemeClr val="tx1"/>
                 </a:solidFill>
@@ -2828,8 +3789,10 @@
                 <a:ea typeface="ＭＳ Ｐゴシック" charset="0"/>
                 <a:cs typeface="ＭＳ Ｐゴシック" charset="0"/>
               </a:rPr>
-              <a:t>Yocto</a:t>
-            </a:r>
+              <a:t> </a:t>
+            </a:r>
+          </a:p>
+          <a:p>
             <a:r>
               <a:rPr lang="en-US" sz="1200" kern="1200" dirty="0">
                 <a:solidFill>
@@ -2837,22 +3800,22 @@
                 </a:solidFill>
                 <a:effectLst/>
                 <a:latin typeface="+mn-lt"/>
-                <a:ea typeface="ＭＳ Ｐゴシック" charset="0"/>
-                <a:cs typeface="ＭＳ Ｐゴシック" charset="0"/>
-              </a:rPr>
-              <a:t> Project is an open source project that is hosted by the Linux Foundation. It brings together a number of other projects to offer an overall package called the “</a:t>
-            </a:r>
-            <a:r>
-              <a:rPr lang="en-US" sz="1200" kern="1200" dirty="0" err="1">
+                <a:ea typeface="ＭＳ Ｐゴシック"/>
+                <a:cs typeface="Calibri"/>
+              </a:rPr>
+              <a:t>Some of the individual projects are “</a:t>
+            </a:r>
+            <a:r>
+              <a:rPr lang="en-US" sz="1200" kern="1200" err="1">
                 <a:solidFill>
                   <a:schemeClr val="tx1"/>
                 </a:solidFill>
                 <a:effectLst/>
                 <a:latin typeface="+mn-lt"/>
-                <a:ea typeface="ＭＳ Ｐゴシック" charset="0"/>
-                <a:cs typeface="ＭＳ Ｐゴシック" charset="0"/>
-              </a:rPr>
-              <a:t>Yocto</a:t>
+                <a:ea typeface="ＭＳ Ｐゴシック"/>
+                <a:cs typeface="Calibri"/>
+              </a:rPr>
+              <a:t>Bitbake</a:t>
             </a:r>
             <a:r>
               <a:rPr lang="en-US" sz="1200" kern="1200" dirty="0">
@@ -2861,27 +3824,23 @@
                 </a:solidFill>
                 <a:effectLst/>
                 <a:latin typeface="+mn-lt"/>
-                <a:ea typeface="ＭＳ Ｐゴシック" charset="0"/>
-                <a:cs typeface="ＭＳ Ｐゴシック" charset="0"/>
-              </a:rPr>
-              <a:t> Project”. </a:t>
-            </a:r>
-          </a:p>
-          <a:p>
-            <a:r>
-              <a:rPr lang="en-US" sz="1200" kern="1200" dirty="0">
+                <a:ea typeface="ＭＳ Ｐゴシック"/>
+                <a:cs typeface="Calibri"/>
+              </a:rPr>
+              <a:t>”, a build tool, and “</a:t>
+            </a:r>
+            <a:r>
+              <a:rPr lang="en-US" sz="1200" kern="1200" err="1">
                 <a:solidFill>
                   <a:schemeClr val="tx1"/>
                 </a:solidFill>
                 <a:effectLst/>
                 <a:latin typeface="+mn-lt"/>
-                <a:ea typeface="ＭＳ Ｐゴシック" charset="0"/>
-                <a:cs typeface="ＭＳ Ｐゴシック" charset="0"/>
-              </a:rPr>
-              <a:t> </a:t>
-            </a:r>
-          </a:p>
-          <a:p>
+                <a:ea typeface="ＭＳ Ｐゴシック"/>
+                <a:cs typeface="Calibri"/>
+              </a:rPr>
+              <a:t>OpenEmbedded</a:t>
+            </a:r>
             <a:r>
               <a:rPr lang="en-US" sz="1200" kern="1200" dirty="0">
                 <a:solidFill>
@@ -2889,22 +3848,22 @@
                 </a:solidFill>
                 <a:effectLst/>
                 <a:latin typeface="+mn-lt"/>
-                <a:ea typeface="ＭＳ Ｐゴシック" charset="0"/>
-                <a:cs typeface="ＭＳ Ｐゴシック" charset="0"/>
-              </a:rPr>
-              <a:t>Some of the individual projects are “</a:t>
-            </a:r>
-            <a:r>
-              <a:rPr lang="en-US" sz="1200" kern="1200" dirty="0" err="1">
+                <a:ea typeface="ＭＳ Ｐゴシック"/>
+                <a:cs typeface="Calibri"/>
+              </a:rPr>
+              <a:t> Core”, a framework used for the creation of Linux distributions. Poky is also included in the project. Poky is a reference distribution of the </a:t>
+            </a:r>
+            <a:r>
+              <a:rPr lang="en-US" sz="1200" kern="1200" err="1">
                 <a:solidFill>
                   <a:schemeClr val="tx1"/>
                 </a:solidFill>
                 <a:effectLst/>
                 <a:latin typeface="+mn-lt"/>
-                <a:ea typeface="ＭＳ Ｐゴシック" charset="0"/>
-                <a:cs typeface="ＭＳ Ｐゴシック" charset="0"/>
-              </a:rPr>
-              <a:t>Bitbake</a:t>
+                <a:ea typeface="ＭＳ Ｐゴシック"/>
+                <a:cs typeface="Calibri"/>
+              </a:rPr>
+              <a:t>Yocto</a:t>
             </a:r>
             <a:r>
               <a:rPr lang="en-US" sz="1200" kern="1200" dirty="0">
@@ -2913,20 +3872,20 @@
                 </a:solidFill>
                 <a:effectLst/>
                 <a:latin typeface="+mn-lt"/>
-                <a:ea typeface="ＭＳ Ｐゴシック" charset="0"/>
-                <a:cs typeface="ＭＳ Ｐゴシック" charset="0"/>
-              </a:rPr>
-              <a:t>”, a build tool, and “</a:t>
-            </a:r>
-            <a:r>
-              <a:rPr lang="en-US" sz="1200" kern="1200" dirty="0" err="1">
+                <a:ea typeface="ＭＳ Ｐゴシック"/>
+                <a:cs typeface="Calibri"/>
+              </a:rPr>
+              <a:t> Project, which contains the </a:t>
+            </a:r>
+            <a:r>
+              <a:rPr lang="en-US" sz="1200" kern="1200" err="1">
                 <a:solidFill>
                   <a:schemeClr val="tx1"/>
                 </a:solidFill>
                 <a:effectLst/>
                 <a:latin typeface="+mn-lt"/>
-                <a:ea typeface="ＭＳ Ｐゴシック" charset="0"/>
-                <a:cs typeface="ＭＳ Ｐゴシック" charset="0"/>
+                <a:ea typeface="ＭＳ Ｐゴシック"/>
+                <a:cs typeface="Calibri"/>
               </a:rPr>
               <a:t>OpenEmbedded</a:t>
             </a:r>
@@ -2937,22 +3896,22 @@
                 </a:solidFill>
                 <a:effectLst/>
                 <a:latin typeface="+mn-lt"/>
-                <a:ea typeface="ＭＳ Ｐゴシック" charset="0"/>
-                <a:cs typeface="ＭＳ Ｐゴシック" charset="0"/>
-              </a:rPr>
-              <a:t> Core”, a framework used for the creation of Linux distributions. Poky is also included in the project. Poky is a reference distribution of the </a:t>
-            </a:r>
-            <a:r>
-              <a:rPr lang="en-US" sz="1200" kern="1200" dirty="0" err="1">
+                <a:ea typeface="ＭＳ Ｐゴシック"/>
+                <a:cs typeface="Calibri"/>
+              </a:rPr>
+              <a:t> build system (</a:t>
+            </a:r>
+            <a:r>
+              <a:rPr lang="en-US" sz="1200" kern="1200" err="1">
                 <a:solidFill>
                   <a:schemeClr val="tx1"/>
                 </a:solidFill>
                 <a:effectLst/>
                 <a:latin typeface="+mn-lt"/>
-                <a:ea typeface="ＭＳ Ｐゴシック" charset="0"/>
-                <a:cs typeface="ＭＳ Ｐゴシック" charset="0"/>
-              </a:rPr>
-              <a:t>Yocto</a:t>
+                <a:ea typeface="ＭＳ Ｐゴシック"/>
+                <a:cs typeface="Calibri"/>
+              </a:rPr>
+              <a:t>Bitbake</a:t>
             </a:r>
             <a:r>
               <a:rPr lang="en-US" sz="1200" kern="1200" dirty="0">
@@ -2961,20 +3920,20 @@
                 </a:solidFill>
                 <a:effectLst/>
                 <a:latin typeface="+mn-lt"/>
-                <a:ea typeface="ＭＳ Ｐゴシック" charset="0"/>
-                <a:cs typeface="ＭＳ Ｐゴシック" charset="0"/>
-              </a:rPr>
-              <a:t> Project, which contains the </a:t>
-            </a:r>
-            <a:r>
-              <a:rPr lang="en-US" sz="1200" kern="1200" dirty="0" err="1">
+                <a:ea typeface="ＭＳ Ｐゴシック"/>
+                <a:cs typeface="Calibri"/>
+              </a:rPr>
+              <a:t> and </a:t>
+            </a:r>
+            <a:r>
+              <a:rPr lang="en-US" sz="1200" kern="1200" err="1">
                 <a:solidFill>
                   <a:schemeClr val="tx1"/>
                 </a:solidFill>
                 <a:effectLst/>
                 <a:latin typeface="+mn-lt"/>
-                <a:ea typeface="ＭＳ Ｐゴシック" charset="0"/>
-                <a:cs typeface="ＭＳ Ｐゴシック" charset="0"/>
+                <a:ea typeface="ＭＳ Ｐゴシック"/>
+                <a:cs typeface="Calibri"/>
               </a:rPr>
               <a:t>OpenEmbedded</a:t>
             </a:r>
@@ -2985,22 +3944,41 @@
                 </a:solidFill>
                 <a:effectLst/>
                 <a:latin typeface="+mn-lt"/>
-                <a:ea typeface="ＭＳ Ｐゴシック" charset="0"/>
-                <a:cs typeface="ＭＳ Ｐゴシック" charset="0"/>
-              </a:rPr>
-              <a:t> build system (</a:t>
-            </a:r>
-            <a:r>
-              <a:rPr lang="en-US" sz="1200" kern="1200" dirty="0" err="1">
+                <a:ea typeface="ＭＳ Ｐゴシック"/>
+                <a:cs typeface="Calibri"/>
+              </a:rPr>
+              <a:t> Core) and a set of metadata to start building custom embedded Linux systems. </a:t>
+            </a:r>
+            <a:endParaRPr lang="en-US" dirty="0">
+              <a:ea typeface="ＭＳ Ｐゴシック"/>
+              <a:cs typeface="Calibri"/>
+            </a:endParaRPr>
+          </a:p>
+          <a:p>
+            <a:endParaRPr lang="en-US" dirty="0">
+              <a:ea typeface="ＭＳ Ｐゴシック"/>
+              <a:cs typeface="Calibri"/>
+            </a:endParaRPr>
+          </a:p>
+          <a:p>
+            <a:r>
+              <a:rPr lang="en-US" sz="1200" kern="1200" dirty="0">
                 <a:solidFill>
                   <a:schemeClr val="tx1"/>
                 </a:solidFill>
                 <a:effectLst/>
                 <a:latin typeface="+mn-lt"/>
-                <a:ea typeface="ＭＳ Ｐゴシック" charset="0"/>
-                <a:cs typeface="ＭＳ Ｐゴシック" charset="0"/>
-              </a:rPr>
-              <a:t>Bitbake</a:t>
+                <a:ea typeface="ＭＳ Ｐゴシック"/>
+                <a:cs typeface="Calibri"/>
+              </a:rPr>
+              <a:t>An Application Development Toolkit (ADT) is </a:t>
+            </a:r>
+            <a:r>
+              <a:rPr lang="en-US" dirty="0">
+                <a:ea typeface="ＭＳ Ｐゴシック"/>
+                <a:cs typeface="Calibri"/>
+              </a:rPr>
+              <a:t>provided to</a:t>
             </a:r>
             <a:r>
               <a:rPr lang="en-US" sz="1200" kern="1200" dirty="0">
@@ -3009,35 +3987,31 @@
                 </a:solidFill>
                 <a:effectLst/>
                 <a:latin typeface="+mn-lt"/>
-                <a:ea typeface="ＭＳ Ｐゴシック" charset="0"/>
-                <a:cs typeface="ＭＳ Ｐゴシック" charset="0"/>
-              </a:rPr>
-              <a:t> and </a:t>
-            </a:r>
-            <a:r>
-              <a:rPr lang="en-US" sz="1200" kern="1200" dirty="0" err="1">
+                <a:ea typeface="ＭＳ Ｐゴシック"/>
+                <a:cs typeface="Calibri"/>
+              </a:rPr>
+              <a:t> </a:t>
+            </a:r>
+            <a:r>
+              <a:rPr lang="en-US" dirty="0">
+                <a:ea typeface="ＭＳ Ｐゴシック"/>
+                <a:cs typeface="Calibri"/>
+              </a:rPr>
+              <a:t>enable </a:t>
+            </a:r>
+            <a:r>
+              <a:rPr lang="en-US" sz="1200" kern="1200" dirty="0">
                 <a:solidFill>
                   <a:schemeClr val="tx1"/>
                 </a:solidFill>
                 <a:effectLst/>
                 <a:latin typeface="+mn-lt"/>
-                <a:ea typeface="ＭＳ Ｐゴシック" charset="0"/>
-                <a:cs typeface="ＭＳ Ｐゴシック" charset="0"/>
-              </a:rPr>
-              <a:t>OpenEmbedded</a:t>
-            </a:r>
-            <a:r>
-              <a:rPr lang="en-US" sz="1200" kern="1200" dirty="0">
-                <a:solidFill>
-                  <a:schemeClr val="tx1"/>
-                </a:solidFill>
-                <a:effectLst/>
-                <a:latin typeface="+mn-lt"/>
-                <a:ea typeface="ＭＳ Ｐゴシック" charset="0"/>
-                <a:cs typeface="ＭＳ Ｐゴシック" charset="0"/>
-              </a:rPr>
-              <a:t> Core) and a set of metadata to start building custom embedded Linux systems. An Application Development Toolkit (ADT) is also there to provide application developers a way to write software to run on the custom-built embedded Linux system without knowing much about build systems.</a:t>
-            </a:r>
+                <a:ea typeface="ＭＳ Ｐゴシック"/>
+                <a:cs typeface="Calibri"/>
+              </a:rPr>
+              <a:t>application developers to write software to run on the custom-built embedded Linux system without knowing much about build systems.</a:t>
+            </a:r>
+            <a:endParaRPr lang="en-US" dirty="0"/>
           </a:p>
           <a:p>
             <a:endParaRPr lang="en-US" dirty="0"/>
@@ -3264,21 +4238,7 @@
           <a:bodyPr/>
           <a:lstStyle/>
           <a:p>
-            <a:pPr marL="0" marR="0" lvl="0" indent="0" algn="l" defTabSz="914400" rtl="0" eaLnBrk="0" fontAlgn="base" latinLnBrk="0" hangingPunct="0">
-              <a:lnSpc>
-                <a:spcPct val="100000"/>
-              </a:lnSpc>
-              <a:spcBef>
-                <a:spcPct val="30000"/>
-              </a:spcBef>
-              <a:spcAft>
-                <a:spcPct val="0"/>
-              </a:spcAft>
-              <a:buClrTx/>
-              <a:buSzTx/>
-              <a:buFontTx/>
-              <a:buNone/>
-              <a:tabLst/>
+            <a:pPr>
               <a:defRPr/>
             </a:pPr>
             <a:r>
@@ -3288,8 +4248,8 @@
                 </a:solidFill>
                 <a:effectLst/>
                 <a:latin typeface="+mn-lt"/>
-                <a:ea typeface="ＭＳ Ｐゴシック" charset="0"/>
-                <a:cs typeface="ＭＳ Ｐゴシック" charset="0"/>
+                <a:ea typeface="ＭＳ Ｐゴシック"/>
+                <a:cs typeface="Calibri"/>
               </a:rPr>
               <a:t>The </a:t>
             </a:r>
@@ -3300,8 +4260,8 @@
                 </a:solidFill>
                 <a:effectLst/>
                 <a:latin typeface="+mn-lt"/>
-                <a:ea typeface="ＭＳ Ｐゴシック" charset="0"/>
-                <a:cs typeface="ＭＳ Ｐゴシック" charset="0"/>
+                <a:ea typeface="ＭＳ Ｐゴシック"/>
+                <a:cs typeface="Calibri"/>
               </a:rPr>
               <a:t>Yocto</a:t>
             </a:r>
@@ -3312,10 +4272,29 @@
                 </a:solidFill>
                 <a:effectLst/>
                 <a:latin typeface="+mn-lt"/>
-                <a:ea typeface="ＭＳ Ｐゴシック" charset="0"/>
-                <a:cs typeface="ＭＳ Ｐゴシック" charset="0"/>
-              </a:rPr>
-              <a:t> build system is composed of multiple layers. These layers are essentially containers for the building blocks of the system. The layers do not contain component source code, but they do contain the metadata for them. These are called recipes. Recipes define how to build binary outputs, which are called packages.</a:t>
+                <a:ea typeface="ＭＳ Ｐゴシック"/>
+                <a:cs typeface="Calibri"/>
+              </a:rPr>
+              <a:t> build system is composed of multiple layers. These layers are essentially containers for the building blocks of the system. The layers do not contain component source code, but they do contain the metadata for them. These are called recipes. Recipes define how to build binary outputs, </a:t>
+            </a:r>
+            <a:r>
+              <a:rPr lang="en-US" dirty="0">
+                <a:ea typeface="ＭＳ Ｐゴシック"/>
+                <a:cs typeface="Calibri"/>
+              </a:rPr>
+              <a:t>known as</a:t>
+            </a:r>
+            <a:r>
+              <a:rPr lang="en-US" sz="1200" kern="1200" dirty="0">
+                <a:solidFill>
+                  <a:schemeClr val="tx1"/>
+                </a:solidFill>
+                <a:effectLst/>
+                <a:latin typeface="+mn-lt"/>
+                <a:ea typeface="ＭＳ Ｐゴシック"/>
+                <a:cs typeface="Calibri"/>
+              </a:rPr>
+              <a:t> packages.</a:t>
             </a:r>
           </a:p>
           <a:p>
@@ -3555,40 +4534,49 @@
           <a:lstStyle/>
           <a:p>
             <a:r>
+              <a:rPr lang="en-US" dirty="0">
+                <a:ea typeface="ＭＳ Ｐゴシック"/>
+                <a:cs typeface="Calibri"/>
+              </a:rPr>
+              <a:t>For </a:t>
+            </a:r>
+            <a:r>
+              <a:rPr lang="en-US" dirty="0" err="1">
+                <a:ea typeface="ＭＳ Ｐゴシック"/>
+                <a:cs typeface="Calibri"/>
+              </a:rPr>
+              <a:t>Yocto</a:t>
+            </a:r>
+            <a:r>
               <a:rPr lang="en-US" sz="1200" kern="1200" dirty="0">
                 <a:solidFill>
                   <a:schemeClr val="tx1"/>
                 </a:solidFill>
                 <a:effectLst/>
                 <a:latin typeface="+mn-lt"/>
-                <a:ea typeface="ＭＳ Ｐゴシック" charset="0"/>
-                <a:cs typeface="ＭＳ Ｐゴシック" charset="0"/>
-              </a:rPr>
-              <a:t>For </a:t>
-            </a:r>
-            <a:r>
-              <a:rPr lang="en-US" sz="1200" kern="1200" dirty="0" err="1">
+                <a:ea typeface="ＭＳ Ｐゴシック"/>
+                <a:cs typeface="Calibri"/>
+              </a:rPr>
+              <a:t>, the build system workflow has a </a:t>
+            </a:r>
+            <a:r>
+              <a:rPr lang="en-US" dirty="0">
+                <a:ea typeface="ＭＳ Ｐゴシック"/>
+                <a:cs typeface="Calibri"/>
+              </a:rPr>
+              <a:t>number</a:t>
+            </a:r>
+            <a:r>
+              <a:rPr lang="en-US" sz="1200" kern="1200" dirty="0">
                 <a:solidFill>
                   <a:schemeClr val="tx1"/>
                 </a:solidFill>
                 <a:effectLst/>
                 <a:latin typeface="+mn-lt"/>
-                <a:ea typeface="ＭＳ Ｐゴシック" charset="0"/>
-                <a:cs typeface="ＭＳ Ｐゴシック" charset="0"/>
-              </a:rPr>
-              <a:t>Yocto</a:t>
-            </a:r>
-            <a:r>
-              <a:rPr lang="en-US" sz="1200" kern="1200" dirty="0">
-                <a:solidFill>
-                  <a:schemeClr val="tx1"/>
-                </a:solidFill>
-                <a:effectLst/>
-                <a:latin typeface="+mn-lt"/>
-                <a:ea typeface="ＭＳ Ｐゴシック" charset="0"/>
-                <a:cs typeface="ＭＳ Ｐゴシック" charset="0"/>
-              </a:rPr>
-              <a:t>, the build system workflow has a host of different configuration files, for different purposes.</a:t>
+                <a:ea typeface="ＭＳ Ｐゴシック"/>
+                <a:cs typeface="Calibri"/>
+              </a:rPr>
+              <a:t> of different configuration files, for different purposes.</a:t>
             </a:r>
           </a:p>
           <a:p>
@@ -4077,22 +5065,43 @@
                 </a:solidFill>
                 <a:effectLst/>
                 <a:latin typeface="+mn-lt"/>
-                <a:ea typeface="ＭＳ Ｐゴシック" charset="0"/>
-                <a:cs typeface="ＭＳ Ｐゴシック" charset="0"/>
-              </a:rPr>
-              <a:t>One part of the workflow is the aspect of user configuration. The “build/conf/</a:t>
-            </a:r>
-            <a:r>
-              <a:rPr lang="en-US" sz="1200" kern="1200" dirty="0" err="1">
+                <a:ea typeface="ＭＳ Ｐゴシック"/>
+                <a:cs typeface="Calibri"/>
+              </a:rPr>
+              <a:t>One part of the </a:t>
+            </a:r>
+            <a:r>
+              <a:rPr lang="en-US" dirty="0" err="1">
+                <a:ea typeface="ＭＳ Ｐゴシック"/>
+                <a:cs typeface="Calibri"/>
+              </a:rPr>
+              <a:t>Yocto</a:t>
+            </a:r>
+            <a:r>
+              <a:rPr lang="en-US" dirty="0">
+                <a:ea typeface="ＭＳ Ｐゴシック"/>
+                <a:cs typeface="Calibri"/>
+              </a:rPr>
+              <a:t> workflow</a:t>
+            </a:r>
+            <a:r>
+              <a:rPr lang="en-US" sz="1200" kern="1200" dirty="0">
                 <a:solidFill>
                   <a:schemeClr val="tx1"/>
                 </a:solidFill>
                 <a:effectLst/>
                 <a:latin typeface="+mn-lt"/>
-                <a:ea typeface="ＭＳ Ｐゴシック" charset="0"/>
-                <a:cs typeface="ＭＳ Ｐゴシック" charset="0"/>
-              </a:rPr>
-              <a:t>local.conf</a:t>
+                <a:ea typeface="ＭＳ Ｐゴシック"/>
+                <a:cs typeface="Calibri"/>
+              </a:rPr>
+              <a:t> </a:t>
+            </a:r>
+            <a:r>
+              <a:rPr lang="en-US" dirty="0">
+                <a:ea typeface="ＭＳ Ｐゴシック"/>
+                <a:cs typeface="Calibri"/>
+              </a:rPr>
+              <a:t>involves</a:t>
             </a:r>
             <a:r>
               <a:rPr lang="en-US" sz="1200" kern="1200" dirty="0">
@@ -4101,8 +5110,32 @@
                 </a:solidFill>
                 <a:effectLst/>
                 <a:latin typeface="+mn-lt"/>
-                <a:ea typeface="ＭＳ Ｐゴシック" charset="0"/>
-                <a:cs typeface="ＭＳ Ｐゴシック" charset="0"/>
+                <a:ea typeface="ＭＳ Ｐゴシック"/>
+                <a:cs typeface="Calibri"/>
+              </a:rPr>
+              <a:t> user configuration. The “build/conf/</a:t>
+            </a:r>
+            <a:r>
+              <a:rPr lang="en-US" sz="1200" kern="1200" dirty="0" err="1">
+                <a:solidFill>
+                  <a:schemeClr val="tx1"/>
+                </a:solidFill>
+                <a:effectLst/>
+                <a:latin typeface="+mn-lt"/>
+                <a:ea typeface="ＭＳ Ｐゴシック"/>
+                <a:cs typeface="Calibri"/>
+              </a:rPr>
+              <a:t>local.conf</a:t>
+            </a:r>
+            <a:r>
+              <a:rPr lang="en-US" sz="1200" kern="1200" dirty="0">
+                <a:solidFill>
+                  <a:schemeClr val="tx1"/>
+                </a:solidFill>
+                <a:effectLst/>
+                <a:latin typeface="+mn-lt"/>
+                <a:ea typeface="ＭＳ Ｐゴシック"/>
+                <a:cs typeface="Calibri"/>
               </a:rPr>
               <a:t>” file is used to override the default configuration and to define what to build. Some settings include the following:</a:t>
             </a:r>
@@ -4439,22 +5472,43 @@
                 </a:solidFill>
                 <a:effectLst/>
                 <a:latin typeface="+mn-lt"/>
-                <a:ea typeface="ＭＳ Ｐゴシック" charset="0"/>
-                <a:cs typeface="ＭＳ Ｐゴシック" charset="0"/>
-              </a:rPr>
-              <a:t>Another aspect of the workflow is Metadata. Metadata can be thought of as the description of data. In </a:t>
-            </a:r>
-            <a:r>
-              <a:rPr lang="en-US" sz="1200" kern="1200" dirty="0" err="1">
+                <a:ea typeface="ＭＳ Ｐゴシック"/>
+                <a:cs typeface="Calibri"/>
+              </a:rPr>
+              <a:t>Another aspect of the </a:t>
+            </a:r>
+            <a:r>
+              <a:rPr lang="en-US" dirty="0" err="1">
+                <a:ea typeface="ＭＳ Ｐゴシック"/>
+                <a:cs typeface="Calibri"/>
+              </a:rPr>
+              <a:t>Yocto</a:t>
+            </a:r>
+            <a:r>
+              <a:rPr lang="en-US" dirty="0">
+                <a:ea typeface="ＭＳ Ｐゴシック"/>
+                <a:cs typeface="Calibri"/>
+              </a:rPr>
+              <a:t> workflow</a:t>
+            </a:r>
+            <a:r>
+              <a:rPr lang="en-US" sz="1200" kern="1200" dirty="0">
                 <a:solidFill>
                   <a:schemeClr val="tx1"/>
                 </a:solidFill>
                 <a:effectLst/>
                 <a:latin typeface="+mn-lt"/>
-                <a:ea typeface="ＭＳ Ｐゴシック" charset="0"/>
-                <a:cs typeface="ＭＳ Ｐゴシック" charset="0"/>
-              </a:rPr>
-              <a:t>Yocto</a:t>
+                <a:ea typeface="ＭＳ Ｐゴシック"/>
+                <a:cs typeface="Calibri"/>
+              </a:rPr>
+              <a:t> is </a:t>
+            </a:r>
+            <a:r>
+              <a:rPr lang="en-US" dirty="0">
+                <a:ea typeface="ＭＳ Ｐゴシック"/>
+                <a:cs typeface="Calibri"/>
+              </a:rPr>
+              <a:t>metadata</a:t>
             </a:r>
             <a:r>
               <a:rPr lang="en-US" sz="1200" kern="1200" dirty="0">
@@ -4463,10 +5517,10 @@
                 </a:solidFill>
                 <a:effectLst/>
                 <a:latin typeface="+mn-lt"/>
-                <a:ea typeface="ＭＳ Ｐゴシック" charset="0"/>
-                <a:cs typeface="ＭＳ Ｐゴシック" charset="0"/>
-              </a:rPr>
-              <a:t>, there are recipes that can be used for the purpose of building packages. These recipes inherit the system configuration and adjust it to describe how to build and package the software. These can be extended and enhanced via layers. They are also compatible with </a:t>
+                <a:ea typeface="ＭＳ Ｐゴシック"/>
+                <a:cs typeface="Calibri"/>
+              </a:rPr>
+              <a:t>. Metadata can be thought of as the description of data. In </a:t>
             </a:r>
             <a:r>
               <a:rPr lang="en-US" sz="1200" kern="1200" dirty="0" err="1">
@@ -4475,10 +5529,10 @@
                 </a:solidFill>
                 <a:effectLst/>
                 <a:latin typeface="+mn-lt"/>
-                <a:ea typeface="ＭＳ Ｐゴシック" charset="0"/>
-                <a:cs typeface="ＭＳ Ｐゴシック" charset="0"/>
-              </a:rPr>
-              <a:t>OpenEmbedded</a:t>
+                <a:ea typeface="ＭＳ Ｐゴシック"/>
+                <a:cs typeface="Calibri"/>
+              </a:rPr>
+              <a:t>Yocto</a:t>
             </a:r>
             <a:r>
               <a:rPr lang="en-US" sz="1200" kern="1200" dirty="0">
@@ -4487,8 +5541,51 @@
                 </a:solidFill>
                 <a:effectLst/>
                 <a:latin typeface="+mn-lt"/>
-                <a:ea typeface="ＭＳ Ｐゴシック" charset="0"/>
-                <a:cs typeface="ＭＳ Ｐゴシック" charset="0"/>
+                <a:ea typeface="ＭＳ Ｐゴシック"/>
+                <a:cs typeface="Calibri"/>
+              </a:rPr>
+              <a:t>, recipes </a:t>
+            </a:r>
+            <a:r>
+              <a:rPr lang="en-US" dirty="0">
+                <a:ea typeface="ＭＳ Ｐゴシック"/>
+                <a:cs typeface="Calibri"/>
+              </a:rPr>
+              <a:t>are used</a:t>
+            </a:r>
+            <a:r>
+              <a:rPr lang="en-US" sz="1200" kern="1200" dirty="0">
+                <a:solidFill>
+                  <a:schemeClr val="tx1"/>
+                </a:solidFill>
+                <a:effectLst/>
+                <a:latin typeface="+mn-lt"/>
+                <a:ea typeface="ＭＳ Ｐゴシック"/>
+                <a:cs typeface="Calibri"/>
+              </a:rPr>
+              <a:t> for building packages. These recipes inherit the system configuration and adjust it to describe how to build and package the software. These can be extended and enhanced via layers. They are also compatible with </a:t>
+            </a:r>
+            <a:r>
+              <a:rPr lang="en-US" sz="1200" kern="1200" dirty="0" err="1">
+                <a:solidFill>
+                  <a:schemeClr val="tx1"/>
+                </a:solidFill>
+                <a:effectLst/>
+                <a:latin typeface="+mn-lt"/>
+                <a:ea typeface="ＭＳ Ｐゴシック"/>
+                <a:cs typeface="Calibri"/>
+              </a:rPr>
+              <a:t>OpenEmbedded</a:t>
+            </a:r>
+            <a:r>
+              <a:rPr lang="en-US" sz="1200" kern="1200" dirty="0">
+                <a:solidFill>
+                  <a:schemeClr val="tx1"/>
+                </a:solidFill>
+                <a:effectLst/>
+                <a:latin typeface="+mn-lt"/>
+                <a:ea typeface="ＭＳ Ｐゴシック"/>
+                <a:cs typeface="Calibri"/>
               </a:rPr>
               <a:t>. </a:t>
             </a:r>
@@ -4619,13 +5716,58 @@
                 </a:solidFill>
                 <a:effectLst/>
                 <a:latin typeface="+mn-lt"/>
-                <a:ea typeface="ＭＳ Ｐゴシック" charset="0"/>
-                <a:cs typeface="ＭＳ Ｐゴシック" charset="0"/>
-              </a:rPr>
-              <a:t>Machine configuration is another stage in the workflow and </a:t>
+                <a:ea typeface="ＭＳ Ｐゴシック"/>
+                <a:cs typeface="Calibri"/>
+              </a:rPr>
+              <a:t>Machine configuration is another stage in the workflow</a:t>
+            </a:r>
+            <a:r>
+              <a:rPr lang="en-US" dirty="0">
+                <a:ea typeface="ＭＳ Ｐゴシック"/>
+                <a:cs typeface="Calibri"/>
+              </a:rPr>
+              <a:t>,</a:t>
+            </a:r>
+            <a:r>
+              <a:rPr lang="en-US" sz="1200" kern="1200" dirty="0">
+                <a:solidFill>
+                  <a:schemeClr val="tx1"/>
+                </a:solidFill>
+                <a:effectLst/>
+                <a:latin typeface="+mn-lt"/>
+                <a:ea typeface="ＭＳ Ｐゴシック"/>
+                <a:cs typeface="Calibri"/>
+              </a:rPr>
+              <a:t> and </a:t>
             </a:r>
             <a:r>
               <a:rPr lang="en-US" sz="1200" kern="1200" dirty="0" err="1">
+                <a:solidFill>
+                  <a:schemeClr val="tx1"/>
+                </a:solidFill>
+                <a:effectLst/>
+                <a:latin typeface="+mn-lt"/>
+                <a:ea typeface="ＭＳ Ｐゴシック"/>
+                <a:cs typeface="Calibri"/>
+              </a:rPr>
+              <a:t>Yocto</a:t>
+            </a:r>
+            <a:r>
+              <a:rPr lang="en-US" sz="1200" kern="1200" dirty="0">
+                <a:solidFill>
+                  <a:schemeClr val="tx1"/>
+                </a:solidFill>
+                <a:effectLst/>
+                <a:latin typeface="+mn-lt"/>
+                <a:ea typeface="ＭＳ Ｐゴシック"/>
+                <a:cs typeface="Calibri"/>
+              </a:rPr>
+              <a:t> provides configuration files to describe a machine. They can define board-specific kernel configurations or process and system-on-chip tuning files.</a:t>
+            </a:r>
+          </a:p>
+          <a:p>
+            <a:r>
+              <a:rPr lang="en-US" sz="1200" kern="1200" dirty="0">
                 <a:solidFill>
                   <a:schemeClr val="tx1"/>
                 </a:solidFill>
@@ -4634,8 +5776,10 @@
                 <a:ea typeface="ＭＳ Ｐゴシック" charset="0"/>
                 <a:cs typeface="ＭＳ Ｐゴシック" charset="0"/>
               </a:rPr>
-              <a:t>Yocto</a:t>
-            </a:r>
+              <a:t> </a:t>
+            </a:r>
+          </a:p>
+          <a:p>
             <a:r>
               <a:rPr lang="en-US" sz="1200" kern="1200" dirty="0">
                 <a:solidFill>
@@ -4646,7 +5790,7 @@
                 <a:ea typeface="ＭＳ Ｐゴシック" charset="0"/>
                 <a:cs typeface="ＭＳ Ｐゴシック" charset="0"/>
               </a:rPr>
-              <a:t> provides configuration files to describe a machine. They can define board-specific kernel configurations or process and system-on-chip tuning files.</a:t>
+              <a:t>The machine configuration refers to kernel sources. </a:t>
             </a:r>
           </a:p>
           <a:p>
@@ -4665,6 +5809,70 @@
           </a:p>
           <a:p>
             <a:r>
+              <a:rPr lang="en-US" dirty="0">
+                <a:ea typeface="ＭＳ Ｐゴシック"/>
+                <a:cs typeface="Calibri"/>
+              </a:rPr>
+              <a:t>As with other stages</a:t>
+            </a:r>
+            <a:r>
+              <a:rPr lang="en-US" sz="1200" kern="1200" dirty="0">
+                <a:solidFill>
+                  <a:schemeClr val="tx1"/>
+                </a:solidFill>
+                <a:effectLst/>
+                <a:latin typeface="+mn-lt"/>
+                <a:ea typeface="ＭＳ Ｐゴシック"/>
+                <a:cs typeface="Calibri"/>
+              </a:rPr>
+              <a:t>, this </a:t>
+            </a:r>
+            <a:r>
+              <a:rPr lang="en-US" dirty="0">
+                <a:ea typeface="ＭＳ Ｐゴシック"/>
+                <a:cs typeface="Calibri"/>
+              </a:rPr>
+              <a:t>step is</a:t>
+            </a:r>
+            <a:r>
+              <a:rPr lang="en-US" sz="1200" kern="1200" dirty="0">
+                <a:solidFill>
+                  <a:schemeClr val="tx1"/>
+                </a:solidFill>
+                <a:effectLst/>
+                <a:latin typeface="+mn-lt"/>
+                <a:ea typeface="ＭＳ Ｐゴシック"/>
+                <a:cs typeface="Calibri"/>
+              </a:rPr>
+              <a:t> compatible with </a:t>
+            </a:r>
+            <a:r>
+              <a:rPr lang="en-US" sz="1200" kern="1200" dirty="0" err="1">
+                <a:solidFill>
+                  <a:schemeClr val="tx1"/>
+                </a:solidFill>
+                <a:effectLst/>
+                <a:latin typeface="+mn-lt"/>
+                <a:ea typeface="ＭＳ Ｐゴシック"/>
+                <a:cs typeface="Calibri"/>
+              </a:rPr>
+              <a:t>OpenEmbedded</a:t>
+            </a:r>
+            <a:r>
+              <a:rPr lang="en-US" sz="1200" kern="1200" dirty="0">
+                <a:solidFill>
+                  <a:schemeClr val="tx1"/>
+                </a:solidFill>
+                <a:effectLst/>
+                <a:latin typeface="+mn-lt"/>
+                <a:ea typeface="ＭＳ Ｐゴシック"/>
+                <a:cs typeface="Calibri"/>
+              </a:rPr>
+              <a:t>.</a:t>
+            </a:r>
+          </a:p>
+          <a:p>
+            <a:r>
               <a:rPr lang="en-US" sz="1200" kern="1200" dirty="0">
                 <a:solidFill>
                   <a:schemeClr val="tx1"/>
@@ -4674,10 +5882,17 @@
                 <a:ea typeface="ＭＳ Ｐゴシック" charset="0"/>
                 <a:cs typeface="ＭＳ Ｐゴシック" charset="0"/>
               </a:rPr>
-              <a:t>The machine configuration refers to kernel sources. </a:t>
-            </a:r>
-          </a:p>
-          <a:p>
+              <a:t> </a:t>
+            </a:r>
+          </a:p>
+          <a:p>
+            <a:r>
+              <a:rPr lang="en-US" dirty="0">
+                <a:ea typeface="ＭＳ Ｐゴシック"/>
+                <a:cs typeface="Calibri"/>
+              </a:rPr>
+              <a:t>Here is</a:t>
+            </a:r>
             <a:r>
               <a:rPr lang="en-US" sz="1200" kern="1200" dirty="0">
                 <a:solidFill>
@@ -4685,13 +5900,18 @@
                 </a:solidFill>
                 <a:effectLst/>
                 <a:latin typeface="+mn-lt"/>
-                <a:ea typeface="ＭＳ Ｐゴシック" charset="0"/>
-                <a:cs typeface="ＭＳ Ｐゴシック" charset="0"/>
-              </a:rPr>
-              <a:t> </a:t>
-            </a:r>
-          </a:p>
-          <a:p>
+                <a:ea typeface="ＭＳ Ｐゴシック"/>
+                <a:cs typeface="Calibri"/>
+              </a:rPr>
+              <a:t> an example </a:t>
+            </a:r>
+            <a:r>
+              <a:rPr lang="en-US" dirty="0">
+                <a:ea typeface="ＭＳ Ｐゴシック"/>
+                <a:cs typeface="Calibri"/>
+              </a:rPr>
+              <a:t>of a machine configuration</a:t>
+            </a:r>
             <a:r>
               <a:rPr lang="en-US" sz="1200" kern="1200" dirty="0">
                 <a:solidFill>
@@ -4699,62 +5919,10 @@
                 </a:solidFill>
                 <a:effectLst/>
                 <a:latin typeface="+mn-lt"/>
-                <a:ea typeface="ＭＳ Ｐゴシック" charset="0"/>
-                <a:cs typeface="ＭＳ Ｐゴシック" charset="0"/>
-              </a:rPr>
-              <a:t>Again, this stage is compatible with </a:t>
-            </a:r>
-            <a:r>
-              <a:rPr lang="en-US" sz="1200" kern="1200" dirty="0" err="1">
-                <a:solidFill>
-                  <a:schemeClr val="tx1"/>
-                </a:solidFill>
-                <a:effectLst/>
-                <a:latin typeface="+mn-lt"/>
-                <a:ea typeface="ＭＳ Ｐゴシック" charset="0"/>
-                <a:cs typeface="ＭＳ Ｐゴシック" charset="0"/>
-              </a:rPr>
-              <a:t>OpenEmbedded</a:t>
-            </a:r>
-            <a:r>
-              <a:rPr lang="en-US" sz="1200" kern="1200" dirty="0">
-                <a:solidFill>
-                  <a:schemeClr val="tx1"/>
-                </a:solidFill>
-                <a:effectLst/>
-                <a:latin typeface="+mn-lt"/>
-                <a:ea typeface="ＭＳ Ｐゴシック" charset="0"/>
-                <a:cs typeface="ＭＳ Ｐゴシック" charset="0"/>
-              </a:rPr>
-              <a:t>.</a:t>
-            </a:r>
-          </a:p>
-          <a:p>
-            <a:r>
-              <a:rPr lang="en-US" sz="1200" kern="1200" dirty="0">
-                <a:solidFill>
-                  <a:schemeClr val="tx1"/>
-                </a:solidFill>
-                <a:effectLst/>
-                <a:latin typeface="+mn-lt"/>
-                <a:ea typeface="ＭＳ Ｐゴシック" charset="0"/>
-                <a:cs typeface="ＭＳ Ｐゴシック" charset="0"/>
-              </a:rPr>
-              <a:t> </a:t>
-            </a:r>
-          </a:p>
-          <a:p>
-            <a:r>
-              <a:rPr lang="en-US" sz="1200" kern="1200" dirty="0">
-                <a:solidFill>
-                  <a:schemeClr val="tx1"/>
-                </a:solidFill>
-                <a:effectLst/>
-                <a:latin typeface="+mn-lt"/>
-                <a:ea typeface="ＭＳ Ｐゴシック" charset="0"/>
-                <a:cs typeface="ＭＳ Ｐゴシック" charset="0"/>
-              </a:rPr>
-              <a:t>We can see an example configuration file here.</a:t>
+                <a:ea typeface="ＭＳ Ｐゴシック"/>
+                <a:cs typeface="Calibri"/>
+              </a:rPr>
+              <a:t> file.</a:t>
             </a:r>
           </a:p>
           <a:p>
@@ -4855,14 +6023,165 @@
                 </a:solidFill>
                 <a:effectLst/>
                 <a:latin typeface="+mn-lt"/>
-                <a:ea typeface="ＭＳ Ｐゴシック" charset="0"/>
-                <a:cs typeface="ＭＳ Ｐゴシック" charset="0"/>
-              </a:rPr>
-              <a:t>Distribution policies that affect the way individual recipes are built are defined. They may</a:t>
-            </a:r>
-          </a:p>
-          <a:p>
-            <a:pPr lvl="1"/>
+                <a:ea typeface="ＭＳ Ｐゴシック"/>
+                <a:cs typeface="Calibri"/>
+              </a:rPr>
+              <a:t>Distribution policies that affect the way individual recipes are built are defined</a:t>
+            </a:r>
+            <a:r>
+              <a:rPr lang="en-US" dirty="0">
+                <a:ea typeface="ＭＳ Ｐゴシック"/>
+                <a:cs typeface="Calibri"/>
+              </a:rPr>
+              <a:t> in </a:t>
+            </a:r>
+            <a:r>
+              <a:rPr lang="en-US" dirty="0" err="1">
+                <a:ea typeface="ＭＳ Ｐゴシック"/>
+                <a:cs typeface="Calibri"/>
+              </a:rPr>
+              <a:t>Yocto</a:t>
+            </a:r>
+            <a:r>
+              <a:rPr lang="en-US" sz="1200" kern="1200" dirty="0">
+                <a:solidFill>
+                  <a:schemeClr val="tx1"/>
+                </a:solidFill>
+                <a:effectLst/>
+                <a:latin typeface="+mn-lt"/>
+                <a:ea typeface="ＭＳ Ｐゴシック"/>
+                <a:cs typeface="Calibri"/>
+              </a:rPr>
+              <a:t>. </a:t>
+            </a:r>
+            <a:r>
+              <a:rPr lang="en-US" dirty="0">
+                <a:ea typeface="ＭＳ Ｐゴシック"/>
+                <a:cs typeface="Calibri"/>
+              </a:rPr>
+              <a:t>These</a:t>
+            </a:r>
+            <a:r>
+              <a:rPr lang="en-US" sz="1200" kern="1200" dirty="0">
+                <a:solidFill>
+                  <a:schemeClr val="tx1"/>
+                </a:solidFill>
+                <a:effectLst/>
+                <a:latin typeface="+mn-lt"/>
+                <a:ea typeface="ＭＳ Ｐゴシック"/>
+                <a:cs typeface="Calibri"/>
+              </a:rPr>
+              <a:t> </a:t>
+            </a:r>
+            <a:r>
+              <a:rPr lang="en-US" dirty="0">
+                <a:ea typeface="ＭＳ Ｐゴシック"/>
+                <a:cs typeface="Calibri"/>
+              </a:rPr>
+              <a:t>policies </a:t>
+            </a:r>
+            <a:r>
+              <a:rPr lang="en-US" sz="1200" kern="1200" dirty="0">
+                <a:solidFill>
+                  <a:schemeClr val="tx1"/>
+                </a:solidFill>
+                <a:effectLst/>
+                <a:latin typeface="+mn-lt"/>
+                <a:ea typeface="ＭＳ Ｐゴシック"/>
+                <a:cs typeface="Calibri"/>
+              </a:rPr>
+              <a:t>may</a:t>
+            </a:r>
+            <a:r>
+              <a:rPr lang="en-US" dirty="0">
+                <a:ea typeface="ＭＳ Ｐゴシック"/>
+                <a:cs typeface="Calibri"/>
+              </a:rPr>
+              <a:t>:</a:t>
+            </a:r>
+            <a:endParaRPr lang="en-US" sz="1200" kern="1200" dirty="0">
+              <a:solidFill>
+                <a:schemeClr val="tx1"/>
+              </a:solidFill>
+              <a:effectLst/>
+              <a:latin typeface="+mn-lt"/>
+              <a:ea typeface="ＭＳ Ｐゴシック"/>
+              <a:cs typeface="Calibri"/>
+            </a:endParaRPr>
+          </a:p>
+          <a:p>
+            <a:pPr marL="742950" lvl="1" indent="-285750">
+              <a:buFont typeface="Calibri"/>
+              <a:buChar char="-"/>
+            </a:pPr>
+            <a:r>
+              <a:rPr lang="en-US" sz="1200" kern="1200">
+                <a:solidFill>
+                  <a:schemeClr val="tx1"/>
+                </a:solidFill>
+                <a:effectLst/>
+                <a:latin typeface="+mn-lt"/>
+                <a:ea typeface="ＭＳ Ｐゴシック"/>
+                <a:cs typeface="Calibri"/>
+              </a:rPr>
+              <a:t>Set alternative preferred versions of recipes.</a:t>
+            </a:r>
+          </a:p>
+          <a:p>
+            <a:pPr marL="742950" lvl="1" indent="-285750">
+              <a:buFont typeface="Calibri"/>
+              <a:buChar char="-"/>
+            </a:pPr>
+            <a:r>
+              <a:rPr lang="en-US" sz="1200" kern="1200" dirty="0">
+                <a:solidFill>
+                  <a:schemeClr val="tx1"/>
+                </a:solidFill>
+                <a:effectLst/>
+                <a:latin typeface="+mn-lt"/>
+                <a:ea typeface="ＭＳ Ｐゴシック"/>
+                <a:cs typeface="Calibri"/>
+              </a:rPr>
+              <a:t>Enable/disable features.</a:t>
+            </a:r>
+          </a:p>
+          <a:p>
+            <a:pPr marL="742950" lvl="1" indent="-285750">
+              <a:buFont typeface="Calibri"/>
+              <a:buChar char="-"/>
+            </a:pPr>
+            <a:r>
+              <a:rPr lang="en-US" sz="1200" kern="1200" dirty="0">
+                <a:solidFill>
+                  <a:schemeClr val="tx1"/>
+                </a:solidFill>
+                <a:effectLst/>
+                <a:latin typeface="+mn-lt"/>
+                <a:ea typeface="ＭＳ Ｐゴシック"/>
+                <a:cs typeface="Calibri"/>
+              </a:rPr>
+              <a:t>Configure specific package rules.</a:t>
+            </a:r>
+          </a:p>
+          <a:p>
+            <a:pPr marL="742950" lvl="1" indent="-285750">
+              <a:buFont typeface="Calibri"/>
+              <a:buChar char="-"/>
+            </a:pPr>
+            <a:r>
+              <a:rPr lang="en-US" sz="1200" kern="1200" dirty="0">
+                <a:solidFill>
+                  <a:schemeClr val="tx1"/>
+                </a:solidFill>
+                <a:effectLst/>
+                <a:latin typeface="+mn-lt"/>
+                <a:ea typeface="ＭＳ Ｐゴシック"/>
+                <a:cs typeface="Calibri"/>
+              </a:rPr>
+              <a:t>Adjust image deployment settings.</a:t>
+            </a:r>
+          </a:p>
+          <a:p>
             <a:r>
               <a:rPr lang="en-US" sz="1200" kern="1200" dirty="0">
                 <a:solidFill>
@@ -4873,11 +6192,10 @@
                 <a:ea typeface="ＭＳ Ｐゴシック" charset="0"/>
                 <a:cs typeface="ＭＳ Ｐゴシック" charset="0"/>
               </a:rPr>
-              <a:t>Set alternative preferred versions of recipes.</a:t>
-            </a:r>
-          </a:p>
-          <a:p>
-            <a:pPr lvl="1"/>
+              <a:t> </a:t>
+            </a:r>
+          </a:p>
+          <a:p>
             <a:r>
               <a:rPr lang="en-US" sz="1200" kern="1200" dirty="0">
                 <a:solidFill>
@@ -4888,11 +6206,10 @@
                 <a:ea typeface="ＭＳ Ｐゴシック" charset="0"/>
                 <a:cs typeface="ＭＳ Ｐゴシック" charset="0"/>
               </a:rPr>
-              <a:t>Enable/disable features.</a:t>
-            </a:r>
-          </a:p>
-          <a:p>
-            <a:pPr lvl="1"/>
+              <a:t>They are enabled via the DISTRO setting.</a:t>
+            </a:r>
+          </a:p>
+          <a:p>
             <a:r>
               <a:rPr lang="en-US" sz="1200" kern="1200" dirty="0">
                 <a:solidFill>
@@ -4903,11 +6220,10 @@
                 <a:ea typeface="ＭＳ Ｐゴシック" charset="0"/>
                 <a:cs typeface="ＭＳ Ｐゴシック" charset="0"/>
               </a:rPr>
-              <a:t>Configure specific package rules.</a:t>
-            </a:r>
-          </a:p>
-          <a:p>
-            <a:pPr lvl="1"/>
+              <a:t> </a:t>
+            </a:r>
+          </a:p>
+          <a:p>
             <a:r>
               <a:rPr lang="en-US" sz="1200" kern="1200" dirty="0">
                 <a:solidFill>
@@ -4918,38 +6234,50 @@
                 <a:ea typeface="ＭＳ Ｐゴシック" charset="0"/>
                 <a:cs typeface="ＭＳ Ｐゴシック" charset="0"/>
               </a:rPr>
-              <a:t>Adjust image deployment settings.</a:t>
-            </a:r>
-          </a:p>
-          <a:p>
-            <a:r>
-              <a:rPr lang="en-US" sz="1200" kern="1200" dirty="0">
+              <a:t>There are four predefined settings:</a:t>
+            </a:r>
+          </a:p>
+          <a:p>
+            <a:pPr marL="742950" lvl="1" indent="-285750">
+              <a:buFont typeface="Calibri"/>
+              <a:buChar char="-"/>
+            </a:pPr>
+            <a:r>
+              <a:rPr lang="en-US" sz="1200" kern="1200">
                 <a:solidFill>
                   <a:schemeClr val="tx1"/>
                 </a:solidFill>
                 <a:effectLst/>
                 <a:latin typeface="+mn-lt"/>
-                <a:ea typeface="ＭＳ Ｐゴシック" charset="0"/>
-                <a:cs typeface="ＭＳ Ｐゴシック" charset="0"/>
-              </a:rPr>
-              <a:t> </a:t>
-            </a:r>
-          </a:p>
-          <a:p>
-            <a:r>
-              <a:rPr lang="en-US" sz="1200" kern="1200" dirty="0">
+                <a:ea typeface="ＭＳ Ｐゴシック"/>
+                <a:cs typeface="Calibri"/>
+              </a:rPr>
+              <a:t>Poky-bleeding, which enables bleeding edge packages</a:t>
+            </a:r>
+          </a:p>
+          <a:p>
+            <a:pPr marL="742950" lvl="1" indent="-285750">
+              <a:buFont typeface="Calibri"/>
+              <a:buChar char="-"/>
+            </a:pPr>
+            <a:r>
+              <a:rPr lang="en-US" sz="1200" kern="1200">
                 <a:solidFill>
                   <a:schemeClr val="tx1"/>
                 </a:solidFill>
                 <a:effectLst/>
                 <a:latin typeface="+mn-lt"/>
-                <a:ea typeface="ＭＳ Ｐゴシック" charset="0"/>
-                <a:cs typeface="ＭＳ Ｐゴシック" charset="0"/>
-              </a:rPr>
-              <a:t>They are enabled via the DISTRO setting.</a:t>
-            </a:r>
-          </a:p>
-          <a:p>
+                <a:ea typeface="ＭＳ Ｐゴシック"/>
+                <a:cs typeface="Calibri"/>
+              </a:rPr>
+              <a:t>Poky, which is the core distribution definition and defines the base</a:t>
+            </a:r>
+          </a:p>
+          <a:p>
+            <a:pPr marL="742950" lvl="1" indent="-285750">
+              <a:buFont typeface="Calibri"/>
+              <a:buChar char="-"/>
+            </a:pPr>
             <a:r>
               <a:rPr lang="en-US" sz="1200" kern="1200" dirty="0">
                 <a:solidFill>
@@ -4957,28 +6285,23 @@
                 </a:solidFill>
                 <a:effectLst/>
                 <a:latin typeface="+mn-lt"/>
-                <a:ea typeface="ＭＳ Ｐゴシック" charset="0"/>
-                <a:cs typeface="ＭＳ Ｐゴシック" charset="0"/>
-              </a:rPr>
-              <a:t> </a:t>
-            </a:r>
-          </a:p>
-          <a:p>
-            <a:r>
-              <a:rPr lang="en-US" sz="1200" kern="1200" dirty="0">
+                <a:ea typeface="ＭＳ Ｐゴシック"/>
+                <a:cs typeface="Calibri"/>
+              </a:rPr>
+              <a:t>Poky-</a:t>
+            </a:r>
+            <a:r>
+              <a:rPr lang="en-US" sz="1200" kern="1200" dirty="0" err="1">
                 <a:solidFill>
                   <a:schemeClr val="tx1"/>
                 </a:solidFill>
                 <a:effectLst/>
                 <a:latin typeface="+mn-lt"/>
-                <a:ea typeface="ＭＳ Ｐゴシック" charset="0"/>
-                <a:cs typeface="ＭＳ Ｐゴシック" charset="0"/>
-              </a:rPr>
-              <a:t>There are four predefined settings:</a:t>
-            </a:r>
-          </a:p>
-          <a:p>
-            <a:pPr lvl="1"/>
+                <a:ea typeface="ＭＳ Ｐゴシック"/>
+                <a:cs typeface="Calibri"/>
+              </a:rPr>
+              <a:t>lsb</a:t>
+            </a:r>
             <a:r>
               <a:rPr lang="en-US" sz="1200" kern="1200" dirty="0">
                 <a:solidFill>
@@ -4986,14 +6309,18 @@
                 </a:solidFill>
                 <a:effectLst/>
                 <a:latin typeface="+mn-lt"/>
-                <a:ea typeface="ＭＳ Ｐゴシック" charset="0"/>
-                <a:cs typeface="ＭＳ Ｐゴシック" charset="0"/>
-              </a:rPr>
-              <a:t>Poky-bleeding, which enables bleeding edge packages</a:t>
-            </a:r>
-          </a:p>
-          <a:p>
-            <a:pPr lvl="1"/>
+                <a:ea typeface="ＭＳ Ｐゴシック"/>
+                <a:cs typeface="Calibri"/>
+              </a:rPr>
+              <a:t>, which enables items required for </a:t>
+            </a:r>
+            <a:r>
+              <a:rPr lang="en-US" dirty="0">
+                <a:ea typeface="ＭＳ Ｐゴシック"/>
+                <a:cs typeface="Calibri"/>
+              </a:rPr>
+              <a:t>Linux Standard Base (LSB)</a:t>
+            </a:r>
             <a:r>
               <a:rPr lang="en-US" sz="1200" kern="1200" dirty="0">
                 <a:solidFill>
@@ -5001,14 +6328,17 @@
                 </a:solidFill>
                 <a:effectLst/>
                 <a:latin typeface="+mn-lt"/>
-                <a:ea typeface="ＭＳ Ｐゴシック" charset="0"/>
-                <a:cs typeface="ＭＳ Ｐゴシック" charset="0"/>
-              </a:rPr>
-              <a:t>Poky, which is the core distribution definition and defines the base</a:t>
-            </a:r>
-          </a:p>
-          <a:p>
-            <a:pPr lvl="1"/>
+                <a:ea typeface="ＭＳ Ｐゴシック"/>
+                <a:cs typeface="Calibri"/>
+              </a:rPr>
+              <a:t> support</a:t>
+            </a:r>
+          </a:p>
+          <a:p>
+            <a:pPr marL="742950" lvl="1" indent="-285750">
+              <a:buFont typeface="Calibri"/>
+              <a:buChar char="-"/>
+            </a:pPr>
             <a:r>
               <a:rPr lang="en-US" sz="1200" kern="1200" dirty="0">
                 <a:solidFill>
@@ -5016,47 +6346,8 @@
                 </a:solidFill>
                 <a:effectLst/>
                 <a:latin typeface="+mn-lt"/>
-                <a:ea typeface="ＭＳ Ｐゴシック" charset="0"/>
-                <a:cs typeface="ＭＳ Ｐゴシック" charset="0"/>
-              </a:rPr>
-              <a:t>Poky-</a:t>
-            </a:r>
-            <a:r>
-              <a:rPr lang="en-US" sz="1200" kern="1200" dirty="0" err="1">
-                <a:solidFill>
-                  <a:schemeClr val="tx1"/>
-                </a:solidFill>
-                <a:effectLst/>
-                <a:latin typeface="+mn-lt"/>
-                <a:ea typeface="ＭＳ Ｐゴシック" charset="0"/>
-                <a:cs typeface="ＭＳ Ｐゴシック" charset="0"/>
-              </a:rPr>
-              <a:t>lsb</a:t>
-            </a:r>
-            <a:r>
-              <a:rPr lang="en-US" sz="1200" kern="1200" dirty="0">
-                <a:solidFill>
-                  <a:schemeClr val="tx1"/>
-                </a:solidFill>
-                <a:effectLst/>
-                <a:latin typeface="+mn-lt"/>
-                <a:ea typeface="ＭＳ Ｐゴシック" charset="0"/>
-                <a:cs typeface="ＭＳ Ｐゴシック" charset="0"/>
-              </a:rPr>
-              <a:t>, which enables items required for LSB support</a:t>
-            </a:r>
-          </a:p>
-          <a:p>
-            <a:pPr lvl="1"/>
-            <a:r>
-              <a:rPr lang="en-US" sz="1200" kern="1200" dirty="0">
-                <a:solidFill>
-                  <a:schemeClr val="tx1"/>
-                </a:solidFill>
-                <a:effectLst/>
-                <a:latin typeface="+mn-lt"/>
-                <a:ea typeface="ＭＳ Ｐゴシック" charset="0"/>
-                <a:cs typeface="ＭＳ Ｐゴシック" charset="0"/>
+                <a:ea typeface="ＭＳ Ｐゴシック"/>
+                <a:cs typeface="Calibri"/>
               </a:rPr>
               <a:t>Poky-tiny, which is for constructing a smaller-than-usual system</a:t>
             </a:r>
@@ -5153,6 +6444,84 @@
           <a:lstStyle/>
           <a:p>
             <a:r>
+              <a:rPr lang="en-US" dirty="0">
+                <a:ea typeface="ＭＳ Ｐゴシック"/>
+                <a:cs typeface="Calibri"/>
+              </a:rPr>
+              <a:t>Given</a:t>
+            </a:r>
+            <a:r>
+              <a:rPr lang="en-US" sz="1200" kern="1200" dirty="0">
+                <a:solidFill>
+                  <a:schemeClr val="tx1"/>
+                </a:solidFill>
+                <a:effectLst/>
+                <a:latin typeface="+mn-lt"/>
+                <a:ea typeface="ＭＳ Ｐゴシック"/>
+                <a:cs typeface="Calibri"/>
+              </a:rPr>
+              <a:t> </a:t>
+            </a:r>
+            <a:r>
+              <a:rPr lang="en-US" dirty="0">
+                <a:ea typeface="ＭＳ Ｐゴシック"/>
+                <a:cs typeface="Calibri"/>
+              </a:rPr>
+              <a:t>that </a:t>
+            </a:r>
+            <a:r>
+              <a:rPr lang="en-US" sz="1200" kern="1200" dirty="0">
+                <a:solidFill>
+                  <a:schemeClr val="tx1"/>
+                </a:solidFill>
+                <a:effectLst/>
+                <a:latin typeface="+mn-lt"/>
+                <a:ea typeface="ＭＳ Ｐゴシック"/>
+                <a:cs typeface="Calibri"/>
+              </a:rPr>
+              <a:t>the project </a:t>
+            </a:r>
+            <a:r>
+              <a:rPr lang="en-US" dirty="0">
+                <a:ea typeface="ＭＳ Ｐゴシック"/>
+                <a:cs typeface="Calibri"/>
+              </a:rPr>
+              <a:t>uses a</a:t>
+            </a:r>
+            <a:r>
+              <a:rPr lang="en-US" sz="1200" kern="1200" dirty="0">
+                <a:solidFill>
+                  <a:schemeClr val="tx1"/>
+                </a:solidFill>
+                <a:effectLst/>
+                <a:latin typeface="+mn-lt"/>
+                <a:ea typeface="ＭＳ Ｐゴシック"/>
+                <a:cs typeface="Calibri"/>
+              </a:rPr>
+              <a:t> variety of sources to build a certain target, the sources must be fetched. Recipes specify the location of all source, patches, and files. </a:t>
+            </a:r>
+            <a:r>
+              <a:rPr lang="en-US" dirty="0">
+                <a:ea typeface="ＭＳ Ｐゴシック"/>
+                <a:cs typeface="Calibri"/>
+              </a:rPr>
+              <a:t>These</a:t>
+            </a:r>
+            <a:r>
+              <a:rPr lang="en-US" sz="1200" kern="1200" dirty="0">
+                <a:solidFill>
+                  <a:schemeClr val="tx1"/>
+                </a:solidFill>
+                <a:effectLst/>
+                <a:latin typeface="+mn-lt"/>
+                <a:ea typeface="ＭＳ Ｐゴシック"/>
+                <a:cs typeface="Calibri"/>
+              </a:rPr>
+              <a:t> may be stored locally or obtained via the Internet.</a:t>
+            </a:r>
+          </a:p>
+          <a:p>
+            <a:r>
               <a:rPr lang="en-US" sz="1200" kern="1200" dirty="0">
                 <a:solidFill>
                   <a:schemeClr val="tx1"/>
@@ -5162,7 +6531,124 @@
                 <a:ea typeface="ＭＳ Ｐゴシック" charset="0"/>
                 <a:cs typeface="ＭＳ Ｐゴシック" charset="0"/>
               </a:rPr>
-              <a:t>As the project is using a variety of sources to build a certain target, the sources must be fetched. Recipes specify the location of all source, patches, and files. They may be stored locally or obtained via the Internet.</a:t>
+              <a:t> </a:t>
+            </a:r>
+          </a:p>
+          <a:p>
+            <a:r>
+              <a:rPr lang="en-US" sz="1200" kern="1200" dirty="0" err="1">
+                <a:solidFill>
+                  <a:schemeClr val="tx1"/>
+                </a:solidFill>
+                <a:effectLst/>
+                <a:latin typeface="+mn-lt"/>
+                <a:ea typeface="ＭＳ Ｐゴシック"/>
+                <a:cs typeface="Calibri"/>
+              </a:rPr>
+              <a:t>BitBake</a:t>
+            </a:r>
+            <a:r>
+              <a:rPr lang="en-US" sz="1200" kern="1200" dirty="0">
+                <a:solidFill>
+                  <a:schemeClr val="tx1"/>
+                </a:solidFill>
+                <a:effectLst/>
+                <a:latin typeface="+mn-lt"/>
+                <a:ea typeface="ＭＳ Ｐゴシック"/>
+                <a:cs typeface="Calibri"/>
+              </a:rPr>
+              <a:t> is able to get the sources from a variety of forms, such as </a:t>
+            </a:r>
+            <a:r>
+              <a:rPr lang="en-US" dirty="0">
+                <a:ea typeface="ＭＳ Ｐゴシック"/>
+                <a:cs typeface="Calibri"/>
+              </a:rPr>
+              <a:t>Git</a:t>
+            </a:r>
+            <a:r>
+              <a:rPr lang="en-US" sz="1200" kern="1200" dirty="0">
+                <a:solidFill>
+                  <a:schemeClr val="tx1"/>
+                </a:solidFill>
+                <a:effectLst/>
+                <a:latin typeface="+mn-lt"/>
+                <a:ea typeface="ＭＳ Ｐゴシック"/>
+                <a:cs typeface="Calibri"/>
+              </a:rPr>
+              <a:t>, </a:t>
+            </a:r>
+            <a:r>
+              <a:rPr lang="en-US" sz="1200" kern="1200" dirty="0" err="1">
+                <a:solidFill>
+                  <a:schemeClr val="tx1"/>
+                </a:solidFill>
+                <a:effectLst/>
+                <a:latin typeface="+mn-lt"/>
+                <a:ea typeface="ＭＳ Ｐゴシック"/>
+                <a:cs typeface="Calibri"/>
+              </a:rPr>
+              <a:t>svn</a:t>
+            </a:r>
+            <a:r>
+              <a:rPr lang="en-US" sz="1200" kern="1200" dirty="0">
+                <a:solidFill>
+                  <a:schemeClr val="tx1"/>
+                </a:solidFill>
+                <a:effectLst/>
+                <a:latin typeface="+mn-lt"/>
+                <a:ea typeface="ＭＳ Ｐゴシック"/>
+                <a:cs typeface="Calibri"/>
+              </a:rPr>
+              <a:t>, </a:t>
+            </a:r>
+            <a:r>
+              <a:rPr lang="en-US" sz="1200" kern="1200" dirty="0" err="1">
+                <a:solidFill>
+                  <a:schemeClr val="tx1"/>
+                </a:solidFill>
+                <a:effectLst/>
+                <a:latin typeface="+mn-lt"/>
+                <a:ea typeface="ＭＳ Ｐゴシック"/>
+                <a:cs typeface="Calibri"/>
+              </a:rPr>
+              <a:t>bzr</a:t>
+            </a:r>
+            <a:r>
+              <a:rPr lang="en-US" sz="1200" kern="1200" dirty="0">
+                <a:solidFill>
+                  <a:schemeClr val="tx1"/>
+                </a:solidFill>
+                <a:effectLst/>
+                <a:latin typeface="+mn-lt"/>
+                <a:ea typeface="ＭＳ Ｐゴシック"/>
+                <a:cs typeface="Calibri"/>
+              </a:rPr>
+              <a:t>, and </a:t>
+            </a:r>
+            <a:r>
+              <a:rPr lang="en-US" sz="1200" kern="1200" dirty="0" err="1">
+                <a:solidFill>
+                  <a:schemeClr val="tx1"/>
+                </a:solidFill>
+                <a:effectLst/>
+                <a:latin typeface="+mn-lt"/>
+                <a:ea typeface="ＭＳ Ｐゴシック"/>
+                <a:cs typeface="Calibri"/>
+              </a:rPr>
+              <a:t>tarballs</a:t>
+            </a:r>
+            <a:r>
+              <a:rPr lang="en-US" sz="1200" kern="1200" dirty="0">
+                <a:solidFill>
+                  <a:schemeClr val="tx1"/>
+                </a:solidFill>
+                <a:effectLst/>
+                <a:latin typeface="+mn-lt"/>
+                <a:ea typeface="ＭＳ Ｐゴシック"/>
+                <a:cs typeface="Calibri"/>
+              </a:rPr>
+              <a:t>.</a:t>
             </a:r>
           </a:p>
           <a:p>
@@ -5181,40 +6667,47 @@
           </a:p>
           <a:p>
             <a:r>
-              <a:rPr lang="en-US" sz="1200" kern="1200" dirty="0" err="1">
+              <a:rPr lang="en-US" sz="1200" kern="1200">
                 <a:solidFill>
                   <a:schemeClr val="tx1"/>
                 </a:solidFill>
                 <a:effectLst/>
                 <a:latin typeface="+mn-lt"/>
-                <a:ea typeface="ＭＳ Ｐゴシック" charset="0"/>
-                <a:cs typeface="ＭＳ Ｐゴシック" charset="0"/>
-              </a:rPr>
-              <a:t>BitBake</a:t>
-            </a:r>
-            <a:r>
-              <a:rPr lang="en-US" sz="1200" kern="1200" dirty="0">
+                <a:ea typeface="ＭＳ Ｐゴシック"/>
+                <a:cs typeface="Calibri"/>
+              </a:rPr>
+              <a:t>Differing versions of packages can be fixed or updated automatically by </a:t>
+            </a:r>
+            <a:r>
+              <a:rPr lang="en-US">
+                <a:ea typeface="ＭＳ Ｐゴシック"/>
+                <a:cs typeface="Calibri"/>
+              </a:rPr>
+              <a:t>adjusting the</a:t>
+            </a:r>
+            <a:r>
+              <a:rPr lang="en-US" sz="1200" kern="1200">
                 <a:solidFill>
                   <a:schemeClr val="tx1"/>
                 </a:solidFill>
                 <a:effectLst/>
                 <a:latin typeface="+mn-lt"/>
-                <a:ea typeface="ＭＳ Ｐゴシック" charset="0"/>
-                <a:cs typeface="ＭＳ Ｐゴシック" charset="0"/>
-              </a:rPr>
-              <a:t> is able to get the sources from a variety of forms, such as git, </a:t>
-            </a:r>
-            <a:r>
-              <a:rPr lang="en-US" sz="1200" kern="1200" dirty="0" err="1">
+                <a:ea typeface="ＭＳ Ｐゴシック"/>
+                <a:cs typeface="Calibri"/>
+              </a:rPr>
+              <a:t> “</a:t>
+            </a:r>
+            <a:r>
+              <a:rPr lang="en-US" sz="1200" kern="1200" err="1">
                 <a:solidFill>
                   <a:schemeClr val="tx1"/>
                 </a:solidFill>
                 <a:effectLst/>
                 <a:latin typeface="+mn-lt"/>
-                <a:ea typeface="ＭＳ Ｐゴシック" charset="0"/>
-                <a:cs typeface="ＭＳ Ｐゴシック" charset="0"/>
-              </a:rPr>
-              <a:t>svn</a:t>
+                <a:ea typeface="ＭＳ Ｐゴシック"/>
+                <a:cs typeface="Calibri"/>
+              </a:rPr>
+              <a:t>local.conf</a:t>
             </a:r>
             <a:r>
               <a:rPr lang="en-US" sz="1200" kern="1200" dirty="0">
@@ -5223,108 +6716,8 @@
                 </a:solidFill>
                 <a:effectLst/>
                 <a:latin typeface="+mn-lt"/>
-                <a:ea typeface="ＭＳ Ｐゴシック" charset="0"/>
-                <a:cs typeface="ＭＳ Ｐゴシック" charset="0"/>
-              </a:rPr>
-              <a:t>, </a:t>
-            </a:r>
-            <a:r>
-              <a:rPr lang="en-US" sz="1200" kern="1200" dirty="0" err="1">
-                <a:solidFill>
-                  <a:schemeClr val="tx1"/>
-                </a:solidFill>
-                <a:effectLst/>
-                <a:latin typeface="+mn-lt"/>
-                <a:ea typeface="ＭＳ Ｐゴシック" charset="0"/>
-                <a:cs typeface="ＭＳ Ｐゴシック" charset="0"/>
-              </a:rPr>
-              <a:t>bzr</a:t>
-            </a:r>
-            <a:r>
-              <a:rPr lang="en-US" sz="1200" kern="1200" dirty="0">
-                <a:solidFill>
-                  <a:schemeClr val="tx1"/>
-                </a:solidFill>
-                <a:effectLst/>
-                <a:latin typeface="+mn-lt"/>
-                <a:ea typeface="ＭＳ Ｐゴシック" charset="0"/>
-                <a:cs typeface="ＭＳ Ｐゴシック" charset="0"/>
-              </a:rPr>
-              <a:t>, and </a:t>
-            </a:r>
-            <a:r>
-              <a:rPr lang="en-US" sz="1200" kern="1200" dirty="0" err="1">
-                <a:solidFill>
-                  <a:schemeClr val="tx1"/>
-                </a:solidFill>
-                <a:effectLst/>
-                <a:latin typeface="+mn-lt"/>
-                <a:ea typeface="ＭＳ Ｐゴシック" charset="0"/>
-                <a:cs typeface="ＭＳ Ｐゴシック" charset="0"/>
-              </a:rPr>
-              <a:t>tarballs</a:t>
-            </a:r>
-            <a:r>
-              <a:rPr lang="en-US" sz="1200" kern="1200" dirty="0">
-                <a:solidFill>
-                  <a:schemeClr val="tx1"/>
-                </a:solidFill>
-                <a:effectLst/>
-                <a:latin typeface="+mn-lt"/>
-                <a:ea typeface="ＭＳ Ｐゴシック" charset="0"/>
-                <a:cs typeface="ＭＳ Ｐゴシック" charset="0"/>
-              </a:rPr>
-              <a:t>.</a:t>
-            </a:r>
-          </a:p>
-          <a:p>
-            <a:r>
-              <a:rPr lang="en-US" sz="1200" kern="1200" dirty="0">
-                <a:solidFill>
-                  <a:schemeClr val="tx1"/>
-                </a:solidFill>
-                <a:effectLst/>
-                <a:latin typeface="+mn-lt"/>
-                <a:ea typeface="ＭＳ Ｐゴシック" charset="0"/>
-                <a:cs typeface="ＭＳ Ｐゴシック" charset="0"/>
-              </a:rPr>
-              <a:t> </a:t>
-            </a:r>
-          </a:p>
-          <a:p>
-            <a:r>
-              <a:rPr lang="en-US" sz="1200" kern="1200" dirty="0">
-                <a:solidFill>
-                  <a:schemeClr val="tx1"/>
-                </a:solidFill>
-                <a:effectLst/>
-                <a:latin typeface="+mn-lt"/>
-                <a:ea typeface="ＭＳ Ｐゴシック" charset="0"/>
-                <a:cs typeface="ＭＳ Ｐゴシック" charset="0"/>
-              </a:rPr>
-              <a:t>Differing versions of packages can be fixed or updated automatically by tweaking the “</a:t>
-            </a:r>
-            <a:r>
-              <a:rPr lang="en-US" sz="1200" kern="1200" dirty="0" err="1">
-                <a:solidFill>
-                  <a:schemeClr val="tx1"/>
-                </a:solidFill>
-                <a:effectLst/>
-                <a:latin typeface="+mn-lt"/>
-                <a:ea typeface="ＭＳ Ｐゴシック" charset="0"/>
-                <a:cs typeface="ＭＳ Ｐゴシック" charset="0"/>
-              </a:rPr>
-              <a:t>local.conf</a:t>
-            </a:r>
-            <a:r>
-              <a:rPr lang="en-US" sz="1200" kern="1200" dirty="0">
-                <a:solidFill>
-                  <a:schemeClr val="tx1"/>
-                </a:solidFill>
-                <a:effectLst/>
-                <a:latin typeface="+mn-lt"/>
-                <a:ea typeface="ＭＳ Ｐゴシック" charset="0"/>
-                <a:cs typeface="ＭＳ Ｐゴシック" charset="0"/>
+                <a:ea typeface="ＭＳ Ｐゴシック"/>
+                <a:cs typeface="Calibri"/>
               </a:rPr>
               <a:t>” file.</a:t>
             </a:r>
@@ -5501,38 +6894,64 @@
           </a:p>
           <a:p>
             <a:r>
+              <a:rPr lang="en-US" dirty="0">
+                <a:ea typeface="ＭＳ Ｐゴシック"/>
+                <a:cs typeface="Calibri"/>
+              </a:rPr>
+              <a:t>Next, patches</a:t>
+            </a:r>
+            <a:r>
               <a:rPr lang="en-US" sz="1200" kern="1200" dirty="0">
                 <a:solidFill>
                   <a:schemeClr val="tx1"/>
                 </a:solidFill>
                 <a:effectLst/>
                 <a:latin typeface="+mn-lt"/>
-                <a:ea typeface="ＭＳ Ｐゴシック" charset="0"/>
-                <a:cs typeface="ＭＳ Ｐゴシック" charset="0"/>
-              </a:rPr>
-              <a:t>Patches are then applied in the order that they appear in “</a:t>
-            </a:r>
-            <a:r>
-              <a:rPr lang="en-US" sz="1200" kern="1200" dirty="0" err="1">
+                <a:ea typeface="ＭＳ Ｐゴシック"/>
+                <a:cs typeface="Calibri"/>
+              </a:rPr>
+              <a:t> </a:t>
+            </a:r>
+            <a:r>
+              <a:rPr lang="en-US" dirty="0">
+                <a:ea typeface="ＭＳ Ｐゴシック"/>
+                <a:cs typeface="Calibri"/>
+              </a:rPr>
+              <a:t>are applied</a:t>
+            </a:r>
+            <a:r>
+              <a:rPr lang="en-US" sz="1200" kern="1200" dirty="0">
                 <a:solidFill>
                   <a:schemeClr val="tx1"/>
                 </a:solidFill>
                 <a:effectLst/>
                 <a:latin typeface="+mn-lt"/>
-                <a:ea typeface="ＭＳ Ｐゴシック" charset="0"/>
-                <a:cs typeface="ＭＳ Ｐゴシック" charset="0"/>
-              </a:rPr>
-              <a:t>source_uri</a:t>
-            </a:r>
-            <a:r>
-              <a:rPr lang="en-US" sz="1200" kern="1200" dirty="0">
+                <a:ea typeface="ＭＳ Ｐゴシック"/>
+                <a:cs typeface="Calibri"/>
+              </a:rPr>
+              <a:t> in the order that they appear in “</a:t>
+            </a:r>
+            <a:r>
+              <a:rPr lang="en-US" sz="1200" kern="1200" dirty="0" err="1">
                 <a:solidFill>
                   <a:schemeClr val="tx1"/>
                 </a:solidFill>
                 <a:effectLst/>
                 <a:latin typeface="+mn-lt"/>
-                <a:ea typeface="ＭＳ Ｐゴシック" charset="0"/>
-                <a:cs typeface="ＭＳ Ｐゴシック" charset="0"/>
+                <a:ea typeface="ＭＳ Ｐゴシック"/>
+                <a:cs typeface="Calibri"/>
+              </a:rPr>
+              <a:t>source_uri</a:t>
+            </a:r>
+            <a:r>
+              <a:rPr lang="en-US" sz="1200" kern="1200" dirty="0">
+                <a:solidFill>
+                  <a:schemeClr val="tx1"/>
+                </a:solidFill>
+                <a:effectLst/>
+                <a:latin typeface="+mn-lt"/>
+                <a:ea typeface="ＭＳ Ｐゴシック"/>
+                <a:cs typeface="Calibri"/>
               </a:rPr>
               <a:t>”.</a:t>
             </a:r>
@@ -5722,7 +7141,31 @@
                 <a:ea typeface="ＭＳ Ｐゴシック" charset="0"/>
                 <a:cs typeface="ＭＳ Ｐゴシック" charset="0"/>
               </a:rPr>
-              <a:t>The installation step runs under “pseudo” and allows special files, permissions, and owners/groups to be set.</a:t>
+              <a:t>The installation step runs under “</a:t>
+            </a:r>
+            <a:r>
+              <a:rPr lang="en-US" sz="1200" kern="1200" dirty="0" err="1">
+                <a:solidFill>
+                  <a:schemeClr val="tx1"/>
+                </a:solidFill>
+                <a:effectLst/>
+                <a:latin typeface="+mn-lt"/>
+                <a:ea typeface="ＭＳ Ｐゴシック" charset="0"/>
+                <a:cs typeface="ＭＳ Ｐゴシック" charset="0"/>
+              </a:rPr>
+              <a:t>sudo</a:t>
+            </a:r>
+            <a:r>
+              <a:rPr lang="en-US" sz="1200" kern="1200" dirty="0">
+                <a:solidFill>
+                  <a:schemeClr val="tx1"/>
+                </a:solidFill>
+                <a:effectLst/>
+                <a:latin typeface="+mn-lt"/>
+                <a:ea typeface="ＭＳ Ｐゴシック" charset="0"/>
+                <a:cs typeface="ＭＳ Ｐゴシック" charset="0"/>
+              </a:rPr>
+              <a:t>” and allows special files, permissions, and owners/groups to be set.</a:t>
             </a:r>
           </a:p>
           <a:p>
@@ -5823,10 +7266,48 @@
                 </a:solidFill>
                 <a:effectLst/>
                 <a:latin typeface="+mn-lt"/>
-                <a:ea typeface="ＭＳ Ｐゴシック" charset="0"/>
-                <a:cs typeface="ＭＳ Ｐゴシック" charset="0"/>
-              </a:rPr>
-              <a:t>We shall start with a quick look at what an embedded Linux system requires to operate.</a:t>
+                <a:ea typeface="ＭＳ Ｐゴシック"/>
+                <a:cs typeface="Calibri"/>
+              </a:rPr>
+              <a:t>We </a:t>
+            </a:r>
+            <a:r>
+              <a:rPr lang="en-US" dirty="0">
+                <a:ea typeface="ＭＳ Ｐゴシック"/>
+                <a:cs typeface="Calibri"/>
+              </a:rPr>
+              <a:t>will begin with</a:t>
+            </a:r>
+            <a:r>
+              <a:rPr lang="en-US" sz="1200" kern="1200" dirty="0">
+                <a:solidFill>
+                  <a:schemeClr val="tx1"/>
+                </a:solidFill>
+                <a:effectLst/>
+                <a:latin typeface="+mn-lt"/>
+                <a:ea typeface="ＭＳ Ｐゴシック"/>
+                <a:cs typeface="Calibri"/>
+              </a:rPr>
+              <a:t> a quick </a:t>
+            </a:r>
+            <a:r>
+              <a:rPr lang="en-US" dirty="0">
+                <a:ea typeface="ＭＳ Ｐゴシック"/>
+                <a:cs typeface="Calibri"/>
+              </a:rPr>
+              <a:t>overview of </a:t>
+            </a:r>
+            <a:r>
+              <a:rPr lang="en-US" sz="1200" kern="1200" dirty="0">
+                <a:solidFill>
+                  <a:schemeClr val="tx1"/>
+                </a:solidFill>
+                <a:effectLst/>
+                <a:latin typeface="+mn-lt"/>
+                <a:ea typeface="ＭＳ Ｐゴシック"/>
+                <a:cs typeface="Calibri"/>
+              </a:rPr>
+              <a:t>what an embedded Linux system requires to operate.</a:t>
             </a:r>
           </a:p>
           <a:p>
@@ -6457,17 +7938,77 @@
           <a:lstStyle/>
           <a:p>
             <a:r>
-              <a:rPr lang="en-US" sz="1200" kern="1200" dirty="0">
+              <a:rPr lang="en-US" kern="1200" dirty="0">
                 <a:solidFill>
                   <a:schemeClr val="tx1"/>
                 </a:solidFill>
                 <a:effectLst/>
-                <a:latin typeface="+mn-lt"/>
-                <a:ea typeface="ＭＳ Ｐゴシック" charset="0"/>
-                <a:cs typeface="ＭＳ Ｐゴシック" charset="0"/>
-              </a:rPr>
-              <a:t>We shall start with a quick look at what an embedded Linux system requires to operate.</a:t>
-            </a:r>
+                <a:ea typeface="ＭＳ Ｐゴシック"/>
+                <a:cs typeface="Calibri"/>
+              </a:rPr>
+              <a:t>We </a:t>
+            </a:r>
+            <a:r>
+              <a:rPr lang="en-US" dirty="0">
+                <a:ea typeface="ＭＳ Ｐゴシック"/>
+                <a:cs typeface="Calibri"/>
+              </a:rPr>
+              <a:t>will begin </a:t>
+            </a:r>
+            <a:r>
+              <a:rPr lang="en-US" kern="1200" dirty="0">
+                <a:solidFill>
+                  <a:schemeClr val="tx1"/>
+                </a:solidFill>
+                <a:effectLst/>
+                <a:ea typeface="ＭＳ Ｐゴシック"/>
+                <a:cs typeface="Calibri"/>
+              </a:rPr>
+              <a:t>with a quick </a:t>
+            </a:r>
+            <a:r>
+              <a:rPr lang="en-US" dirty="0">
+                <a:ea typeface="ＭＳ Ｐゴシック"/>
+                <a:cs typeface="Calibri"/>
+              </a:rPr>
+              <a:t>overview of </a:t>
+            </a:r>
+            <a:r>
+              <a:rPr lang="en-US" kern="1200" dirty="0">
+                <a:solidFill>
+                  <a:schemeClr val="tx1"/>
+                </a:solidFill>
+                <a:effectLst/>
+                <a:ea typeface="ＭＳ Ｐゴシック"/>
+                <a:cs typeface="Calibri"/>
+              </a:rPr>
+              <a:t>what an embedded Linux system requires to operate.</a:t>
+            </a:r>
+            <a:endParaRPr lang="en-US" dirty="0">
+              <a:solidFill>
+                <a:srgbClr val="444444"/>
+              </a:solidFill>
+              <a:ea typeface="ＭＳ Ｐゴシック"/>
+              <a:cs typeface="Calibri"/>
+            </a:endParaRPr>
+          </a:p>
+          <a:p>
+            <a:endParaRPr lang="en-IN" dirty="0">
+              <a:solidFill>
+                <a:srgbClr val="444444"/>
+              </a:solidFill>
+            </a:endParaRPr>
+          </a:p>
+          <a:p>
+            <a:endParaRPr lang="en-US" sz="1200" kern="1200" dirty="0">
+              <a:solidFill>
+                <a:schemeClr val="tx1"/>
+              </a:solidFill>
+              <a:effectLst/>
+              <a:latin typeface="+mn-lt"/>
+              <a:ea typeface="ＭＳ Ｐゴシック" charset="0"/>
+              <a:cs typeface="Calibri"/>
+            </a:endParaRPr>
           </a:p>
           <a:p>
             <a:endParaRPr lang="en-IN" dirty="0"/>
@@ -6574,7 +8115,78 @@
             </a:r>
           </a:p>
           <a:p>
-            <a:pPr lvl="1"/>
+            <a:pPr marL="742950" lvl="1" indent="-285750">
+              <a:buFont typeface="Calibri"/>
+              <a:buChar char="-"/>
+            </a:pPr>
+            <a:r>
+              <a:rPr lang="en-US" sz="1200" kern="1200" dirty="0">
+                <a:solidFill>
+                  <a:schemeClr val="tx1"/>
+                </a:solidFill>
+                <a:effectLst/>
+                <a:latin typeface="+mn-lt"/>
+                <a:ea typeface="ＭＳ Ｐゴシック"/>
+                <a:cs typeface="Calibri"/>
+              </a:rPr>
+              <a:t>A bootloader</a:t>
+            </a:r>
+          </a:p>
+          <a:p>
+            <a:pPr marL="742950" lvl="1" indent="-285750">
+              <a:buFont typeface="Calibri"/>
+              <a:buChar char="-"/>
+            </a:pPr>
+            <a:r>
+              <a:rPr lang="en-US" sz="1200" kern="1200" dirty="0">
+                <a:solidFill>
+                  <a:schemeClr val="tx1"/>
+                </a:solidFill>
+                <a:effectLst/>
+                <a:latin typeface="+mn-lt"/>
+                <a:ea typeface="ＭＳ Ｐゴシック"/>
+                <a:cs typeface="Calibri"/>
+              </a:rPr>
+              <a:t>A Linux kernel</a:t>
+            </a:r>
+          </a:p>
+          <a:p>
+            <a:pPr marL="742950" lvl="1" indent="-285750">
+              <a:buFont typeface="Calibri"/>
+              <a:buChar char="-"/>
+            </a:pPr>
+            <a:r>
+              <a:rPr lang="en-US" sz="1200" kern="1200">
+                <a:solidFill>
+                  <a:schemeClr val="tx1"/>
+                </a:solidFill>
+                <a:effectLst/>
+                <a:latin typeface="+mn-lt"/>
+                <a:ea typeface="ＭＳ Ｐゴシック"/>
+                <a:cs typeface="Calibri"/>
+              </a:rPr>
+              <a:t>A device tree blob</a:t>
+            </a:r>
+          </a:p>
+          <a:p>
+            <a:pPr marL="742950" lvl="1" indent="-285750">
+              <a:buFont typeface="Calibri"/>
+              <a:buChar char="-"/>
+            </a:pPr>
+            <a:r>
+              <a:rPr lang="en-US" sz="1200" kern="1200" dirty="0">
+                <a:solidFill>
+                  <a:schemeClr val="tx1"/>
+                </a:solidFill>
+                <a:effectLst/>
+                <a:latin typeface="+mn-lt"/>
+                <a:ea typeface="ＭＳ Ｐゴシック"/>
+                <a:cs typeface="Calibri"/>
+              </a:rPr>
+              <a:t>A root file system</a:t>
+            </a:r>
+          </a:p>
+          <a:p>
             <a:r>
               <a:rPr lang="en-US" sz="1200" kern="1200" dirty="0">
                 <a:solidFill>
@@ -6585,11 +8197,161 @@
                 <a:ea typeface="ＭＳ Ｐゴシック" charset="0"/>
                 <a:cs typeface="ＭＳ Ｐゴシック" charset="0"/>
               </a:rPr>
-              <a:t>A bootloader</a:t>
-            </a:r>
-          </a:p>
-          <a:p>
-            <a:pPr lvl="1"/>
+              <a:t> </a:t>
+            </a:r>
+          </a:p>
+          <a:p>
+            <a:r>
+              <a:rPr lang="en-US" sz="1200" kern="1200" dirty="0">
+                <a:solidFill>
+                  <a:schemeClr val="tx1"/>
+                </a:solidFill>
+                <a:effectLst/>
+                <a:latin typeface="+mn-lt"/>
+                <a:ea typeface="ＭＳ Ｐゴシック"/>
+                <a:cs typeface="Calibri"/>
+              </a:rPr>
+              <a:t>These components </a:t>
+            </a:r>
+            <a:r>
+              <a:rPr lang="en-US" dirty="0">
+                <a:ea typeface="ＭＳ Ｐゴシック"/>
+                <a:cs typeface="Calibri"/>
+              </a:rPr>
+              <a:t>must </a:t>
+            </a:r>
+            <a:r>
+              <a:rPr lang="en-US" sz="1200" kern="1200" dirty="0">
+                <a:solidFill>
+                  <a:schemeClr val="tx1"/>
+                </a:solidFill>
+                <a:effectLst/>
+                <a:latin typeface="+mn-lt"/>
+                <a:ea typeface="ＭＳ Ｐゴシック"/>
+                <a:cs typeface="Calibri"/>
+              </a:rPr>
+              <a:t>be</a:t>
+            </a:r>
+            <a:r>
+              <a:rPr lang="en-US" dirty="0">
+                <a:ea typeface="ＭＳ Ｐゴシック"/>
+                <a:cs typeface="Calibri"/>
+              </a:rPr>
+              <a:t>:</a:t>
+            </a:r>
+            <a:endParaRPr lang="en-US" sz="1200" kern="1200" dirty="0">
+              <a:solidFill>
+                <a:schemeClr val="tx1"/>
+              </a:solidFill>
+              <a:effectLst/>
+              <a:latin typeface="+mn-lt"/>
+              <a:ea typeface="ＭＳ Ｐゴシック" charset="0"/>
+              <a:cs typeface="Calibri"/>
+            </a:endParaRPr>
+          </a:p>
+          <a:p>
+            <a:pPr marL="742950" lvl="1" indent="-285750">
+              <a:buFont typeface="Calibri"/>
+              <a:buChar char="-"/>
+            </a:pPr>
+            <a:r>
+              <a:rPr lang="en-US" sz="1200" kern="1200" dirty="0">
+                <a:solidFill>
+                  <a:schemeClr val="tx1"/>
+                </a:solidFill>
+                <a:effectLst/>
+                <a:latin typeface="+mn-lt"/>
+                <a:ea typeface="ＭＳ Ｐゴシック"/>
+                <a:cs typeface="Calibri"/>
+              </a:rPr>
+              <a:t>Configured for the embedded system hardware platform</a:t>
+            </a:r>
+            <a:r>
+              <a:rPr lang="en-US" dirty="0">
+                <a:ea typeface="ＭＳ Ｐゴシック"/>
+                <a:cs typeface="Calibri"/>
+              </a:rPr>
+              <a:t>.</a:t>
+            </a:r>
+            <a:endParaRPr lang="en-US" sz="1200" kern="1200" dirty="0">
+              <a:solidFill>
+                <a:schemeClr val="tx1"/>
+              </a:solidFill>
+              <a:effectLst/>
+              <a:latin typeface="+mn-lt"/>
+              <a:ea typeface="ＭＳ Ｐゴシック"/>
+              <a:cs typeface="Calibri"/>
+            </a:endParaRPr>
+          </a:p>
+          <a:p>
+            <a:pPr marL="742950" lvl="1" indent="-285750">
+              <a:buFont typeface="Calibri"/>
+              <a:buChar char="-"/>
+            </a:pPr>
+            <a:r>
+              <a:rPr lang="en-US" sz="1200" kern="1200" dirty="0">
+                <a:solidFill>
+                  <a:schemeClr val="tx1"/>
+                </a:solidFill>
+                <a:effectLst/>
+                <a:latin typeface="+mn-lt"/>
+                <a:ea typeface="ＭＳ Ｐゴシック"/>
+                <a:cs typeface="Calibri"/>
+              </a:rPr>
+              <a:t>Compiled and linked into an executable format</a:t>
+            </a:r>
+            <a:r>
+              <a:rPr lang="en-US" dirty="0">
+                <a:ea typeface="ＭＳ Ｐゴシック"/>
+                <a:cs typeface="Calibri"/>
+              </a:rPr>
+              <a:t>.</a:t>
+            </a:r>
+            <a:endParaRPr lang="en-US" sz="1200" kern="1200" dirty="0">
+              <a:solidFill>
+                <a:schemeClr val="tx1"/>
+              </a:solidFill>
+              <a:effectLst/>
+              <a:latin typeface="+mn-lt"/>
+              <a:ea typeface="ＭＳ Ｐゴシック"/>
+              <a:cs typeface="Calibri"/>
+            </a:endParaRPr>
+          </a:p>
+          <a:p>
+            <a:pPr marL="742950" lvl="1" indent="-285750">
+              <a:buFont typeface="Calibri"/>
+              <a:buChar char="-"/>
+            </a:pPr>
+            <a:r>
+              <a:rPr lang="en-US" sz="1200" kern="1200" dirty="0">
+                <a:solidFill>
+                  <a:schemeClr val="tx1"/>
+                </a:solidFill>
+                <a:effectLst/>
+                <a:latin typeface="+mn-lt"/>
+                <a:ea typeface="ＭＳ Ｐゴシック"/>
+                <a:cs typeface="Calibri"/>
+              </a:rPr>
+              <a:t>Deployed into the embedded system persistent storage for booting and operations</a:t>
+            </a:r>
+            <a:r>
+              <a:rPr lang="en-US" dirty="0">
+                <a:ea typeface="ＭＳ Ｐゴシック"/>
+                <a:cs typeface="Calibri"/>
+              </a:rPr>
+              <a:t>.</a:t>
+            </a:r>
+            <a:endParaRPr lang="en-US" sz="1200" kern="1200" dirty="0">
+              <a:solidFill>
+                <a:schemeClr val="tx1"/>
+              </a:solidFill>
+              <a:effectLst/>
+              <a:latin typeface="+mn-lt"/>
+              <a:ea typeface="ＭＳ Ｐゴシック"/>
+              <a:cs typeface="Calibri"/>
+            </a:endParaRPr>
+          </a:p>
+          <a:p>
             <a:r>
               <a:rPr lang="en-US" sz="1200" kern="1200" dirty="0">
                 <a:solidFill>
@@ -6600,11 +8362,10 @@
                 <a:ea typeface="ＭＳ Ｐゴシック" charset="0"/>
                 <a:cs typeface="ＭＳ Ｐゴシック" charset="0"/>
               </a:rPr>
-              <a:t>A Linux kernel</a:t>
-            </a:r>
-          </a:p>
-          <a:p>
-            <a:pPr lvl="1"/>
+              <a:t>  </a:t>
+            </a:r>
+          </a:p>
+          <a:p>
             <a:r>
               <a:rPr lang="en-US" sz="1200" kern="1200" dirty="0">
                 <a:solidFill>
@@ -6615,11 +8376,10 @@
                 <a:ea typeface="ＭＳ Ｐゴシック" charset="0"/>
                 <a:cs typeface="ＭＳ Ｐゴシック" charset="0"/>
               </a:rPr>
-              <a:t>A device tree blob</a:t>
-            </a:r>
-          </a:p>
-          <a:p>
-            <a:pPr lvl="1"/>
+              <a:t>The board’s U-Boot partition is RAW unformatted space.</a:t>
+            </a:r>
+          </a:p>
+          <a:p>
             <a:r>
               <a:rPr lang="en-US" sz="1200" kern="1200" dirty="0">
                 <a:solidFill>
@@ -6630,7 +8390,7 @@
                 <a:ea typeface="ＭＳ Ｐゴシック" charset="0"/>
                 <a:cs typeface="ＭＳ Ｐゴシック" charset="0"/>
               </a:rPr>
-              <a:t>A root file system</a:t>
+              <a:t> </a:t>
             </a:r>
           </a:p>
           <a:p>
@@ -6641,13 +8401,18 @@
                 </a:solidFill>
                 <a:effectLst/>
                 <a:latin typeface="+mn-lt"/>
-                <a:ea typeface="ＭＳ Ｐゴシック" charset="0"/>
-                <a:cs typeface="ＭＳ Ｐゴシック" charset="0"/>
-              </a:rPr>
-              <a:t> </a:t>
-            </a:r>
-          </a:p>
-          <a:p>
+                <a:ea typeface="ＭＳ Ｐゴシック"/>
+                <a:cs typeface="Calibri"/>
+              </a:rPr>
+              <a:t>The kernel and </a:t>
+            </a:r>
+            <a:r>
+              <a:rPr lang="en-US" dirty="0">
+                <a:ea typeface="ＭＳ Ｐゴシック"/>
+                <a:cs typeface="Calibri"/>
+              </a:rPr>
+              <a:t>Device</a:t>
+            </a:r>
             <a:r>
               <a:rPr lang="en-US" sz="1200" kern="1200" dirty="0">
                 <a:solidFill>
@@ -6655,14 +8420,18 @@
                 </a:solidFill>
                 <a:effectLst/>
                 <a:latin typeface="+mn-lt"/>
-                <a:ea typeface="ＭＳ Ｐゴシック" charset="0"/>
-                <a:cs typeface="ＭＳ Ｐゴシック" charset="0"/>
-              </a:rPr>
-              <a:t>These components should be</a:t>
-            </a:r>
-          </a:p>
-          <a:p>
-            <a:pPr lvl="1"/>
+                <a:ea typeface="ＭＳ Ｐゴシック"/>
+                <a:cs typeface="Calibri"/>
+              </a:rPr>
+              <a:t> </a:t>
+            </a:r>
+            <a:r>
+              <a:rPr lang="en-US" dirty="0">
+                <a:ea typeface="ＭＳ Ｐゴシック"/>
+                <a:cs typeface="Calibri"/>
+              </a:rPr>
+              <a:t>Tree</a:t>
+            </a:r>
             <a:r>
               <a:rPr lang="en-US" sz="1200" kern="1200" dirty="0">
                 <a:solidFill>
@@ -6670,14 +8439,18 @@
                 </a:solidFill>
                 <a:effectLst/>
                 <a:latin typeface="+mn-lt"/>
-                <a:ea typeface="ＭＳ Ｐゴシック" charset="0"/>
-                <a:cs typeface="ＭＳ Ｐゴシック" charset="0"/>
-              </a:rPr>
-              <a:t>Configured for the embedded system hardware platform</a:t>
-            </a:r>
-          </a:p>
-          <a:p>
-            <a:pPr lvl="1"/>
+                <a:ea typeface="ＭＳ Ｐゴシック"/>
+                <a:cs typeface="Calibri"/>
+              </a:rPr>
+              <a:t> </a:t>
+            </a:r>
+            <a:r>
+              <a:rPr lang="en-US" dirty="0">
+                <a:ea typeface="ＭＳ Ｐゴシック"/>
+                <a:cs typeface="Calibri"/>
+              </a:rPr>
+              <a:t>Blob</a:t>
+            </a:r>
             <a:r>
               <a:rPr lang="en-US" sz="1200" kern="1200" dirty="0">
                 <a:solidFill>
@@ -6685,81 +8458,10 @@
                 </a:solidFill>
                 <a:effectLst/>
                 <a:latin typeface="+mn-lt"/>
-                <a:ea typeface="ＭＳ Ｐゴシック" charset="0"/>
-                <a:cs typeface="ＭＳ Ｐゴシック" charset="0"/>
-              </a:rPr>
-              <a:t>Compiled and linked into an executable format</a:t>
-            </a:r>
-          </a:p>
-          <a:p>
-            <a:pPr lvl="1"/>
-            <a:r>
-              <a:rPr lang="en-US" sz="1200" kern="1200" dirty="0">
-                <a:solidFill>
-                  <a:schemeClr val="tx1"/>
-                </a:solidFill>
-                <a:effectLst/>
-                <a:latin typeface="+mn-lt"/>
-                <a:ea typeface="ＭＳ Ｐゴシック" charset="0"/>
-                <a:cs typeface="ＭＳ Ｐゴシック" charset="0"/>
-              </a:rPr>
-              <a:t>Deployed into the embedded system persistent storage for booting and operations</a:t>
-            </a:r>
-          </a:p>
-          <a:p>
-            <a:r>
-              <a:rPr lang="en-US" sz="1200" kern="1200" dirty="0">
-                <a:solidFill>
-                  <a:schemeClr val="tx1"/>
-                </a:solidFill>
-                <a:effectLst/>
-                <a:latin typeface="+mn-lt"/>
-                <a:ea typeface="ＭＳ Ｐゴシック" charset="0"/>
-                <a:cs typeface="ＭＳ Ｐゴシック" charset="0"/>
-              </a:rPr>
-              <a:t>  </a:t>
-            </a:r>
-          </a:p>
-          <a:p>
-            <a:r>
-              <a:rPr lang="en-US" sz="1200" kern="1200" dirty="0">
-                <a:solidFill>
-                  <a:schemeClr val="tx1"/>
-                </a:solidFill>
-                <a:effectLst/>
-                <a:latin typeface="+mn-lt"/>
-                <a:ea typeface="ＭＳ Ｐゴシック" charset="0"/>
-                <a:cs typeface="ＭＳ Ｐゴシック" charset="0"/>
-              </a:rPr>
-              <a:t>The board’s U-Boot partition is RAW unformatted space.</a:t>
-            </a:r>
-          </a:p>
-          <a:p>
-            <a:r>
-              <a:rPr lang="en-US" sz="1200" kern="1200" dirty="0">
-                <a:solidFill>
-                  <a:schemeClr val="tx1"/>
-                </a:solidFill>
-                <a:effectLst/>
-                <a:latin typeface="+mn-lt"/>
-                <a:ea typeface="ＭＳ Ｐゴシック" charset="0"/>
-                <a:cs typeface="ＭＳ Ｐゴシック" charset="0"/>
-              </a:rPr>
-              <a:t> </a:t>
-            </a:r>
-          </a:p>
-          <a:p>
-            <a:r>
-              <a:rPr lang="en-US" sz="1200" kern="1200" dirty="0">
-                <a:solidFill>
-                  <a:schemeClr val="tx1"/>
-                </a:solidFill>
-                <a:effectLst/>
-                <a:latin typeface="+mn-lt"/>
-                <a:ea typeface="ＭＳ Ｐゴシック" charset="0"/>
-                <a:cs typeface="ＭＳ Ｐゴシック" charset="0"/>
-              </a:rPr>
-              <a:t>The kernel and device tree blob are part of a FAT file system.</a:t>
+                <a:ea typeface="ＭＳ Ｐゴシック"/>
+                <a:cs typeface="Calibri"/>
+              </a:rPr>
+              <a:t> are part of a FAT file system.</a:t>
             </a:r>
           </a:p>
           <a:p>
@@ -6781,10 +8483,86 @@
                 </a:solidFill>
                 <a:effectLst/>
                 <a:latin typeface="+mn-lt"/>
-                <a:ea typeface="ＭＳ Ｐゴシック" charset="0"/>
-                <a:cs typeface="ＭＳ Ｐゴシック" charset="0"/>
-              </a:rPr>
-              <a:t>The root file system is part of an Ext file system.</a:t>
+                <a:ea typeface="ＭＳ Ｐゴシック"/>
+                <a:cs typeface="Calibri"/>
+              </a:rPr>
+              <a:t>The </a:t>
+            </a:r>
+            <a:r>
+              <a:rPr lang="en-US" dirty="0">
+                <a:ea typeface="ＭＳ Ｐゴシック"/>
+                <a:cs typeface="Calibri"/>
+              </a:rPr>
+              <a:t>root</a:t>
+            </a:r>
+            <a:r>
+              <a:rPr lang="en-US" sz="1200" kern="1200" dirty="0">
+                <a:solidFill>
+                  <a:schemeClr val="tx1"/>
+                </a:solidFill>
+                <a:effectLst/>
+                <a:latin typeface="+mn-lt"/>
+                <a:ea typeface="ＭＳ Ｐゴシック"/>
+                <a:cs typeface="Calibri"/>
+              </a:rPr>
+              <a:t> </a:t>
+            </a:r>
+            <a:r>
+              <a:rPr lang="en-US" dirty="0">
+                <a:ea typeface="ＭＳ Ｐゴシック"/>
+                <a:cs typeface="Calibri"/>
+              </a:rPr>
+              <a:t>file</a:t>
+            </a:r>
+            <a:r>
+              <a:rPr lang="en-US" sz="1200" kern="1200" dirty="0">
+                <a:solidFill>
+                  <a:schemeClr val="tx1"/>
+                </a:solidFill>
+                <a:effectLst/>
+                <a:latin typeface="+mn-lt"/>
+                <a:ea typeface="ＭＳ Ｐゴシック"/>
+                <a:cs typeface="Calibri"/>
+              </a:rPr>
+              <a:t> </a:t>
+            </a:r>
+            <a:r>
+              <a:rPr lang="en-US" dirty="0">
+                <a:ea typeface="ＭＳ Ｐゴシック"/>
+                <a:cs typeface="Calibri"/>
+              </a:rPr>
+              <a:t>system</a:t>
+            </a:r>
+            <a:r>
+              <a:rPr lang="en-US" sz="1200" kern="1200" dirty="0">
+                <a:solidFill>
+                  <a:schemeClr val="tx1"/>
+                </a:solidFill>
+                <a:effectLst/>
+                <a:latin typeface="+mn-lt"/>
+                <a:ea typeface="ＭＳ Ｐゴシック"/>
+                <a:cs typeface="Calibri"/>
+              </a:rPr>
+              <a:t> is part of a Linux-native file system, </a:t>
+            </a:r>
+            <a:r>
+              <a:rPr lang="en-US" dirty="0">
+                <a:ea typeface="ＭＳ Ｐゴシック"/>
+                <a:cs typeface="Calibri"/>
+              </a:rPr>
+              <a:t>typically</a:t>
+            </a:r>
+            <a:r>
+              <a:rPr lang="en-US" sz="1200" kern="1200" dirty="0">
+                <a:solidFill>
+                  <a:schemeClr val="tx1"/>
+                </a:solidFill>
+                <a:effectLst/>
+                <a:latin typeface="+mn-lt"/>
+                <a:ea typeface="ＭＳ Ｐゴシック"/>
+                <a:cs typeface="Calibri"/>
+              </a:rPr>
+              <a:t> ext4.</a:t>
             </a:r>
           </a:p>
           <a:p>
@@ -6982,21 +8760,7 @@
           <a:bodyPr/>
           <a:lstStyle/>
           <a:p>
-            <a:pPr marL="0" marR="0" lvl="0" indent="0" algn="l" defTabSz="914400" rtl="0" eaLnBrk="0" fontAlgn="base" latinLnBrk="0" hangingPunct="0">
-              <a:lnSpc>
-                <a:spcPct val="100000"/>
-              </a:lnSpc>
-              <a:spcBef>
-                <a:spcPct val="30000"/>
-              </a:spcBef>
-              <a:spcAft>
-                <a:spcPct val="0"/>
-              </a:spcAft>
-              <a:buClrTx/>
-              <a:buSzTx/>
-              <a:buFontTx/>
-              <a:buNone/>
-              <a:tabLst/>
+            <a:pPr>
               <a:defRPr/>
             </a:pPr>
             <a:r>
@@ -7006,10 +8770,29 @@
                 </a:solidFill>
                 <a:effectLst/>
                 <a:latin typeface="+mn-lt"/>
-                <a:ea typeface="ＭＳ Ｐゴシック" charset="0"/>
-                <a:cs typeface="ＭＳ Ｐゴシック" charset="0"/>
-              </a:rPr>
-              <a:t>This diagram illustrates the process for the configuration of the specific components. We will take a bit of a more in-depth look into each of these.</a:t>
+                <a:ea typeface="ＭＳ Ｐゴシック"/>
+                <a:cs typeface="Calibri"/>
+              </a:rPr>
+              <a:t>This diagram illustrates the process </a:t>
+            </a:r>
+            <a:r>
+              <a:rPr lang="en-US" dirty="0">
+                <a:ea typeface="ＭＳ Ｐゴシック"/>
+                <a:cs typeface="Calibri"/>
+              </a:rPr>
+              <a:t>to configure the</a:t>
+            </a:r>
+            <a:r>
+              <a:rPr lang="en-US" sz="1200" kern="1200" dirty="0">
+                <a:solidFill>
+                  <a:schemeClr val="tx1"/>
+                </a:solidFill>
+                <a:effectLst/>
+                <a:latin typeface="+mn-lt"/>
+                <a:ea typeface="ＭＳ Ｐゴシック"/>
+                <a:cs typeface="Calibri"/>
+              </a:rPr>
+              <a:t> specific components. We will take a more in-depth look into each of these.</a:t>
             </a:r>
           </a:p>
           <a:p>
@@ -7110,10 +8893,124 @@
                 </a:solidFill>
                 <a:effectLst/>
                 <a:latin typeface="+mn-lt"/>
-                <a:ea typeface="ＭＳ Ｐゴシック" charset="0"/>
-                <a:cs typeface="ＭＳ Ｐゴシック" charset="0"/>
-              </a:rPr>
-              <a:t>To start with, the bootloader source code is obtained. It is then configured for the specific hardware of the embedded system. For example, the correct CPU will be selected, the proper board will be selected, and there may be some custom configuration if the hardware is non-standard.</a:t>
+                <a:ea typeface="ＭＳ Ｐゴシック"/>
+                <a:cs typeface="Calibri"/>
+              </a:rPr>
+              <a:t>To </a:t>
+            </a:r>
+            <a:r>
+              <a:rPr lang="en-US" dirty="0">
+                <a:ea typeface="ＭＳ Ｐゴシック"/>
+                <a:cs typeface="Calibri"/>
+              </a:rPr>
+              <a:t>begin</a:t>
+            </a:r>
+            <a:r>
+              <a:rPr lang="en-US" sz="1200" kern="1200" dirty="0">
+                <a:solidFill>
+                  <a:schemeClr val="tx1"/>
+                </a:solidFill>
+                <a:effectLst/>
+                <a:latin typeface="+mn-lt"/>
+                <a:ea typeface="ＭＳ Ｐゴシック"/>
+                <a:cs typeface="Calibri"/>
+              </a:rPr>
+              <a:t>, the bootloader source code is obtained</a:t>
+            </a:r>
+            <a:r>
+              <a:rPr lang="en-US" dirty="0">
+                <a:ea typeface="ＭＳ Ｐゴシック"/>
+                <a:cs typeface="Calibri"/>
+              </a:rPr>
+              <a:t> and</a:t>
+            </a:r>
+            <a:r>
+              <a:rPr lang="en-US" sz="1200" kern="1200" dirty="0">
+                <a:solidFill>
+                  <a:schemeClr val="tx1"/>
+                </a:solidFill>
+                <a:effectLst/>
+                <a:latin typeface="+mn-lt"/>
+                <a:ea typeface="ＭＳ Ｐゴシック"/>
+                <a:cs typeface="Calibri"/>
+              </a:rPr>
+              <a:t> configured for the specific hardware of the embedded system. For example, the correct CPU </a:t>
+            </a:r>
+            <a:r>
+              <a:rPr lang="en-US" dirty="0">
+                <a:ea typeface="ＭＳ Ｐゴシック"/>
+                <a:cs typeface="Calibri"/>
+              </a:rPr>
+              <a:t>and board</a:t>
+            </a:r>
+            <a:r>
+              <a:rPr lang="en-US" sz="1200" kern="1200" dirty="0">
+                <a:solidFill>
+                  <a:schemeClr val="tx1"/>
+                </a:solidFill>
+                <a:effectLst/>
+                <a:latin typeface="+mn-lt"/>
+                <a:ea typeface="ＭＳ Ｐゴシック"/>
+                <a:cs typeface="Calibri"/>
+              </a:rPr>
+              <a:t> </a:t>
+            </a:r>
+            <a:r>
+              <a:rPr lang="en-US" dirty="0">
+                <a:ea typeface="ＭＳ Ｐゴシック"/>
+                <a:cs typeface="Calibri"/>
+              </a:rPr>
+              <a:t>are </a:t>
+            </a:r>
+            <a:r>
+              <a:rPr lang="en-US" sz="1200" kern="1200" dirty="0">
+                <a:solidFill>
+                  <a:schemeClr val="tx1"/>
+                </a:solidFill>
+                <a:effectLst/>
+                <a:latin typeface="+mn-lt"/>
+                <a:ea typeface="ＭＳ Ｐゴシック"/>
+                <a:cs typeface="Calibri"/>
+              </a:rPr>
+              <a:t>selected, and </a:t>
+            </a:r>
+            <a:r>
+              <a:rPr lang="en-US" dirty="0">
+                <a:ea typeface="ＭＳ Ｐゴシック"/>
+                <a:cs typeface="Calibri"/>
+              </a:rPr>
+              <a:t>some </a:t>
+            </a:r>
+            <a:r>
+              <a:rPr lang="en-US" sz="1200" kern="1200" dirty="0">
+                <a:solidFill>
+                  <a:schemeClr val="tx1"/>
+                </a:solidFill>
+                <a:effectLst/>
+                <a:latin typeface="+mn-lt"/>
+                <a:ea typeface="ＭＳ Ｐゴシック"/>
+                <a:cs typeface="Calibri"/>
+              </a:rPr>
+              <a:t>custom configuration </a:t>
+            </a:r>
+            <a:r>
+              <a:rPr lang="en-US" dirty="0">
+                <a:ea typeface="ＭＳ Ｐゴシック"/>
+                <a:cs typeface="Calibri"/>
+              </a:rPr>
+              <a:t>may be required if</a:t>
+            </a:r>
+            <a:r>
+              <a:rPr lang="en-US" sz="1200" kern="1200" dirty="0">
+                <a:solidFill>
+                  <a:schemeClr val="tx1"/>
+                </a:solidFill>
+                <a:effectLst/>
+                <a:latin typeface="+mn-lt"/>
+                <a:ea typeface="ＭＳ Ｐゴシック"/>
+                <a:cs typeface="Calibri"/>
+              </a:rPr>
+              <a:t> the hardware is non-standard.</a:t>
             </a:r>
           </a:p>
           <a:p>
@@ -7166,10 +9063,10 @@
                 </a:solidFill>
                 <a:effectLst/>
                 <a:latin typeface="+mn-lt"/>
-                <a:ea typeface="ＭＳ Ｐゴシック" charset="0"/>
-                <a:cs typeface="ＭＳ Ｐゴシック" charset="0"/>
-              </a:rPr>
-              <a:t>Then, it is copied onto the boot device, such as a sector of a microSD card, or a boot flash device on the embedded system board.</a:t>
+                <a:ea typeface="ＭＳ Ｐゴシック"/>
+                <a:cs typeface="Calibri"/>
+              </a:rPr>
+              <a:t>Then, it is copied onto the boot device, such as a sector of a microSD card or a boot flash device on the embedded system board.</a:t>
             </a:r>
           </a:p>
           <a:p>
@@ -7270,10 +9167,143 @@
                 </a:solidFill>
                 <a:effectLst/>
                 <a:latin typeface="+mn-lt"/>
-                <a:ea typeface="ＭＳ Ｐゴシック" charset="0"/>
-                <a:cs typeface="ＭＳ Ｐゴシック" charset="0"/>
-              </a:rPr>
-              <a:t>The Linux kernel binary and device tree blob are prepared in a very similar way to the bootloader binary. It begins with obtaining the kernel source code. It is then configured for the specific hardware of the embedded system. Again, the correct CPU will be selected, and the correct board and custom configurations may be made if the hardware is non-standard.</a:t>
+                <a:ea typeface="ＭＳ Ｐゴシック"/>
+                <a:cs typeface="Calibri"/>
+              </a:rPr>
+              <a:t>The Linux kernel binary and </a:t>
+            </a:r>
+            <a:r>
+              <a:rPr lang="en-US" dirty="0">
+                <a:ea typeface="ＭＳ Ｐゴシック"/>
+                <a:cs typeface="Calibri"/>
+              </a:rPr>
+              <a:t>Device</a:t>
+            </a:r>
+            <a:r>
+              <a:rPr lang="en-US" sz="1200" kern="1200" dirty="0">
+                <a:solidFill>
+                  <a:schemeClr val="tx1"/>
+                </a:solidFill>
+                <a:effectLst/>
+                <a:latin typeface="+mn-lt"/>
+                <a:ea typeface="ＭＳ Ｐゴシック"/>
+                <a:cs typeface="Calibri"/>
+              </a:rPr>
+              <a:t> </a:t>
+            </a:r>
+            <a:r>
+              <a:rPr lang="en-US" dirty="0">
+                <a:ea typeface="ＭＳ Ｐゴシック"/>
+                <a:cs typeface="Calibri"/>
+              </a:rPr>
+              <a:t>Tree Blob </a:t>
+            </a:r>
+            <a:r>
+              <a:rPr lang="en-US" sz="1200" kern="1200" dirty="0">
+                <a:solidFill>
+                  <a:schemeClr val="tx1"/>
+                </a:solidFill>
+                <a:effectLst/>
+                <a:latin typeface="+mn-lt"/>
+                <a:ea typeface="ＭＳ Ｐゴシック"/>
+                <a:cs typeface="Calibri"/>
+              </a:rPr>
+              <a:t>are prepared in a </a:t>
+            </a:r>
+            <a:r>
+              <a:rPr lang="en-US" dirty="0">
+                <a:ea typeface="ＭＳ Ｐゴシック"/>
+                <a:cs typeface="Calibri"/>
+              </a:rPr>
+              <a:t>manner very </a:t>
+            </a:r>
+            <a:r>
+              <a:rPr lang="en-US" sz="1200" kern="1200" dirty="0">
+                <a:solidFill>
+                  <a:schemeClr val="tx1"/>
+                </a:solidFill>
+                <a:effectLst/>
+                <a:latin typeface="+mn-lt"/>
+                <a:ea typeface="ＭＳ Ｐゴシック"/>
+                <a:cs typeface="Calibri"/>
+              </a:rPr>
+              <a:t>similar to the bootloader binary. </a:t>
+            </a:r>
+            <a:r>
+              <a:rPr lang="en-US" dirty="0">
+                <a:ea typeface="ＭＳ Ｐゴシック"/>
+                <a:cs typeface="Calibri"/>
+              </a:rPr>
+              <a:t>The process</a:t>
+            </a:r>
+            <a:r>
+              <a:rPr lang="en-US" sz="1200" kern="1200" dirty="0">
+                <a:solidFill>
+                  <a:schemeClr val="tx1"/>
+                </a:solidFill>
+                <a:effectLst/>
+                <a:latin typeface="+mn-lt"/>
+                <a:ea typeface="ＭＳ Ｐゴシック"/>
+                <a:cs typeface="Calibri"/>
+              </a:rPr>
+              <a:t> begins with obtaining the kernel source code</a:t>
+            </a:r>
+            <a:r>
+              <a:rPr lang="en-US" dirty="0">
+                <a:ea typeface="ＭＳ Ｐゴシック"/>
+                <a:cs typeface="Calibri"/>
+              </a:rPr>
+              <a:t>, which is</a:t>
+            </a:r>
+            <a:r>
+              <a:rPr lang="en-US" sz="1200" kern="1200" dirty="0">
+                <a:solidFill>
+                  <a:schemeClr val="tx1"/>
+                </a:solidFill>
+                <a:effectLst/>
+                <a:latin typeface="+mn-lt"/>
+                <a:ea typeface="ＭＳ Ｐゴシック"/>
+                <a:cs typeface="Calibri"/>
+              </a:rPr>
+              <a:t> then configured for the specific hardware of the embedded system. </a:t>
+            </a:r>
+            <a:r>
+              <a:rPr lang="en-US" dirty="0">
+                <a:ea typeface="ＭＳ Ｐゴシック"/>
+                <a:cs typeface="Calibri"/>
+              </a:rPr>
+              <a:t>The</a:t>
+            </a:r>
+            <a:r>
+              <a:rPr lang="en-US" sz="1200" kern="1200" dirty="0">
+                <a:solidFill>
+                  <a:schemeClr val="tx1"/>
+                </a:solidFill>
+                <a:effectLst/>
+                <a:latin typeface="+mn-lt"/>
+                <a:ea typeface="ＭＳ Ｐゴシック"/>
+                <a:cs typeface="Calibri"/>
+              </a:rPr>
+              <a:t> correct CPU </a:t>
+            </a:r>
+            <a:r>
+              <a:rPr lang="en-US" dirty="0">
+                <a:ea typeface="ＭＳ Ｐゴシック"/>
+                <a:cs typeface="Calibri"/>
+              </a:rPr>
+              <a:t>and board will</a:t>
+            </a:r>
+            <a:r>
+              <a:rPr lang="en-US" sz="1200" kern="1200" dirty="0">
+                <a:solidFill>
+                  <a:schemeClr val="tx1"/>
+                </a:solidFill>
+                <a:effectLst/>
+                <a:latin typeface="+mn-lt"/>
+                <a:ea typeface="ＭＳ Ｐゴシック"/>
+                <a:cs typeface="Calibri"/>
+              </a:rPr>
+              <a:t> be selected, and custom configurations may be made if the hardware is non-standard.</a:t>
             </a:r>
           </a:p>
           <a:p>
@@ -7298,10 +9328,67 @@
                 </a:solidFill>
                 <a:effectLst/>
                 <a:latin typeface="+mn-lt"/>
-                <a:ea typeface="ＭＳ Ｐゴシック" charset="0"/>
-                <a:cs typeface="ＭＳ Ｐゴシック" charset="0"/>
-              </a:rPr>
-              <a:t>It is then cross-compiled and will produce an executable Linux kernel, executable Linux kernel modules, as well as a device tree blob.</a:t>
+                <a:ea typeface="ＭＳ Ｐゴシック"/>
+                <a:cs typeface="Calibri"/>
+              </a:rPr>
+              <a:t>It is then cross-compiled and will produce an executable Linux kernel, executable Linux kernel modules, as well as a </a:t>
+            </a:r>
+            <a:r>
+              <a:rPr lang="en-US" dirty="0">
+                <a:ea typeface="ＭＳ Ｐゴシック"/>
+                <a:cs typeface="Calibri"/>
+              </a:rPr>
+              <a:t>Device</a:t>
+            </a:r>
+            <a:r>
+              <a:rPr lang="en-US" sz="1200" kern="1200" dirty="0">
+                <a:solidFill>
+                  <a:schemeClr val="tx1"/>
+                </a:solidFill>
+                <a:effectLst/>
+                <a:latin typeface="+mn-lt"/>
+                <a:ea typeface="ＭＳ Ｐゴシック"/>
+                <a:cs typeface="Calibri"/>
+              </a:rPr>
+              <a:t> </a:t>
+            </a:r>
+            <a:r>
+              <a:rPr lang="en-US" dirty="0">
+                <a:ea typeface="ＭＳ Ｐゴシック"/>
+                <a:cs typeface="Calibri"/>
+              </a:rPr>
+              <a:t>Tree</a:t>
+            </a:r>
+            <a:r>
+              <a:rPr lang="en-US" sz="1200" kern="1200" dirty="0">
+                <a:solidFill>
+                  <a:schemeClr val="tx1"/>
+                </a:solidFill>
+                <a:effectLst/>
+                <a:latin typeface="+mn-lt"/>
+                <a:ea typeface="ＭＳ Ｐゴシック"/>
+                <a:cs typeface="Calibri"/>
+              </a:rPr>
+              <a:t> </a:t>
+            </a:r>
+            <a:r>
+              <a:rPr lang="en-US" dirty="0">
+                <a:ea typeface="ＭＳ Ｐゴシック"/>
+                <a:cs typeface="Calibri"/>
+              </a:rPr>
+              <a:t>Blob</a:t>
+            </a:r>
+            <a:r>
+              <a:rPr lang="en-US" sz="1200" kern="1200" dirty="0">
+                <a:solidFill>
+                  <a:schemeClr val="tx1"/>
+                </a:solidFill>
+                <a:effectLst/>
+                <a:latin typeface="+mn-lt"/>
+                <a:ea typeface="ＭＳ Ｐゴシック"/>
+                <a:cs typeface="Calibri"/>
+              </a:rPr>
+              <a:t>.</a:t>
             </a:r>
           </a:p>
           <a:p>
@@ -7544,7 +9631,6 @@
           <a:ln>
             <a:noFill/>
           </a:ln>
-          <a:extLst/>
         </p:spPr>
         <p:txBody>
           <a:bodyPr lIns="0" tIns="0" rIns="0" bIns="0"/>
@@ -7700,7 +9786,6 @@
           <a:ln>
             <a:noFill/>
           </a:ln>
-          <a:extLst/>
         </p:spPr>
         <p:txBody>
           <a:bodyPr lIns="0" tIns="0" rIns="0" bIns="0"/>
@@ -8205,7 +10290,6 @@
           <a:ln>
             <a:noFill/>
           </a:ln>
-          <a:extLst/>
         </p:spPr>
         <p:txBody>
           <a:bodyPr lIns="0" tIns="0" rIns="0" bIns="0">
@@ -8403,9 +10487,7 @@
       </p:pic>
       <p:sp>
         <p:nvSpPr>
-          <p:cNvPr id="21" name="Text Placeholder 28">
-            <a:extLst/>
-          </p:cNvPr>
+          <p:cNvPr id="21" name="Text Placeholder 28"/>
           <p:cNvSpPr>
             <a:spLocks noGrp="1"/>
           </p:cNvSpPr>
@@ -8444,9 +10526,7 @@
       </p:sp>
       <p:sp>
         <p:nvSpPr>
-          <p:cNvPr id="22" name="Text Placeholder 28">
-            <a:extLst/>
-          </p:cNvPr>
+          <p:cNvPr id="22" name="Text Placeholder 28"/>
           <p:cNvSpPr>
             <a:spLocks noGrp="1"/>
           </p:cNvSpPr>
@@ -8485,9 +10565,7 @@
       </p:sp>
       <p:sp>
         <p:nvSpPr>
-          <p:cNvPr id="26" name="Title 1">
-            <a:extLst/>
-          </p:cNvPr>
+          <p:cNvPr id="26" name="Title 1"/>
           <p:cNvSpPr>
             <a:spLocks noGrp="1"/>
           </p:cNvSpPr>
@@ -8562,9 +10640,7 @@
       </p:sp>
       <p:sp>
         <p:nvSpPr>
-          <p:cNvPr id="20" name="Subtitle 2">
-            <a:extLst/>
-          </p:cNvPr>
+          <p:cNvPr id="20" name="Subtitle 2"/>
           <p:cNvSpPr>
             <a:spLocks noGrp="1"/>
           </p:cNvSpPr>
@@ -8736,9 +10812,7 @@
       </p:cxnSp>
       <p:sp>
         <p:nvSpPr>
-          <p:cNvPr id="2" name="Title 1">
-            <a:extLst/>
-          </p:cNvPr>
+          <p:cNvPr id="2" name="Title 1"/>
           <p:cNvSpPr>
             <a:spLocks noGrp="1"/>
           </p:cNvSpPr>
@@ -8760,9 +10834,7 @@
       </p:sp>
       <p:sp>
         <p:nvSpPr>
-          <p:cNvPr id="44" name="Text Placeholder 43">
-            <a:extLst/>
-          </p:cNvPr>
+          <p:cNvPr id="44" name="Text Placeholder 43"/>
           <p:cNvSpPr>
             <a:spLocks noGrp="1"/>
           </p:cNvSpPr>
@@ -8805,9 +10877,7 @@
       </p:sp>
       <p:sp>
         <p:nvSpPr>
-          <p:cNvPr id="9" name="Text Placeholder 131">
-            <a:extLst/>
-          </p:cNvPr>
+          <p:cNvPr id="9" name="Text Placeholder 131"/>
           <p:cNvSpPr>
             <a:spLocks noGrp="1"/>
           </p:cNvSpPr>
@@ -8857,9 +10927,7 @@
       </p:sp>
       <p:sp>
         <p:nvSpPr>
-          <p:cNvPr id="4" name="Content Placeholder 3">
-            <a:extLst/>
-          </p:cNvPr>
+          <p:cNvPr id="4" name="Content Placeholder 3"/>
           <p:cNvSpPr>
             <a:spLocks noGrp="1"/>
           </p:cNvSpPr>
@@ -8949,9 +11017,7 @@
       </p:sp>
       <p:sp>
         <p:nvSpPr>
-          <p:cNvPr id="10" name="Text Placeholder 131">
-            <a:extLst/>
-          </p:cNvPr>
+          <p:cNvPr id="10" name="Text Placeholder 131"/>
           <p:cNvSpPr>
             <a:spLocks noGrp="1"/>
           </p:cNvSpPr>
@@ -9001,9 +11067,7 @@
       </p:sp>
       <p:sp>
         <p:nvSpPr>
-          <p:cNvPr id="8" name="Content Placeholder 7">
-            <a:extLst/>
-          </p:cNvPr>
+          <p:cNvPr id="8" name="Content Placeholder 7"/>
           <p:cNvSpPr>
             <a:spLocks noGrp="1"/>
           </p:cNvSpPr>
@@ -9224,9 +11288,7 @@
       </p:grpSp>
       <p:sp>
         <p:nvSpPr>
-          <p:cNvPr id="2" name="Title 1">
-            <a:extLst/>
-          </p:cNvPr>
+          <p:cNvPr id="2" name="Title 1"/>
           <p:cNvSpPr>
             <a:spLocks noGrp="1"/>
           </p:cNvSpPr>
@@ -9248,9 +11310,7 @@
       </p:sp>
       <p:sp>
         <p:nvSpPr>
-          <p:cNvPr id="44" name="Text Placeholder 43">
-            <a:extLst/>
-          </p:cNvPr>
+          <p:cNvPr id="44" name="Text Placeholder 43"/>
           <p:cNvSpPr>
             <a:spLocks noGrp="1"/>
           </p:cNvSpPr>
@@ -9290,9 +11350,7 @@
       </p:sp>
       <p:sp>
         <p:nvSpPr>
-          <p:cNvPr id="7" name="Text Placeholder 2">
-            <a:extLst/>
-          </p:cNvPr>
+          <p:cNvPr id="7" name="Text Placeholder 2"/>
           <p:cNvSpPr>
             <a:spLocks noGrp="1"/>
           </p:cNvSpPr>
@@ -9363,9 +11421,7 @@
       </p:sp>
       <p:sp>
         <p:nvSpPr>
-          <p:cNvPr id="100" name="Text Placeholder 131">
-            <a:extLst/>
-          </p:cNvPr>
+          <p:cNvPr id="100" name="Text Placeholder 131"/>
           <p:cNvSpPr>
             <a:spLocks noGrp="1"/>
           </p:cNvSpPr>
@@ -9415,9 +11471,7 @@
       </p:sp>
       <p:sp>
         <p:nvSpPr>
-          <p:cNvPr id="13" name="Text Placeholder 2">
-            <a:extLst/>
-          </p:cNvPr>
+          <p:cNvPr id="13" name="Text Placeholder 2"/>
           <p:cNvSpPr>
             <a:spLocks noGrp="1"/>
           </p:cNvSpPr>
@@ -9460,9 +11514,7 @@
       </p:sp>
       <p:sp>
         <p:nvSpPr>
-          <p:cNvPr id="14" name="Text Placeholder 2">
-            <a:extLst/>
-          </p:cNvPr>
+          <p:cNvPr id="14" name="Text Placeholder 2"/>
           <p:cNvSpPr>
             <a:spLocks noGrp="1"/>
           </p:cNvSpPr>
@@ -9512,9 +11564,7 @@
       </p:sp>
       <p:sp>
         <p:nvSpPr>
-          <p:cNvPr id="15" name="Text Placeholder 131">
-            <a:extLst/>
-          </p:cNvPr>
+          <p:cNvPr id="15" name="Text Placeholder 131"/>
           <p:cNvSpPr>
             <a:spLocks noGrp="1"/>
           </p:cNvSpPr>
@@ -9564,9 +11614,7 @@
       </p:sp>
       <p:sp>
         <p:nvSpPr>
-          <p:cNvPr id="16" name="Text Placeholder 131">
-            <a:extLst/>
-          </p:cNvPr>
+          <p:cNvPr id="16" name="Text Placeholder 131"/>
           <p:cNvSpPr>
             <a:spLocks noGrp="1"/>
           </p:cNvSpPr>
@@ -9685,9 +11733,7 @@
       </p:cxnSp>
       <p:sp>
         <p:nvSpPr>
-          <p:cNvPr id="2" name="Title 1">
-            <a:extLst/>
-          </p:cNvPr>
+          <p:cNvPr id="2" name="Title 1"/>
           <p:cNvSpPr>
             <a:spLocks noGrp="1"/>
           </p:cNvSpPr>
@@ -9709,9 +11755,7 @@
       </p:sp>
       <p:sp>
         <p:nvSpPr>
-          <p:cNvPr id="44" name="Text Placeholder 43">
-            <a:extLst/>
-          </p:cNvPr>
+          <p:cNvPr id="44" name="Text Placeholder 43"/>
           <p:cNvSpPr>
             <a:spLocks noGrp="1"/>
           </p:cNvSpPr>
@@ -9751,9 +11795,7 @@
       </p:sp>
       <p:sp>
         <p:nvSpPr>
-          <p:cNvPr id="47" name="Text Placeholder 2">
-            <a:extLst/>
-          </p:cNvPr>
+          <p:cNvPr id="47" name="Text Placeholder 2"/>
           <p:cNvSpPr>
             <a:spLocks noGrp="1"/>
           </p:cNvSpPr>
@@ -9846,9 +11888,7 @@
       </p:sp>
       <p:sp>
         <p:nvSpPr>
-          <p:cNvPr id="18" name="Text Placeholder 2">
-            <a:extLst/>
-          </p:cNvPr>
+          <p:cNvPr id="18" name="Text Placeholder 2"/>
           <p:cNvSpPr>
             <a:spLocks noGrp="1"/>
           </p:cNvSpPr>
@@ -9967,9 +12007,7 @@
       </p:cxnSp>
       <p:sp>
         <p:nvSpPr>
-          <p:cNvPr id="2" name="Title 1">
-            <a:extLst/>
-          </p:cNvPr>
+          <p:cNvPr id="2" name="Title 1"/>
           <p:cNvSpPr>
             <a:spLocks noGrp="1"/>
           </p:cNvSpPr>
@@ -9991,9 +12029,7 @@
       </p:sp>
       <p:sp>
         <p:nvSpPr>
-          <p:cNvPr id="44" name="Text Placeholder 43">
-            <a:extLst/>
-          </p:cNvPr>
+          <p:cNvPr id="44" name="Text Placeholder 43"/>
           <p:cNvSpPr>
             <a:spLocks noGrp="1"/>
           </p:cNvSpPr>
@@ -10033,9 +12069,7 @@
       </p:sp>
       <p:sp>
         <p:nvSpPr>
-          <p:cNvPr id="4" name="Content Placeholder 3">
-            <a:extLst/>
-          </p:cNvPr>
+          <p:cNvPr id="4" name="Content Placeholder 3"/>
           <p:cNvSpPr>
             <a:spLocks noGrp="1"/>
           </p:cNvSpPr>
@@ -10125,9 +12159,7 @@
       </p:sp>
       <p:sp>
         <p:nvSpPr>
-          <p:cNvPr id="6" name="Content Placeholder 5">
-            <a:extLst/>
-          </p:cNvPr>
+          <p:cNvPr id="6" name="Content Placeholder 5"/>
           <p:cNvSpPr>
             <a:spLocks noGrp="1"/>
           </p:cNvSpPr>
@@ -10305,9 +12337,7 @@
       </p:grpSp>
       <p:sp>
         <p:nvSpPr>
-          <p:cNvPr id="2" name="Title 1">
-            <a:extLst/>
-          </p:cNvPr>
+          <p:cNvPr id="2" name="Title 1"/>
           <p:cNvSpPr>
             <a:spLocks noGrp="1"/>
           </p:cNvSpPr>
@@ -10329,9 +12359,7 @@
       </p:sp>
       <p:sp>
         <p:nvSpPr>
-          <p:cNvPr id="44" name="Text Placeholder 43">
-            <a:extLst/>
-          </p:cNvPr>
+          <p:cNvPr id="44" name="Text Placeholder 43"/>
           <p:cNvSpPr>
             <a:spLocks noGrp="1"/>
           </p:cNvSpPr>
@@ -10371,9 +12399,7 @@
       </p:sp>
       <p:sp>
         <p:nvSpPr>
-          <p:cNvPr id="18" name="Text Placeholder 131">
-            <a:extLst/>
-          </p:cNvPr>
+          <p:cNvPr id="18" name="Text Placeholder 131"/>
           <p:cNvSpPr>
             <a:spLocks noGrp="1"/>
           </p:cNvSpPr>
@@ -10423,9 +12449,7 @@
       </p:sp>
       <p:sp>
         <p:nvSpPr>
-          <p:cNvPr id="19" name="Text Placeholder 131">
-            <a:extLst/>
-          </p:cNvPr>
+          <p:cNvPr id="19" name="Text Placeholder 131"/>
           <p:cNvSpPr>
             <a:spLocks noGrp="1"/>
           </p:cNvSpPr>
@@ -10465,9 +12489,7 @@
       </p:sp>
       <p:sp>
         <p:nvSpPr>
-          <p:cNvPr id="20" name="Text Placeholder 131">
-            <a:extLst/>
-          </p:cNvPr>
+          <p:cNvPr id="20" name="Text Placeholder 131"/>
           <p:cNvSpPr>
             <a:spLocks noGrp="1"/>
           </p:cNvSpPr>
@@ -10507,9 +12529,7 @@
       </p:sp>
       <p:sp>
         <p:nvSpPr>
-          <p:cNvPr id="4" name="Content Placeholder 3">
-            <a:extLst/>
-          </p:cNvPr>
+          <p:cNvPr id="4" name="Content Placeholder 3"/>
           <p:cNvSpPr>
             <a:spLocks noGrp="1"/>
           </p:cNvSpPr>
@@ -10570,9 +12590,7 @@
       </p:sp>
       <p:sp>
         <p:nvSpPr>
-          <p:cNvPr id="6" name="Content Placeholder 5">
-            <a:extLst/>
-          </p:cNvPr>
+          <p:cNvPr id="6" name="Content Placeholder 5"/>
           <p:cNvSpPr>
             <a:spLocks noGrp="1"/>
           </p:cNvSpPr>
@@ -10633,9 +12651,7 @@
       </p:sp>
       <p:sp>
         <p:nvSpPr>
-          <p:cNvPr id="9" name="Content Placeholder 8">
-            <a:extLst/>
-          </p:cNvPr>
+          <p:cNvPr id="9" name="Content Placeholder 8"/>
           <p:cNvSpPr>
             <a:spLocks noGrp="1"/>
           </p:cNvSpPr>
@@ -10726,9 +12742,7 @@
       </p:grpSpPr>
       <p:sp>
         <p:nvSpPr>
-          <p:cNvPr id="2" name="Title 1">
-            <a:extLst/>
-          </p:cNvPr>
+          <p:cNvPr id="2" name="Title 1"/>
           <p:cNvSpPr>
             <a:spLocks noGrp="1"/>
           </p:cNvSpPr>
@@ -10750,9 +12764,7 @@
       </p:sp>
       <p:sp>
         <p:nvSpPr>
-          <p:cNvPr id="44" name="Text Placeholder 43">
-            <a:extLst/>
-          </p:cNvPr>
+          <p:cNvPr id="44" name="Text Placeholder 43"/>
           <p:cNvSpPr>
             <a:spLocks noGrp="1"/>
           </p:cNvSpPr>
@@ -10792,9 +12804,7 @@
       </p:sp>
       <p:sp>
         <p:nvSpPr>
-          <p:cNvPr id="6" name="Picture Placeholder 5">
-            <a:extLst/>
-          </p:cNvPr>
+          <p:cNvPr id="6" name="Picture Placeholder 5"/>
           <p:cNvSpPr>
             <a:spLocks noGrp="1"/>
           </p:cNvSpPr>
@@ -10828,9 +12838,7 @@
       </p:sp>
       <p:sp>
         <p:nvSpPr>
-          <p:cNvPr id="104" name="Picture Placeholder 5">
-            <a:extLst/>
-          </p:cNvPr>
+          <p:cNvPr id="104" name="Picture Placeholder 5"/>
           <p:cNvSpPr>
             <a:spLocks noGrp="1"/>
           </p:cNvSpPr>
@@ -10864,9 +12872,7 @@
       </p:sp>
       <p:sp>
         <p:nvSpPr>
-          <p:cNvPr id="105" name="Picture Placeholder 5">
-            <a:extLst/>
-          </p:cNvPr>
+          <p:cNvPr id="105" name="Picture Placeholder 5"/>
           <p:cNvSpPr>
             <a:spLocks noGrp="1"/>
           </p:cNvSpPr>
@@ -10900,9 +12906,7 @@
       </p:sp>
       <p:sp>
         <p:nvSpPr>
-          <p:cNvPr id="106" name="Picture Placeholder 5">
-            <a:extLst/>
-          </p:cNvPr>
+          <p:cNvPr id="106" name="Picture Placeholder 5"/>
           <p:cNvSpPr>
             <a:spLocks noGrp="1"/>
           </p:cNvSpPr>
@@ -10936,9 +12940,7 @@
       </p:sp>
       <p:sp>
         <p:nvSpPr>
-          <p:cNvPr id="14" name="Text Placeholder 7">
-            <a:extLst/>
-          </p:cNvPr>
+          <p:cNvPr id="14" name="Text Placeholder 7"/>
           <p:cNvSpPr>
             <a:spLocks noGrp="1"/>
           </p:cNvSpPr>
@@ -11032,9 +13034,7 @@
       </p:sp>
       <p:sp>
         <p:nvSpPr>
-          <p:cNvPr id="16" name="Text Placeholder 7">
-            <a:extLst/>
-          </p:cNvPr>
+          <p:cNvPr id="16" name="Text Placeholder 7"/>
           <p:cNvSpPr>
             <a:spLocks noGrp="1"/>
           </p:cNvSpPr>
@@ -11154,9 +13154,7 @@
       </p:grpSpPr>
       <p:sp>
         <p:nvSpPr>
-          <p:cNvPr id="2" name="Title 1">
-            <a:extLst/>
-          </p:cNvPr>
+          <p:cNvPr id="2" name="Title 1"/>
           <p:cNvSpPr>
             <a:spLocks noGrp="1"/>
           </p:cNvSpPr>
@@ -11178,9 +13176,7 @@
       </p:sp>
       <p:sp>
         <p:nvSpPr>
-          <p:cNvPr id="44" name="Text Placeholder 43">
-            <a:extLst/>
-          </p:cNvPr>
+          <p:cNvPr id="44" name="Text Placeholder 43"/>
           <p:cNvSpPr>
             <a:spLocks noGrp="1"/>
           </p:cNvSpPr>
@@ -11220,9 +13216,7 @@
       </p:sp>
       <p:sp>
         <p:nvSpPr>
-          <p:cNvPr id="7" name="Text Placeholder 2">
-            <a:extLst/>
-          </p:cNvPr>
+          <p:cNvPr id="7" name="Text Placeholder 2"/>
           <p:cNvSpPr>
             <a:spLocks noGrp="1"/>
           </p:cNvSpPr>
@@ -11286,9 +13280,7 @@
       </p:sp>
       <p:sp>
         <p:nvSpPr>
-          <p:cNvPr id="50" name="Picture Placeholder 5">
-            <a:extLst/>
-          </p:cNvPr>
+          <p:cNvPr id="50" name="Picture Placeholder 5"/>
           <p:cNvSpPr>
             <a:spLocks noGrp="1"/>
           </p:cNvSpPr>
@@ -11352,9 +13344,7 @@
       </p:grpSpPr>
       <p:sp>
         <p:nvSpPr>
-          <p:cNvPr id="2" name="Title 1">
-            <a:extLst/>
-          </p:cNvPr>
+          <p:cNvPr id="2" name="Title 1"/>
           <p:cNvSpPr>
             <a:spLocks noGrp="1"/>
           </p:cNvSpPr>
@@ -11383,9 +13373,7 @@
       </p:sp>
       <p:sp>
         <p:nvSpPr>
-          <p:cNvPr id="10" name="Table Placeholder 3">
-            <a:extLst/>
-          </p:cNvPr>
+          <p:cNvPr id="10" name="Table Placeholder 3"/>
           <p:cNvSpPr>
             <a:spLocks noGrp="1"/>
           </p:cNvSpPr>
@@ -11449,9 +13437,7 @@
       </p:grpSpPr>
       <p:sp>
         <p:nvSpPr>
-          <p:cNvPr id="2" name="Title 1">
-            <a:extLst/>
-          </p:cNvPr>
+          <p:cNvPr id="2" name="Title 1"/>
           <p:cNvSpPr>
             <a:spLocks noGrp="1"/>
           </p:cNvSpPr>
@@ -11473,9 +13459,7 @@
       </p:sp>
       <p:sp>
         <p:nvSpPr>
-          <p:cNvPr id="44" name="Text Placeholder 43">
-            <a:extLst/>
-          </p:cNvPr>
+          <p:cNvPr id="44" name="Text Placeholder 43"/>
           <p:cNvSpPr>
             <a:spLocks noGrp="1"/>
           </p:cNvSpPr>
@@ -11515,9 +13499,7 @@
       </p:sp>
       <p:sp>
         <p:nvSpPr>
-          <p:cNvPr id="7" name="Text Placeholder 2">
-            <a:extLst/>
-          </p:cNvPr>
+          <p:cNvPr id="7" name="Text Placeholder 2"/>
           <p:cNvSpPr>
             <a:spLocks noGrp="1"/>
           </p:cNvSpPr>
@@ -11644,9 +13626,7 @@
       </p:grpSpPr>
       <p:sp>
         <p:nvSpPr>
-          <p:cNvPr id="2" name="Title 1">
-            <a:extLst/>
-          </p:cNvPr>
+          <p:cNvPr id="2" name="Title 1"/>
           <p:cNvSpPr>
             <a:spLocks noGrp="1"/>
           </p:cNvSpPr>
@@ -11845,7 +13825,6 @@
           <a:ln>
             <a:noFill/>
           </a:ln>
-          <a:extLst/>
         </p:spPr>
         <p:txBody>
           <a:bodyPr lIns="0" tIns="0" rIns="0" bIns="0"/>
@@ -12001,7 +13980,6 @@
           <a:ln>
             <a:noFill/>
           </a:ln>
-          <a:extLst/>
         </p:spPr>
         <p:txBody>
           <a:bodyPr lIns="0" tIns="0" rIns="0" bIns="0"/>
@@ -12506,7 +14484,6 @@
           <a:ln>
             <a:noFill/>
           </a:ln>
-          <a:extLst/>
         </p:spPr>
         <p:txBody>
           <a:bodyPr lIns="0" tIns="0" rIns="0" bIns="0">
@@ -12704,9 +14681,7 @@
       </p:pic>
       <p:sp>
         <p:nvSpPr>
-          <p:cNvPr id="21" name="Text Placeholder 28">
-            <a:extLst/>
-          </p:cNvPr>
+          <p:cNvPr id="21" name="Text Placeholder 28"/>
           <p:cNvSpPr>
             <a:spLocks noGrp="1"/>
           </p:cNvSpPr>
@@ -12745,9 +14720,7 @@
       </p:sp>
       <p:sp>
         <p:nvSpPr>
-          <p:cNvPr id="22" name="Text Placeholder 28">
-            <a:extLst/>
-          </p:cNvPr>
+          <p:cNvPr id="22" name="Text Placeholder 28"/>
           <p:cNvSpPr>
             <a:spLocks noGrp="1"/>
           </p:cNvSpPr>
@@ -12786,9 +14759,7 @@
       </p:sp>
       <p:sp>
         <p:nvSpPr>
-          <p:cNvPr id="26" name="Title 1">
-            <a:extLst/>
-          </p:cNvPr>
+          <p:cNvPr id="26" name="Title 1"/>
           <p:cNvSpPr>
             <a:spLocks noGrp="1"/>
           </p:cNvSpPr>
@@ -12863,9 +14834,7 @@
       </p:sp>
       <p:sp>
         <p:nvSpPr>
-          <p:cNvPr id="17" name="Subtitle 2">
-            <a:extLst/>
-          </p:cNvPr>
+          <p:cNvPr id="17" name="Subtitle 2"/>
           <p:cNvSpPr>
             <a:spLocks noGrp="1"/>
           </p:cNvSpPr>
@@ -13030,7 +14999,6 @@
           <a:ln>
             <a:noFill/>
           </a:ln>
-          <a:extLst/>
         </p:spPr>
         <p:txBody>
           <a:bodyPr lIns="0" tIns="0" rIns="0" bIns="0">
@@ -13268,7 +15236,6 @@
           <a:ln>
             <a:noFill/>
           </a:ln>
-          <a:extLst/>
         </p:spPr>
         <p:txBody>
           <a:bodyPr lIns="0" tIns="0" rIns="0" bIns="0">
@@ -13819,7 +15786,6 @@
           <a:ln>
             <a:noFill/>
           </a:ln>
-          <a:extLst/>
         </p:spPr>
         <p:txBody>
           <a:bodyPr lIns="0" tIns="0" rIns="0" bIns="0">
@@ -13950,7 +15916,7 @@
                   <a:schemeClr val="bg1"/>
                 </a:solidFill>
               </a:rPr>
-              <a:t>© 2017 Arm Limited </a:t>
+              <a:t>© 2015 Arm Limited </a:t>
             </a:r>
           </a:p>
         </p:txBody>
@@ -14019,7 +15985,6 @@
           <a:ln>
             <a:noFill/>
           </a:ln>
-          <a:extLst/>
         </p:spPr>
         <p:txBody>
           <a:bodyPr lIns="0" tIns="0" rIns="0" bIns="0">
@@ -14197,7 +16162,6 @@
           <a:ln>
             <a:noFill/>
           </a:ln>
-          <a:extLst/>
         </p:spPr>
         <p:txBody>
           <a:bodyPr lIns="0" tIns="0" rIns="0" bIns="0">
@@ -14435,7 +16399,6 @@
           <a:ln>
             <a:noFill/>
           </a:ln>
-          <a:extLst/>
         </p:spPr>
         <p:txBody>
           <a:bodyPr lIns="0" tIns="0" rIns="0" bIns="0">
@@ -14566,7 +16529,7 @@
                   <a:schemeClr val="bg1"/>
                 </a:solidFill>
               </a:rPr>
-              <a:t>© 2017 Arm Limited </a:t>
+              <a:t>© 2025 Arm Limited </a:t>
             </a:r>
           </a:p>
         </p:txBody>
@@ -15061,9 +17024,7 @@
       </p:pic>
       <p:sp>
         <p:nvSpPr>
-          <p:cNvPr id="2" name="Title 1">
-            <a:extLst/>
-          </p:cNvPr>
+          <p:cNvPr id="2" name="Title 1"/>
           <p:cNvSpPr>
             <a:spLocks noGrp="1"/>
           </p:cNvSpPr>
@@ -15094,9 +17055,7 @@
       </p:sp>
       <p:sp>
         <p:nvSpPr>
-          <p:cNvPr id="7" name="Text Placeholder 43">
-            <a:extLst/>
-          </p:cNvPr>
+          <p:cNvPr id="7" name="Text Placeholder 43"/>
           <p:cNvSpPr>
             <a:spLocks noGrp="1"/>
           </p:cNvSpPr>
@@ -15133,9 +17092,7 @@
       </p:sp>
       <p:sp>
         <p:nvSpPr>
-          <p:cNvPr id="8" name="Text Placeholder 2">
-            <a:extLst/>
-          </p:cNvPr>
+          <p:cNvPr id="8" name="Text Placeholder 2"/>
           <p:cNvSpPr>
             <a:spLocks noGrp="1"/>
           </p:cNvSpPr>
@@ -15450,7 +17407,6 @@
           <a:ln>
             <a:noFill/>
           </a:ln>
-          <a:extLst/>
         </p:spPr>
         <p:txBody>
           <a:bodyPr lIns="0" tIns="0" rIns="0" bIns="0"/>
@@ -15606,7 +17562,6 @@
           <a:ln>
             <a:noFill/>
           </a:ln>
-          <a:extLst/>
         </p:spPr>
         <p:txBody>
           <a:bodyPr lIns="0" tIns="0" rIns="0" bIns="0"/>
@@ -16111,7 +18066,6 @@
           <a:ln>
             <a:noFill/>
           </a:ln>
-          <a:extLst/>
         </p:spPr>
         <p:txBody>
           <a:bodyPr lIns="0" tIns="0" rIns="0" bIns="0">
@@ -16309,9 +18263,7 @@
       </p:pic>
       <p:sp>
         <p:nvSpPr>
-          <p:cNvPr id="21" name="Text Placeholder 28">
-            <a:extLst/>
-          </p:cNvPr>
+          <p:cNvPr id="21" name="Text Placeholder 28"/>
           <p:cNvSpPr>
             <a:spLocks noGrp="1"/>
           </p:cNvSpPr>
@@ -16350,9 +18302,7 @@
       </p:sp>
       <p:sp>
         <p:nvSpPr>
-          <p:cNvPr id="22" name="Text Placeholder 28">
-            <a:extLst/>
-          </p:cNvPr>
+          <p:cNvPr id="22" name="Text Placeholder 28"/>
           <p:cNvSpPr>
             <a:spLocks noGrp="1"/>
           </p:cNvSpPr>
@@ -16391,9 +18341,7 @@
       </p:sp>
       <p:sp>
         <p:nvSpPr>
-          <p:cNvPr id="26" name="Title 1">
-            <a:extLst/>
-          </p:cNvPr>
+          <p:cNvPr id="26" name="Title 1"/>
           <p:cNvSpPr>
             <a:spLocks noGrp="1"/>
           </p:cNvSpPr>
@@ -16468,9 +18416,7 @@
       </p:sp>
       <p:sp>
         <p:nvSpPr>
-          <p:cNvPr id="20" name="Subtitle 2">
-            <a:extLst/>
-          </p:cNvPr>
+          <p:cNvPr id="20" name="Subtitle 2"/>
           <p:cNvSpPr>
             <a:spLocks noGrp="1"/>
           </p:cNvSpPr>
@@ -16635,7 +18581,6 @@
           <a:ln>
             <a:noFill/>
           </a:ln>
-          <a:extLst/>
         </p:spPr>
         <p:txBody>
           <a:bodyPr lIns="0" tIns="0" rIns="0" bIns="0"/>
@@ -16791,7 +18736,6 @@
           <a:ln>
             <a:noFill/>
           </a:ln>
-          <a:extLst/>
         </p:spPr>
         <p:txBody>
           <a:bodyPr lIns="0" tIns="0" rIns="0" bIns="0">
@@ -16922,7 +18866,7 @@
                   <a:schemeClr val="bg1"/>
                 </a:solidFill>
               </a:rPr>
-              <a:t>© 2017 Arm Limited </a:t>
+              <a:t>© 2025 Arm Limited </a:t>
             </a:r>
           </a:p>
         </p:txBody>
@@ -16989,9 +18933,7 @@
       </p:pic>
       <p:sp>
         <p:nvSpPr>
-          <p:cNvPr id="19" name="Title 1">
-            <a:extLst/>
-          </p:cNvPr>
+          <p:cNvPr id="19" name="Title 1"/>
           <p:cNvSpPr>
             <a:spLocks noGrp="1"/>
           </p:cNvSpPr>
@@ -17030,9 +18972,7 @@
       </p:sp>
       <p:sp>
         <p:nvSpPr>
-          <p:cNvPr id="20" name="Subtitle 2">
-            <a:extLst/>
-          </p:cNvPr>
+          <p:cNvPr id="20" name="Subtitle 2"/>
           <p:cNvSpPr>
             <a:spLocks noGrp="1"/>
           </p:cNvSpPr>
@@ -17135,9 +19075,7 @@
       </p:sp>
       <p:sp>
         <p:nvSpPr>
-          <p:cNvPr id="21" name="Text Placeholder 28">
-            <a:extLst/>
-          </p:cNvPr>
+          <p:cNvPr id="21" name="Text Placeholder 28"/>
           <p:cNvSpPr>
             <a:spLocks noGrp="1"/>
           </p:cNvSpPr>
@@ -17176,9 +19114,7 @@
       </p:sp>
       <p:sp>
         <p:nvSpPr>
-          <p:cNvPr id="22" name="Text Placeholder 28">
-            <a:extLst/>
-          </p:cNvPr>
+          <p:cNvPr id="22" name="Text Placeholder 28"/>
           <p:cNvSpPr>
             <a:spLocks noGrp="1"/>
           </p:cNvSpPr>
@@ -17561,7 +19497,6 @@
           <a:ln>
             <a:noFill/>
           </a:ln>
-          <a:extLst/>
         </p:spPr>
         <p:txBody>
           <a:bodyPr lIns="0" tIns="0" rIns="0" bIns="0">
@@ -18048,7 +19983,6 @@
           <a:ln>
             <a:noFill/>
           </a:ln>
-          <a:extLst/>
         </p:spPr>
         <p:txBody>
           <a:bodyPr lIns="0" tIns="0" rIns="0" bIns="0">
@@ -18533,7 +20467,6 @@
           <a:ln>
             <a:noFill/>
           </a:ln>
-          <a:extLst/>
         </p:spPr>
         <p:txBody>
           <a:bodyPr lIns="0" tIns="0" rIns="0" bIns="0">
@@ -18954,7 +20887,6 @@
           <a:ln>
             <a:noFill/>
           </a:ln>
-          <a:extLst/>
         </p:spPr>
         <p:txBody>
           <a:bodyPr lIns="0" tIns="0" rIns="0" bIns="0">
@@ -19405,9 +21337,7 @@
       </p:grpSpPr>
       <p:sp>
         <p:nvSpPr>
-          <p:cNvPr id="2" name="Title 1">
-            <a:extLst/>
-          </p:cNvPr>
+          <p:cNvPr id="2" name="Title 1"/>
           <p:cNvSpPr>
             <a:spLocks noGrp="1"/>
           </p:cNvSpPr>
@@ -19429,9 +21359,7 @@
       </p:sp>
       <p:sp>
         <p:nvSpPr>
-          <p:cNvPr id="4" name="Text Placeholder 2">
-            <a:extLst/>
-          </p:cNvPr>
+          <p:cNvPr id="4" name="Text Placeholder 2"/>
           <p:cNvSpPr>
             <a:spLocks noGrp="1"/>
           </p:cNvSpPr>
@@ -19515,38 +21443,37 @@
           <a:p>
             <a:pPr lvl="0"/>
             <a:r>
-              <a:rPr lang="en-US" noProof="0"/>
+              <a:rPr lang="en-US" noProof="0" dirty="0"/>
               <a:t>Edit Master text styles</a:t>
             </a:r>
           </a:p>
           <a:p>
             <a:pPr lvl="1"/>
             <a:r>
-              <a:rPr lang="en-US" noProof="0"/>
+              <a:rPr lang="en-US" noProof="0" dirty="0"/>
               <a:t>Second level</a:t>
             </a:r>
           </a:p>
           <a:p>
             <a:pPr lvl="2"/>
             <a:r>
-              <a:rPr lang="en-US" noProof="0"/>
+              <a:rPr lang="en-US" noProof="0" dirty="0"/>
               <a:t>Third level</a:t>
             </a:r>
           </a:p>
           <a:p>
             <a:pPr lvl="3"/>
             <a:r>
-              <a:rPr lang="en-US" noProof="0"/>
+              <a:rPr lang="en-US" noProof="0" dirty="0"/>
               <a:t>Fourth level</a:t>
             </a:r>
           </a:p>
           <a:p>
             <a:pPr lvl="4"/>
             <a:r>
-              <a:rPr lang="en-US" noProof="0"/>
+              <a:rPr lang="en-US" noProof="0" dirty="0"/>
               <a:t>Fifth level</a:t>
             </a:r>
-            <a:endParaRPr lang="en-US" noProof="0" dirty="0"/>
           </a:p>
         </p:txBody>
       </p:sp>
@@ -19739,7 +21666,7 @@
         <p:spPr bwMode="auto">
           <a:xfrm>
             <a:off x="804863" y="6430963"/>
-            <a:ext cx="8350250" cy="138112"/>
+            <a:ext cx="8350250" cy="138499"/>
           </a:xfrm>
           <a:prstGeom prst="rect">
             <a:avLst/>
@@ -19748,7 +21675,6 @@
           <a:ln>
             <a:noFill/>
           </a:ln>
-          <a:extLst/>
         </p:spPr>
         <p:txBody>
           <a:bodyPr lIns="0" tIns="0" rIns="0" bIns="0">
@@ -19879,7 +21805,7 @@
                   <a:srgbClr val="7F7F7F"/>
                 </a:solidFill>
               </a:rPr>
-              <a:t>© 2017 Arm Limited </a:t>
+              <a:t>© 2025 Arm Limited </a:t>
             </a:r>
           </a:p>
         </p:txBody>
@@ -19910,7 +21836,6 @@
           <a:ln>
             <a:noFill/>
           </a:ln>
-          <a:extLst/>
         </p:spPr>
         <p:txBody>
           <a:bodyPr lIns="0" tIns="0" rIns="0" bIns="0">
@@ -22259,9 +24184,12 @@
           </a:p>
           <a:p>
             <a:r>
-              <a:rPr lang="en-US" dirty="0"/>
-              <a:t>The workflow</a:t>
-            </a:r>
+              <a:rPr lang="en-US">
+                <a:ea typeface="ＭＳ Ｐゴシック"/>
+              </a:rPr>
+              <a:t>The Workflow</a:t>
+            </a:r>
+            <a:endParaRPr lang="en-US"/>
           </a:p>
           <a:p>
             <a:r>
@@ -22269,8 +24197,9 @@
                 <a:solidFill>
                   <a:srgbClr val="128CAB"/>
                 </a:solidFill>
-              </a:rPr>
-              <a:t>The build systems</a:t>
+                <a:ea typeface="ＭＳ Ｐゴシック"/>
+              </a:rPr>
+              <a:t>The Build Systems</a:t>
             </a:r>
           </a:p>
           <a:p>
@@ -23450,10 +25379,10 @@
       </p:sp>
       <p:pic>
         <p:nvPicPr>
-          <p:cNvPr id="5" name="Picture 4">
+          <p:cNvPr id="6" name="Picture 5" descr="Yocto logo">
             <a:extLst>
               <a:ext uri="{FF2B5EF4-FFF2-40B4-BE49-F238E27FC236}">
-                <a16:creationId xmlns:a16="http://schemas.microsoft.com/office/drawing/2014/main" id="{F4D21AF9-2585-49FF-9E0D-60023D3980D0}"/>
+                <a16:creationId xmlns:a16="http://schemas.microsoft.com/office/drawing/2014/main" id="{CE477425-1B8A-4302-9FFD-3CB605822A49}"/>
               </a:ext>
             </a:extLst>
           </p:cNvPr>
@@ -23470,20 +25399,59 @@
         </p:blipFill>
         <p:spPr>
           <a:xfrm>
-            <a:off x="1934369" y="5003800"/>
-            <a:ext cx="1391578" cy="1116200"/>
+            <a:off x="7319169" y="5003800"/>
+            <a:ext cx="2299539" cy="869415"/>
           </a:xfrm>
           <a:prstGeom prst="rect">
             <a:avLst/>
           </a:prstGeom>
         </p:spPr>
       </p:pic>
+      <p:sp>
+        <p:nvSpPr>
+          <p:cNvPr id="2" name="TextBox 1">
+            <a:extLst>
+              <a:ext uri="{FF2B5EF4-FFF2-40B4-BE49-F238E27FC236}">
+                <a16:creationId xmlns:a16="http://schemas.microsoft.com/office/drawing/2014/main" id="{F45B6AC0-9137-DAE4-D041-34BF4EF131CD}"/>
+              </a:ext>
+            </a:extLst>
+          </p:cNvPr>
+          <p:cNvSpPr txBox="1"/>
+          <p:nvPr/>
+        </p:nvSpPr>
+        <p:spPr>
+          <a:xfrm>
+            <a:off x="8070724" y="5939397"/>
+            <a:ext cx="2407429" cy="180604"/>
+          </a:xfrm>
+          <a:prstGeom prst="rect">
+            <a:avLst/>
+          </a:prstGeom>
+        </p:spPr>
+        <p:txBody>
+          <a:bodyPr vert="horz" wrap="none" lIns="0" tIns="0" rIns="0" bIns="0" rtlCol="0" anchor="t">
+            <a:normAutofit/>
+          </a:bodyPr>
+          <a:lstStyle/>
+          <a:p>
+            <a:r>
+              <a:rPr lang="en-GB" sz="1100" dirty="0"/>
+              <a:t>public domain logo from </a:t>
+            </a:r>
+            <a:r>
+              <a:rPr lang="en-GB" sz="1100" dirty="0" err="1"/>
+              <a:t>yoctoproject.org</a:t>
+            </a:r>
+            <a:endParaRPr lang="en-US" sz="1100" dirty="0"/>
+          </a:p>
+        </p:txBody>
+      </p:sp>
       <p:pic>
         <p:nvPicPr>
-          <p:cNvPr id="6" name="Picture 5">
+          <p:cNvPr id="8" name="Picture 7" descr="A yellow hard hat with a square on the side&#10;">
             <a:extLst>
               <a:ext uri="{FF2B5EF4-FFF2-40B4-BE49-F238E27FC236}">
-                <a16:creationId xmlns:a16="http://schemas.microsoft.com/office/drawing/2014/main" id="{CE477425-1B8A-4302-9FFD-3CB605822A49}"/>
+                <a16:creationId xmlns:a16="http://schemas.microsoft.com/office/drawing/2014/main" id="{C40A7D2C-5C9B-A0B7-378E-46FB1EAF0BDF}"/>
               </a:ext>
             </a:extLst>
           </p:cNvPr>
@@ -23500,14 +25468,53 @@
         </p:blipFill>
         <p:spPr>
           <a:xfrm>
-            <a:off x="7319169" y="5003800"/>
-            <a:ext cx="2299539" cy="869415"/>
+            <a:off x="1974756" y="4642665"/>
+            <a:ext cx="1531245" cy="1177881"/>
           </a:xfrm>
           <a:prstGeom prst="rect">
             <a:avLst/>
           </a:prstGeom>
         </p:spPr>
       </p:pic>
+      <p:sp>
+        <p:nvSpPr>
+          <p:cNvPr id="9" name="TextBox 8">
+            <a:extLst>
+              <a:ext uri="{FF2B5EF4-FFF2-40B4-BE49-F238E27FC236}">
+                <a16:creationId xmlns:a16="http://schemas.microsoft.com/office/drawing/2014/main" id="{1B283020-CFF4-A245-AC80-93AEB71A18AC}"/>
+              </a:ext>
+            </a:extLst>
+          </p:cNvPr>
+          <p:cNvSpPr txBox="1"/>
+          <p:nvPr/>
+        </p:nvSpPr>
+        <p:spPr>
+          <a:xfrm>
+            <a:off x="2112281" y="5849095"/>
+            <a:ext cx="2407429" cy="180604"/>
+          </a:xfrm>
+          <a:prstGeom prst="rect">
+            <a:avLst/>
+          </a:prstGeom>
+        </p:spPr>
+        <p:txBody>
+          <a:bodyPr vert="horz" wrap="none" lIns="0" tIns="0" rIns="0" bIns="0" rtlCol="0" anchor="t">
+            <a:normAutofit/>
+          </a:bodyPr>
+          <a:lstStyle/>
+          <a:p>
+            <a:r>
+              <a:rPr lang="en-GB" sz="1100" dirty="0"/>
+              <a:t>public domain image from </a:t>
+            </a:r>
+            <a:r>
+              <a:rPr lang="en-GB" sz="1100" dirty="0" err="1"/>
+              <a:t>Openclipart</a:t>
+            </a:r>
+            <a:endParaRPr lang="en-US" sz="1100" dirty="0"/>
+          </a:p>
+        </p:txBody>
+      </p:sp>
     </p:spTree>
     <p:extLst>
       <p:ext uri="{BB962C8B-B14F-4D97-AF65-F5344CB8AC3E}">
@@ -23606,14 +25613,19 @@
           </a:p>
           <a:p>
             <a:r>
-              <a:rPr lang="en-US" dirty="0"/>
-              <a:t>The workflow</a:t>
-            </a:r>
-          </a:p>
-          <a:p>
-            <a:r>
-              <a:rPr lang="en-US" dirty="0"/>
-              <a:t>The build systems</a:t>
+              <a:rPr lang="en-US" dirty="0">
+                <a:ea typeface="ＭＳ Ｐゴシック"/>
+              </a:rPr>
+              <a:t>The Workflow</a:t>
+            </a:r>
+            <a:endParaRPr lang="en-US" dirty="0"/>
+          </a:p>
+          <a:p>
+            <a:r>
+              <a:rPr lang="en-US" dirty="0">
+                <a:ea typeface="ＭＳ Ｐゴシック"/>
+              </a:rPr>
+              <a:t>The Build Systems</a:t>
             </a:r>
           </a:p>
           <a:p>
@@ -23871,11 +25883,7 @@
           <a:p>
             <a:r>
               <a:rPr lang="en-US" dirty="0"/>
-              <a:t>Support for Arm, PPC, MIPS, and </a:t>
-            </a:r>
-            <a:r>
-              <a:rPr lang="en-US" dirty="0" err="1"/>
-              <a:t>x86</a:t>
+              <a:t>Support for Arm, MIPS, PPC, RISC-V, x86, and x86-64 architectures</a:t>
             </a:r>
             <a:endParaRPr lang="en-US" altLang="en-US" dirty="0">
               <a:ea typeface="ＭＳ Ｐゴシック" panose="020B0600070205080204" pitchFamily="34" charset="-128"/>
@@ -24607,7 +26615,7 @@
           <a:lstStyle/>
           <a:p>
             <a:r>
-              <a:rPr lang="en-US" sz="1000"/>
+              <a:rPr lang="en-US" sz="1000" dirty="0"/>
               <a:t>Source: http://</a:t>
             </a:r>
             <a:r>
@@ -24706,7 +26714,7 @@
         <p:spPr bwMode="auto">
           <a:xfrm>
             <a:off x="492125" y="1639888"/>
-            <a:ext cx="8855075" cy="4086225"/>
+            <a:ext cx="8855075" cy="4167146"/>
           </a:xfrm>
         </p:spPr>
         <p:txBody>
@@ -24809,7 +26817,7 @@
             </a:r>
             <a:r>
               <a:rPr lang="en-US" dirty="0"/>
-              <a:t> – user-define configuration</a:t>
+              <a:t> – user-defined configuration</a:t>
             </a:r>
           </a:p>
           <a:p>
@@ -24885,13 +26893,8 @@
             </a:r>
             <a:r>
               <a:rPr lang="en-US" dirty="0"/>
-              <a:t> – configuration of the board support </a:t>
-            </a:r>
-            <a:r>
-              <a:rPr lang="en-US" dirty="0" err="1"/>
-              <a:t>pacakge</a:t>
-            </a:r>
-            <a:endParaRPr lang="en-US" dirty="0"/>
+              <a:t> – configuration of the board support package</a:t>
+            </a:r>
           </a:p>
           <a:p>
             <a:r>
@@ -25602,15 +27605,7 @@
           <a:p>
             <a:r>
               <a:rPr lang="en-US" dirty="0"/>
-              <a:t>Example for the </a:t>
-            </a:r>
-            <a:r>
-              <a:rPr lang="en-US" dirty="0" err="1"/>
-              <a:t>RaspberryPi</a:t>
-            </a:r>
-            <a:r>
-              <a:rPr lang="en-US" dirty="0"/>
-              <a:t> 3</a:t>
+              <a:t>Example for the Raspberry Pi 5</a:t>
             </a:r>
             <a:endParaRPr lang="en-US" altLang="en-US" dirty="0">
               <a:ea typeface="ＭＳ Ｐゴシック" panose="020B0600070205080204" pitchFamily="34" charset="-128"/>
@@ -25690,12 +27685,20 @@
           </a:p>
           <a:p>
             <a:r>
+              <a:rPr lang="en-US">
+                <a:latin typeface="Courier New" charset="0"/>
+                <a:ea typeface="Courier New" charset="0"/>
+                <a:cs typeface="Courier New" charset="0"/>
+              </a:rPr>
+              <a:t>MACHINE ?= </a:t>
+            </a:r>
+            <a:r>
               <a:rPr lang="en-US" dirty="0">
                 <a:latin typeface="Courier New" charset="0"/>
                 <a:ea typeface="Courier New" charset="0"/>
                 <a:cs typeface="Courier New" charset="0"/>
               </a:rPr>
-              <a:t>MACHINE ??= 'raspberrypi3'</a:t>
+              <a:t>'raspberrypi5'</a:t>
             </a:r>
           </a:p>
           <a:p>
@@ -26506,7 +28509,7 @@
           <a:p>
             <a:r>
               <a:rPr lang="en-US" dirty="0"/>
-              <a:t>Example for the Raspberry Pi 3</a:t>
+              <a:t>Example for the Raspberry Pi 5</a:t>
             </a:r>
             <a:endParaRPr lang="en-US" altLang="en-US" dirty="0">
               <a:ea typeface="ＭＳ Ｐゴシック" panose="020B0600070205080204" pitchFamily="34" charset="-128"/>
@@ -27075,15 +29078,7 @@
           <a:p>
             <a:r>
               <a:rPr lang="en-US" dirty="0"/>
-              <a:t>Example for the </a:t>
-            </a:r>
-            <a:r>
-              <a:rPr lang="en-US" dirty="0" err="1"/>
-              <a:t>RaspberryPi</a:t>
-            </a:r>
-            <a:r>
-              <a:rPr lang="en-US" dirty="0"/>
-              <a:t> 3</a:t>
+              <a:t>Example for the Raspberry Pi 5</a:t>
             </a:r>
             <a:endParaRPr lang="en-US" altLang="en-US" dirty="0">
               <a:ea typeface="ＭＳ Ｐゴシック" panose="020B0600070205080204" pitchFamily="34" charset="-128"/>
@@ -27136,7 +29131,7 @@
                 <a:ea typeface="Courier New" charset="0"/>
                 <a:cs typeface="Courier New" charset="0"/>
               </a:rPr>
-              <a:t>raspberrypi3.conf (fragment)</a:t>
+              <a:t>raspberrypi5.conf (fragment)</a:t>
             </a:r>
           </a:p>
           <a:p>
@@ -27181,7 +29176,7 @@
                 <a:ea typeface="Courier New" charset="0"/>
                 <a:cs typeface="Courier New" charset="0"/>
               </a:rPr>
-              <a:t> 3 Development Board</a:t>
+              <a:t> 5 Development Board</a:t>
             </a:r>
           </a:p>
           <a:p>
@@ -27207,7 +29202,7 @@
                 <a:ea typeface="Courier New" charset="0"/>
                 <a:cs typeface="Courier New" charset="0"/>
               </a:rPr>
-              <a:t> 3</a:t>
+              <a:t> 5</a:t>
             </a:r>
           </a:p>
           <a:p>
@@ -27224,7 +29219,7 @@
                 <a:ea typeface="Courier New" charset="0"/>
                 <a:cs typeface="Courier New" charset="0"/>
               </a:rPr>
-              <a:t>MACHINEOVERRIDES = "raspberrypi2:${MACHINE}"</a:t>
+              <a:t>MACHINEOVERRIDES = "raspberrypi5:${MACHINE}"</a:t>
             </a:r>
           </a:p>
           <a:p>
@@ -27300,7 +29295,23 @@
                 <a:ea typeface="Courier New" charset="0"/>
                 <a:cs typeface="Courier New" charset="0"/>
               </a:rPr>
-              <a:t>include conf/machine/raspberrypi2.conf</a:t>
+              <a:t>include conf/machine</a:t>
+            </a:r>
+            <a:r>
+              <a:rPr lang="en-US" sz="1200">
+                <a:latin typeface="Courier New" charset="0"/>
+                <a:ea typeface="Courier New" charset="0"/>
+                <a:cs typeface="Courier New" charset="0"/>
+              </a:rPr>
+              <a:t>/raspberrypi5.</a:t>
+            </a:r>
+            <a:r>
+              <a:rPr lang="en-US" sz="1200" dirty="0">
+                <a:latin typeface="Courier New" charset="0"/>
+                <a:ea typeface="Courier New" charset="0"/>
+                <a:cs typeface="Courier New" charset="0"/>
+              </a:rPr>
+              <a:t>conf</a:t>
             </a:r>
           </a:p>
           <a:p>
@@ -27692,68 +29703,85 @@
             </a:endParaRPr>
           </a:p>
           <a:p>
-            <a:pPr lvl="1"/>
+            <a:pPr marL="398145" lvl="1" indent="-166370"/>
             <a:r>
               <a:rPr lang="en-US" dirty="0"/>
               <a:t>May set alternative preferred versions of recipes</a:t>
             </a:r>
-          </a:p>
-          <a:p>
-            <a:pPr lvl="1"/>
+            <a:endParaRPr lang="en-US" dirty="0">
+              <a:cs typeface="Calibri"/>
+            </a:endParaRPr>
+          </a:p>
+          <a:p>
+            <a:pPr marL="398145" lvl="1" indent="-166370"/>
             <a:r>
               <a:rPr lang="en-US" dirty="0"/>
               <a:t>May enable/disable features</a:t>
             </a:r>
-          </a:p>
-          <a:p>
-            <a:pPr lvl="1"/>
+            <a:endParaRPr lang="en-US" dirty="0">
+              <a:cs typeface="Calibri"/>
+            </a:endParaRPr>
+          </a:p>
+          <a:p>
+            <a:pPr marL="398145" lvl="1" indent="-166370"/>
             <a:r>
               <a:rPr lang="en-US" dirty="0"/>
               <a:t>May configure specific package rules</a:t>
             </a:r>
-          </a:p>
-          <a:p>
-            <a:pPr lvl="1"/>
+            <a:endParaRPr lang="en-US" dirty="0">
+              <a:cs typeface="Calibri"/>
+            </a:endParaRPr>
+          </a:p>
+          <a:p>
+            <a:pPr marL="398145" lvl="1" indent="-166370"/>
             <a:r>
               <a:rPr lang="en-US" dirty="0"/>
               <a:t>May adjust image deployment settings</a:t>
+            </a:r>
+            <a:endParaRPr lang="en-US" altLang="en-US" dirty="0">
+              <a:ea typeface="ＭＳ Ｐゴシック" panose="020B0600070205080204" pitchFamily="34" charset="-128"/>
+              <a:cs typeface="Calibri"/>
+            </a:endParaRPr>
+          </a:p>
+          <a:p>
+            <a:r>
+              <a:rPr lang="en-US" dirty="0"/>
+              <a:t>Enabled via the DISTRO setting</a:t>
+            </a:r>
+          </a:p>
+          <a:p>
+            <a:r>
+              <a:rPr lang="en-US" dirty="0"/>
+              <a:t>Four predefined settings:</a:t>
             </a:r>
             <a:endParaRPr lang="en-US" altLang="en-US" dirty="0">
               <a:ea typeface="ＭＳ Ｐゴシック" panose="020B0600070205080204" pitchFamily="34" charset="-128"/>
             </a:endParaRPr>
           </a:p>
           <a:p>
-            <a:r>
-              <a:rPr lang="en-US" dirty="0"/>
-              <a:t>Enabled via the DISTRO setting</a:t>
-            </a:r>
-          </a:p>
-          <a:p>
-            <a:r>
-              <a:rPr lang="en-US" dirty="0"/>
-              <a:t>Four predefined settings:</a:t>
-            </a:r>
-            <a:endParaRPr lang="en-US" altLang="en-US" dirty="0">
-              <a:ea typeface="ＭＳ Ｐゴシック" panose="020B0600070205080204" pitchFamily="34" charset="-128"/>
+            <a:pPr marL="398145" lvl="1" indent="-166370"/>
+            <a:r>
+              <a:rPr lang="en-US" dirty="0">
+                <a:solidFill>
+                  <a:srgbClr val="128CAB"/>
+                </a:solidFill>
+                <a:ea typeface="ＭＳ Ｐゴシック"/>
+              </a:rPr>
+              <a:t>poky-bleeding</a:t>
+            </a:r>
+            <a:r>
+              <a:rPr lang="en-US" dirty="0">
+                <a:ea typeface="ＭＳ Ｐゴシック"/>
+              </a:rPr>
+              <a:t>: enables bleeding edge packages</a:t>
+            </a:r>
+            <a:endParaRPr lang="en-US" dirty="0">
+              <a:ea typeface="ＭＳ Ｐゴシック"/>
+              <a:cs typeface="Calibri"/>
             </a:endParaRPr>
           </a:p>
           <a:p>
-            <a:pPr lvl="1"/>
-            <a:r>
-              <a:rPr lang="en-US" dirty="0">
-                <a:solidFill>
-                  <a:srgbClr val="128CAB"/>
-                </a:solidFill>
-              </a:rPr>
-              <a:t>poky-bleeding</a:t>
-            </a:r>
-            <a:r>
-              <a:rPr lang="en-US" dirty="0"/>
-              <a:t>: enables bleeding edge packages</a:t>
-            </a:r>
-          </a:p>
-          <a:p>
-            <a:pPr lvl="1"/>
+            <a:pPr marL="398145" lvl="1" indent="-166370"/>
             <a:r>
               <a:rPr lang="en-US" dirty="0">
                 <a:solidFill>
@@ -27766,14 +29794,18 @@
               <a:rPr lang="en-US" dirty="0"/>
               <a:t>: core distribution definition, defines the base</a:t>
             </a:r>
-          </a:p>
-          <a:p>
-            <a:pPr lvl="1"/>
+            <a:endParaRPr lang="en-US" dirty="0">
+              <a:cs typeface="Calibri"/>
+            </a:endParaRPr>
+          </a:p>
+          <a:p>
+            <a:pPr marL="398145" lvl="1" indent="-166370"/>
             <a:r>
               <a:rPr lang="en-US" dirty="0">
                 <a:solidFill>
                   <a:srgbClr val="128CAB"/>
                 </a:solidFill>
+                <a:ea typeface="ＭＳ Ｐゴシック"/>
               </a:rPr>
               <a:t>poky-</a:t>
             </a:r>
@@ -27782,24 +29814,23 @@
                 <a:solidFill>
                   <a:srgbClr val="128CAB"/>
                 </a:solidFill>
+                <a:ea typeface="ＭＳ Ｐゴシック"/>
               </a:rPr>
               <a:t>lsb</a:t>
             </a:r>
             <a:r>
-              <a:rPr lang="en-US" dirty="0"/>
-              <a:t>: enable items required for </a:t>
-            </a:r>
-            <a:r>
-              <a:rPr lang="en-US" dirty="0" err="1"/>
-              <a:t>LSB</a:t>
-            </a:r>
-            <a:r>
-              <a:rPr lang="en-US" dirty="0"/>
-              <a:t> support</a:t>
-            </a:r>
-          </a:p>
-          <a:p>
-            <a:pPr lvl="1"/>
+              <a:rPr lang="en-US" dirty="0">
+                <a:ea typeface="ＭＳ Ｐゴシック"/>
+              </a:rPr>
+              <a:t>: enable items required for Linux Standard Base support</a:t>
+            </a:r>
+            <a:endParaRPr lang="en-US" dirty="0">
+              <a:ea typeface="ＭＳ Ｐゴシック"/>
+              <a:cs typeface="Calibri"/>
+            </a:endParaRPr>
+          </a:p>
+          <a:p>
+            <a:pPr marL="398145" lvl="1" indent="-166370"/>
             <a:r>
               <a:rPr lang="en-US" dirty="0">
                 <a:solidFill>
@@ -27812,10 +29843,15 @@
               <a:rPr lang="en-US" dirty="0"/>
               <a:t>: construct a smaller than normal system</a:t>
             </a:r>
-          </a:p>
-          <a:p>
-            <a:pPr lvl="1"/>
-            <a:endParaRPr lang="en-US" dirty="0"/>
+            <a:endParaRPr lang="en-US" dirty="0">
+              <a:cs typeface="Calibri"/>
+            </a:endParaRPr>
+          </a:p>
+          <a:p>
+            <a:pPr marL="398145" lvl="1" indent="-166370"/>
+            <a:endParaRPr lang="en-US" dirty="0">
+              <a:cs typeface="Calibri"/>
+            </a:endParaRPr>
           </a:p>
         </p:txBody>
       </p:sp>
@@ -28110,7 +30146,7 @@
                 <a:ea typeface="Courier New" charset="0"/>
                 <a:cs typeface="Courier New" charset="0"/>
               </a:rPr>
-              <a:t>SRCREV_pn-PN</a:t>
+              <a:t>SRCREV_pn</a:t>
             </a:r>
             <a:r>
               <a:rPr lang="en-US" sz="1800" dirty="0">
@@ -28118,30 +30154,17 @@
                 <a:ea typeface="Courier New" charset="0"/>
                 <a:cs typeface="Courier New" charset="0"/>
               </a:rPr>
-              <a:t> = “${</a:t>
-            </a:r>
-            <a:r>
-              <a:rPr lang="en-US" sz="1800" dirty="0" err="1">
-                <a:latin typeface="Courier New" charset="0"/>
-                <a:ea typeface="Courier New" charset="0"/>
-                <a:cs typeface="Courier New" charset="0"/>
-              </a:rPr>
-              <a:t>AUTOREV</a:t>
-            </a:r>
-            <a:r>
-              <a:rPr lang="en-US" sz="1800" dirty="0">
-                <a:latin typeface="Courier New" charset="0"/>
-                <a:ea typeface="Courier New" charset="0"/>
-                <a:cs typeface="Courier New" charset="0"/>
-              </a:rPr>
-              <a:t>}” </a:t>
+              <a:t>-PN = "${AUTOREV}" </a:t>
             </a:r>
             <a:r>
               <a:rPr lang="en-US" dirty="0"/>
               <a:t>to </a:t>
             </a:r>
             <a:r>
-              <a:rPr lang="en-US" dirty="0" err="1"/>
+              <a:rPr lang="en-US" sz="1800" dirty="0" err="1">
+                <a:latin typeface="Courier New" panose="02070309020205020404" pitchFamily="49" charset="0"/>
+                <a:cs typeface="Courier New" panose="02070309020205020404" pitchFamily="49" charset="0"/>
+              </a:rPr>
               <a:t>l</a:t>
             </a:r>
             <a:r>
@@ -28511,7 +30534,15 @@
             <a:pPr lvl="1"/>
             <a:r>
               <a:rPr lang="en-US" dirty="0"/>
-              <a:t>Install step runs under “pseudo”, allows special files, permissions, and owners/ groups to be set.</a:t>
+              <a:t>Install step runs under “</a:t>
+            </a:r>
+            <a:r>
+              <a:rPr lang="en-US" dirty="0" err="1"/>
+              <a:t>sudo</a:t>
+            </a:r>
+            <a:r>
+              <a:rPr lang="en-US" dirty="0"/>
+              <a:t>”, which allows special files, permissions, and owners/ groups to be set.</a:t>
             </a:r>
             <a:endParaRPr lang="en-US" altLang="en-US" dirty="0">
               <a:ea typeface="ＭＳ Ｐゴシック" panose="020B0600070205080204" pitchFamily="34" charset="-128"/>
@@ -28649,17 +30680,20 @@
           <a:p>
             <a:r>
               <a:rPr lang="en-IN" altLang="en-US" dirty="0">
-                <a:ea typeface="ＭＳ Ｐゴシック" panose="020B0600070205080204" pitchFamily="34" charset="-128"/>
-              </a:rPr>
-              <a:t>The workflow</a:t>
-            </a:r>
+                <a:ea typeface="ＭＳ Ｐゴシック"/>
+              </a:rPr>
+              <a:t>The Workflow</a:t>
+            </a:r>
+            <a:endParaRPr lang="en-IN" altLang="en-US" dirty="0">
+              <a:ea typeface="ＭＳ Ｐゴシック" panose="020B0600070205080204" pitchFamily="34" charset="-128"/>
+            </a:endParaRPr>
           </a:p>
           <a:p>
             <a:r>
               <a:rPr lang="en-IN" altLang="en-US" dirty="0">
-                <a:ea typeface="ＭＳ Ｐゴシック" panose="020B0600070205080204" pitchFamily="34" charset="-128"/>
-              </a:rPr>
-              <a:t>The build systems</a:t>
+                <a:ea typeface="ＭＳ Ｐゴシック"/>
+              </a:rPr>
+              <a:t>The Build Systems</a:t>
             </a:r>
           </a:p>
           <a:p>
@@ -29322,14 +31356,19 @@
           </a:p>
           <a:p>
             <a:r>
-              <a:rPr lang="en-US" dirty="0"/>
-              <a:t>The workflow</a:t>
-            </a:r>
-          </a:p>
-          <a:p>
-            <a:r>
-              <a:rPr lang="en-US" dirty="0"/>
-              <a:t>The build systems</a:t>
+              <a:rPr lang="en-US" dirty="0">
+                <a:ea typeface="ＭＳ Ｐゴシック"/>
+              </a:rPr>
+              <a:t>The Workflow</a:t>
+            </a:r>
+            <a:endParaRPr lang="en-US"/>
+          </a:p>
+          <a:p>
+            <a:r>
+              <a:rPr lang="en-US" dirty="0">
+                <a:ea typeface="ＭＳ Ｐゴシック"/>
+              </a:rPr>
+              <a:t>The Build Systems</a:t>
             </a:r>
           </a:p>
           <a:p>
@@ -29446,7 +31485,7 @@
             <a:pPr lvl="1"/>
             <a:r>
               <a:rPr lang="en-US" sz="1600" dirty="0"/>
-              <a:t>The bootloader</a:t>
+              <a:t>The Bootloader</a:t>
             </a:r>
           </a:p>
           <a:p>
@@ -29460,7 +31499,7 @@
             <a:pPr lvl="1"/>
             <a:r>
               <a:rPr lang="en-US" sz="1600" dirty="0"/>
-              <a:t>The device tree blob</a:t>
+              <a:t>The Device Tree Blob (DTB)</a:t>
             </a:r>
           </a:p>
           <a:p>
@@ -29476,7 +31515,7 @@
           <a:p>
             <a:r>
               <a:rPr lang="en-US" sz="2000" dirty="0"/>
-              <a:t>All these components shall be:</a:t>
+              <a:t>All these components must be:</a:t>
             </a:r>
             <a:endParaRPr lang="en-US" altLang="en-US" sz="2000" dirty="0">
               <a:ea typeface="ＭＳ Ｐゴシック" panose="020B0600070205080204" pitchFamily="34" charset="-128"/>
@@ -29746,7 +31785,7 @@
                   <a:schemeClr val="accent1"/>
                 </a:solidFill>
               </a:rPr>
-              <a:t>MicroSD Layout</a:t>
+              <a:t>MicroSD card image layout</a:t>
             </a:r>
           </a:p>
         </p:txBody>
@@ -29843,8 +31882,8 @@
         </p:nvSpPr>
         <p:spPr>
           <a:xfrm>
-            <a:off x="9472613" y="4926940"/>
-            <a:ext cx="1849846" cy="276999"/>
+            <a:off x="9472612" y="4926940"/>
+            <a:ext cx="2595061" cy="276999"/>
           </a:xfrm>
           <a:prstGeom prst="rect">
             <a:avLst/>
@@ -29863,7 +31902,7 @@
                   <a:schemeClr val="accent1"/>
                 </a:solidFill>
               </a:rPr>
-              <a:t>Ext file system</a:t>
+              <a:t>Linux-native file system</a:t>
             </a:r>
           </a:p>
         </p:txBody>
@@ -30000,6 +32039,92 @@
           </a:p>
         </p:txBody>
       </p:sp>
+      <p:grpSp>
+        <p:nvGrpSpPr>
+          <p:cNvPr id="17" name="Group 16">
+            <a:extLst>
+              <a:ext uri="{FF2B5EF4-FFF2-40B4-BE49-F238E27FC236}">
+                <a16:creationId xmlns:a16="http://schemas.microsoft.com/office/drawing/2014/main" id="{85D9BB4D-7B55-06D5-7481-2AE79E960F3A}"/>
+              </a:ext>
+            </a:extLst>
+          </p:cNvPr>
+          <p:cNvGrpSpPr/>
+          <p:nvPr/>
+        </p:nvGrpSpPr>
+        <p:grpSpPr>
+          <a:xfrm>
+            <a:off x="9472612" y="553537"/>
+            <a:ext cx="1776915" cy="583953"/>
+            <a:chOff x="9472612" y="553537"/>
+            <a:chExt cx="1776915" cy="583953"/>
+          </a:xfrm>
+        </p:grpSpPr>
+        <p:pic>
+          <p:nvPicPr>
+            <p:cNvPr id="3" name="Picture 2" descr="A close up of a microSD memory card">
+              <a:extLst>
+                <a:ext uri="{FF2B5EF4-FFF2-40B4-BE49-F238E27FC236}">
+                  <a16:creationId xmlns:a16="http://schemas.microsoft.com/office/drawing/2014/main" id="{E3EA463E-06C2-D24C-4C3D-7F6824DAB3B6}"/>
+                </a:ext>
+              </a:extLst>
+            </p:cNvPr>
+            <p:cNvPicPr>
+              <a:picLocks noChangeAspect="1"/>
+            </p:cNvPicPr>
+            <p:nvPr/>
+          </p:nvPicPr>
+          <p:blipFill>
+            <a:blip r:embed="rId3"/>
+            <a:stretch>
+              <a:fillRect/>
+            </a:stretch>
+          </p:blipFill>
+          <p:spPr>
+            <a:xfrm>
+              <a:off x="9472612" y="553537"/>
+              <a:ext cx="429444" cy="583953"/>
+            </a:xfrm>
+            <a:prstGeom prst="rect">
+              <a:avLst/>
+            </a:prstGeom>
+          </p:spPr>
+        </p:pic>
+        <p:sp>
+          <p:nvSpPr>
+            <p:cNvPr id="16" name="TextBox 15">
+              <a:extLst>
+                <a:ext uri="{FF2B5EF4-FFF2-40B4-BE49-F238E27FC236}">
+                  <a16:creationId xmlns:a16="http://schemas.microsoft.com/office/drawing/2014/main" id="{E8FE56A4-A178-98E5-0CAC-B1C1ECBECD81}"/>
+                </a:ext>
+              </a:extLst>
+            </p:cNvPr>
+            <p:cNvSpPr txBox="1"/>
+            <p:nvPr/>
+          </p:nvSpPr>
+          <p:spPr>
+            <a:xfrm>
+              <a:off x="9908825" y="573332"/>
+              <a:ext cx="1340702" cy="184658"/>
+            </a:xfrm>
+            <a:prstGeom prst="rect">
+              <a:avLst/>
+            </a:prstGeom>
+          </p:spPr>
+          <p:txBody>
+            <a:bodyPr vert="horz" wrap="none" lIns="0" tIns="0" rIns="0" bIns="0" rtlCol="0" anchor="t">
+              <a:normAutofit/>
+            </a:bodyPr>
+            <a:lstStyle/>
+            <a:p>
+              <a:r>
+                <a:rPr lang="en-GB" sz="1100" dirty="0"/>
+                <a:t>Photo by Jeremy Singer</a:t>
+              </a:r>
+              <a:endParaRPr lang="en-US" sz="1100" dirty="0"/>
+            </a:p>
+          </p:txBody>
+        </p:sp>
+      </p:grpSp>
     </p:spTree>
     <p:extLst>
       <p:ext uri="{BB962C8B-B14F-4D97-AF65-F5344CB8AC3E}">
@@ -30102,14 +32227,22 @@
                 <a:solidFill>
                   <a:srgbClr val="128CAB"/>
                 </a:solidFill>
-              </a:rPr>
-              <a:t>The workflow</a:t>
-            </a:r>
-          </a:p>
-          <a:p>
-            <a:r>
-              <a:rPr lang="en-US" dirty="0"/>
-              <a:t>The build systems</a:t>
+                <a:ea typeface="ＭＳ Ｐゴシック"/>
+              </a:rPr>
+              <a:t>The Workflow</a:t>
+            </a:r>
+            <a:endParaRPr lang="en-US" dirty="0">
+              <a:solidFill>
+                <a:srgbClr val="128CAB"/>
+              </a:solidFill>
+            </a:endParaRPr>
+          </a:p>
+          <a:p>
+            <a:r>
+              <a:rPr lang="en-US" dirty="0">
+                <a:ea typeface="ＭＳ Ｐゴシック"/>
+              </a:rPr>
+              <a:t>The Build Systems</a:t>
             </a:r>
           </a:p>
           <a:p>
@@ -30198,8 +32331,8 @@
         </p:nvSpPr>
         <p:spPr>
           <a:xfrm>
-            <a:off x="2008725" y="1447800"/>
-            <a:ext cx="1494094" cy="990600"/>
+            <a:off x="2008725" y="1334632"/>
+            <a:ext cx="1494094" cy="1103768"/>
           </a:xfrm>
           <a:prstGeom prst="foldedCorner">
             <a:avLst/>
@@ -30216,7 +32349,7 @@
           </a:ln>
         </p:spPr>
         <p:txBody>
-          <a:bodyPr wrap="square" rtlCol="0" anchor="ctr">
+          <a:bodyPr wrap="square" rtlCol="0" anchor="t">
             <a:noAutofit/>
           </a:bodyPr>
           <a:lstStyle>
@@ -30253,8 +32386,8 @@
         </p:nvSpPr>
         <p:spPr>
           <a:xfrm>
-            <a:off x="5461249" y="1447800"/>
-            <a:ext cx="1494094" cy="990600"/>
+            <a:off x="5461249" y="1334632"/>
+            <a:ext cx="1494094" cy="1103768"/>
           </a:xfrm>
           <a:prstGeom prst="foldedCorner">
             <a:avLst/>
@@ -30269,7 +32402,7 @@
           </a:ln>
         </p:spPr>
         <p:txBody>
-          <a:bodyPr wrap="square" rtlCol="0" anchor="ctr">
+          <a:bodyPr wrap="square" rtlCol="0" anchor="t">
             <a:noAutofit/>
           </a:bodyPr>
           <a:lstStyle/>
@@ -30460,6 +32593,7 @@
             </a:extLst>
           </p:cNvPr>
           <p:cNvCxnSpPr>
+            <a:cxnSpLocks/>
             <a:stCxn id="6" idx="2"/>
             <a:endCxn id="9" idx="0"/>
           </p:cNvCxnSpPr>
@@ -30655,6 +32789,7 @@
             </a:extLst>
           </p:cNvPr>
           <p:cNvCxnSpPr>
+            <a:cxnSpLocks/>
             <a:stCxn id="7" idx="2"/>
             <a:endCxn id="13" idx="0"/>
           </p:cNvCxnSpPr>
@@ -30702,8 +32837,8 @@
         </p:nvSpPr>
         <p:spPr>
           <a:xfrm>
-            <a:off x="9660819" y="1447800"/>
-            <a:ext cx="1494094" cy="990600"/>
+            <a:off x="9660819" y="1333831"/>
+            <a:ext cx="1494094" cy="1104569"/>
           </a:xfrm>
           <a:prstGeom prst="foldedCorner">
             <a:avLst/>
@@ -30931,6 +33066,7 @@
             </a:extLst>
           </p:cNvPr>
           <p:cNvCxnSpPr>
+            <a:cxnSpLocks/>
             <a:stCxn id="16" idx="2"/>
             <a:endCxn id="19" idx="0"/>
           </p:cNvCxnSpPr>
@@ -31323,6 +33459,7 @@
             </a:extLst>
           </p:cNvPr>
           <p:cNvCxnSpPr>
+            <a:cxnSpLocks/>
             <a:stCxn id="13" idx="2"/>
             <a:endCxn id="28" idx="1"/>
           </p:cNvCxnSpPr>
@@ -31489,6 +33626,393 @@
           </a:p>
         </p:txBody>
       </p:sp>
+      <p:pic>
+        <p:nvPicPr>
+          <p:cNvPr id="3" name="Graphic 2" descr="Document outline">
+            <a:extLst>
+              <a:ext uri="{FF2B5EF4-FFF2-40B4-BE49-F238E27FC236}">
+                <a16:creationId xmlns:a16="http://schemas.microsoft.com/office/drawing/2014/main" id="{AFB61E68-C61A-4506-DA3D-6987D9DC1710}"/>
+              </a:ext>
+            </a:extLst>
+          </p:cNvPr>
+          <p:cNvPicPr>
+            <a:picLocks noChangeAspect="1"/>
+          </p:cNvPicPr>
+          <p:nvPr/>
+        </p:nvPicPr>
+        <p:blipFill>
+          <a:blip r:embed="rId3">
+            <a:extLst>
+              <a:ext uri="{96DAC541-7B7A-43D3-8B79-37D633B846F1}">
+                <asvg:svgBlip xmlns:asvg="http://schemas.microsoft.com/office/drawing/2016/SVG/main" r:embed="rId4"/>
+              </a:ext>
+            </a:extLst>
+          </a:blip>
+          <a:stretch>
+            <a:fillRect/>
+          </a:stretch>
+        </p:blipFill>
+        <p:spPr>
+          <a:xfrm>
+            <a:off x="2533172" y="1943100"/>
+            <a:ext cx="445200" cy="445200"/>
+          </a:xfrm>
+          <a:prstGeom prst="rect">
+            <a:avLst/>
+          </a:prstGeom>
+        </p:spPr>
+      </p:pic>
+      <p:pic>
+        <p:nvPicPr>
+          <p:cNvPr id="34" name="Graphic 33" descr="Document outline">
+            <a:extLst>
+              <a:ext uri="{FF2B5EF4-FFF2-40B4-BE49-F238E27FC236}">
+                <a16:creationId xmlns:a16="http://schemas.microsoft.com/office/drawing/2014/main" id="{72E02D59-531F-B4CF-D8E4-5593B8FBA83B}"/>
+              </a:ext>
+            </a:extLst>
+          </p:cNvPr>
+          <p:cNvPicPr>
+            <a:picLocks noChangeAspect="1"/>
+          </p:cNvPicPr>
+          <p:nvPr/>
+        </p:nvPicPr>
+        <p:blipFill>
+          <a:blip r:embed="rId3">
+            <a:extLst>
+              <a:ext uri="{96DAC541-7B7A-43D3-8B79-37D633B846F1}">
+                <asvg:svgBlip xmlns:asvg="http://schemas.microsoft.com/office/drawing/2016/SVG/main" r:embed="rId4"/>
+              </a:ext>
+            </a:extLst>
+          </a:blip>
+          <a:stretch>
+            <a:fillRect/>
+          </a:stretch>
+        </p:blipFill>
+        <p:spPr>
+          <a:xfrm>
+            <a:off x="5985695" y="1924763"/>
+            <a:ext cx="445200" cy="445200"/>
+          </a:xfrm>
+          <a:prstGeom prst="rect">
+            <a:avLst/>
+          </a:prstGeom>
+        </p:spPr>
+      </p:pic>
+      <p:pic>
+        <p:nvPicPr>
+          <p:cNvPr id="35" name="Graphic 34" descr="Document outline">
+            <a:extLst>
+              <a:ext uri="{FF2B5EF4-FFF2-40B4-BE49-F238E27FC236}">
+                <a16:creationId xmlns:a16="http://schemas.microsoft.com/office/drawing/2014/main" id="{2F4F5FF1-CF03-DB35-98CC-507DA54A4A0E}"/>
+              </a:ext>
+            </a:extLst>
+          </p:cNvPr>
+          <p:cNvPicPr>
+            <a:picLocks noChangeAspect="1"/>
+          </p:cNvPicPr>
+          <p:nvPr/>
+        </p:nvPicPr>
+        <p:blipFill>
+          <a:blip r:embed="rId3">
+            <a:extLst>
+              <a:ext uri="{96DAC541-7B7A-43D3-8B79-37D633B846F1}">
+                <asvg:svgBlip xmlns:asvg="http://schemas.microsoft.com/office/drawing/2016/SVG/main" r:embed="rId4"/>
+              </a:ext>
+            </a:extLst>
+          </a:blip>
+          <a:stretch>
+            <a:fillRect/>
+          </a:stretch>
+        </p:blipFill>
+        <p:spPr>
+          <a:xfrm>
+            <a:off x="10709713" y="1341657"/>
+            <a:ext cx="445200" cy="445200"/>
+          </a:xfrm>
+          <a:prstGeom prst="rect">
+            <a:avLst/>
+          </a:prstGeom>
+        </p:spPr>
+      </p:pic>
+      <p:grpSp>
+        <p:nvGrpSpPr>
+          <p:cNvPr id="40" name="Group 39">
+            <a:extLst>
+              <a:ext uri="{FF2B5EF4-FFF2-40B4-BE49-F238E27FC236}">
+                <a16:creationId xmlns:a16="http://schemas.microsoft.com/office/drawing/2014/main" id="{69528A88-546B-E384-FF17-CB260F17CD74}"/>
+              </a:ext>
+            </a:extLst>
+          </p:cNvPr>
+          <p:cNvGrpSpPr/>
+          <p:nvPr/>
+        </p:nvGrpSpPr>
+        <p:grpSpPr>
+          <a:xfrm>
+            <a:off x="3075859" y="4927546"/>
+            <a:ext cx="478999" cy="445200"/>
+            <a:chOff x="8042321" y="1072838"/>
+            <a:chExt cx="914400" cy="914400"/>
+          </a:xfrm>
+        </p:grpSpPr>
+        <p:pic>
+          <p:nvPicPr>
+            <p:cNvPr id="37" name="Graphic 36" descr="Binary with solid fill">
+              <a:extLst>
+                <a:ext uri="{FF2B5EF4-FFF2-40B4-BE49-F238E27FC236}">
+                  <a16:creationId xmlns:a16="http://schemas.microsoft.com/office/drawing/2014/main" id="{ACB38732-BEF6-8C71-6CBE-4F86BC344626}"/>
+                </a:ext>
+              </a:extLst>
+            </p:cNvPr>
+            <p:cNvPicPr>
+              <a:picLocks noChangeAspect="1"/>
+            </p:cNvPicPr>
+            <p:nvPr/>
+          </p:nvPicPr>
+          <p:blipFill>
+            <a:blip r:embed="rId5">
+              <a:extLst>
+                <a:ext uri="{96DAC541-7B7A-43D3-8B79-37D633B846F1}">
+                  <asvg:svgBlip xmlns:asvg="http://schemas.microsoft.com/office/drawing/2016/SVG/main" r:embed="rId6"/>
+                </a:ext>
+              </a:extLst>
+            </a:blip>
+            <a:stretch>
+              <a:fillRect/>
+            </a:stretch>
+          </p:blipFill>
+          <p:spPr>
+            <a:xfrm>
+              <a:off x="8228753" y="1356919"/>
+              <a:ext cx="501712" cy="501712"/>
+            </a:xfrm>
+            <a:prstGeom prst="rect">
+              <a:avLst/>
+            </a:prstGeom>
+          </p:spPr>
+        </p:pic>
+        <p:pic>
+          <p:nvPicPr>
+            <p:cNvPr id="39" name="Graphic 38" descr="Paper outline">
+              <a:extLst>
+                <a:ext uri="{FF2B5EF4-FFF2-40B4-BE49-F238E27FC236}">
+                  <a16:creationId xmlns:a16="http://schemas.microsoft.com/office/drawing/2014/main" id="{1BCC04E4-5A62-695D-699C-08EFA301B4BC}"/>
+                </a:ext>
+              </a:extLst>
+            </p:cNvPr>
+            <p:cNvPicPr>
+              <a:picLocks noChangeAspect="1"/>
+            </p:cNvPicPr>
+            <p:nvPr/>
+          </p:nvPicPr>
+          <p:blipFill>
+            <a:blip r:embed="rId7">
+              <a:extLst>
+                <a:ext uri="{96DAC541-7B7A-43D3-8B79-37D633B846F1}">
+                  <asvg:svgBlip xmlns:asvg="http://schemas.microsoft.com/office/drawing/2016/SVG/main" r:embed="rId8"/>
+                </a:ext>
+              </a:extLst>
+            </a:blip>
+            <a:stretch>
+              <a:fillRect/>
+            </a:stretch>
+          </p:blipFill>
+          <p:spPr>
+            <a:xfrm>
+              <a:off x="8042321" y="1072838"/>
+              <a:ext cx="914400" cy="914400"/>
+            </a:xfrm>
+            <a:prstGeom prst="rect">
+              <a:avLst/>
+            </a:prstGeom>
+          </p:spPr>
+        </p:pic>
+      </p:grpSp>
+      <p:grpSp>
+        <p:nvGrpSpPr>
+          <p:cNvPr id="41" name="Group 40">
+            <a:extLst>
+              <a:ext uri="{FF2B5EF4-FFF2-40B4-BE49-F238E27FC236}">
+                <a16:creationId xmlns:a16="http://schemas.microsoft.com/office/drawing/2014/main" id="{CD946F42-94B7-2AEE-BD80-2458D4D7BC45}"/>
+              </a:ext>
+            </a:extLst>
+          </p:cNvPr>
+          <p:cNvGrpSpPr/>
+          <p:nvPr/>
+        </p:nvGrpSpPr>
+        <p:grpSpPr>
+          <a:xfrm>
+            <a:off x="10755989" y="3894391"/>
+            <a:ext cx="478999" cy="445200"/>
+            <a:chOff x="8042321" y="1072838"/>
+            <a:chExt cx="914400" cy="914400"/>
+          </a:xfrm>
+        </p:grpSpPr>
+        <p:pic>
+          <p:nvPicPr>
+            <p:cNvPr id="42" name="Graphic 41" descr="Binary with solid fill">
+              <a:extLst>
+                <a:ext uri="{FF2B5EF4-FFF2-40B4-BE49-F238E27FC236}">
+                  <a16:creationId xmlns:a16="http://schemas.microsoft.com/office/drawing/2014/main" id="{AFD3E2EC-F1FD-BAB1-6F78-DDBA69A6E2F1}"/>
+                </a:ext>
+              </a:extLst>
+            </p:cNvPr>
+            <p:cNvPicPr>
+              <a:picLocks noChangeAspect="1"/>
+            </p:cNvPicPr>
+            <p:nvPr/>
+          </p:nvPicPr>
+          <p:blipFill>
+            <a:blip r:embed="rId5">
+              <a:extLst>
+                <a:ext uri="{96DAC541-7B7A-43D3-8B79-37D633B846F1}">
+                  <asvg:svgBlip xmlns:asvg="http://schemas.microsoft.com/office/drawing/2016/SVG/main" r:embed="rId6"/>
+                </a:ext>
+              </a:extLst>
+            </a:blip>
+            <a:stretch>
+              <a:fillRect/>
+            </a:stretch>
+          </p:blipFill>
+          <p:spPr>
+            <a:xfrm>
+              <a:off x="8228753" y="1356919"/>
+              <a:ext cx="501712" cy="501712"/>
+            </a:xfrm>
+            <a:prstGeom prst="rect">
+              <a:avLst/>
+            </a:prstGeom>
+          </p:spPr>
+        </p:pic>
+        <p:pic>
+          <p:nvPicPr>
+            <p:cNvPr id="43" name="Graphic 42" descr="Paper outline">
+              <a:extLst>
+                <a:ext uri="{FF2B5EF4-FFF2-40B4-BE49-F238E27FC236}">
+                  <a16:creationId xmlns:a16="http://schemas.microsoft.com/office/drawing/2014/main" id="{E6CEDBB2-896A-CC13-5FDB-9E8CDD46539E}"/>
+                </a:ext>
+              </a:extLst>
+            </p:cNvPr>
+            <p:cNvPicPr>
+              <a:picLocks noChangeAspect="1"/>
+            </p:cNvPicPr>
+            <p:nvPr/>
+          </p:nvPicPr>
+          <p:blipFill>
+            <a:blip r:embed="rId7">
+              <a:extLst>
+                <a:ext uri="{96DAC541-7B7A-43D3-8B79-37D633B846F1}">
+                  <asvg:svgBlip xmlns:asvg="http://schemas.microsoft.com/office/drawing/2016/SVG/main" r:embed="rId8"/>
+                </a:ext>
+              </a:extLst>
+            </a:blip>
+            <a:stretch>
+              <a:fillRect/>
+            </a:stretch>
+          </p:blipFill>
+          <p:spPr>
+            <a:xfrm>
+              <a:off x="8042321" y="1072838"/>
+              <a:ext cx="914400" cy="914400"/>
+            </a:xfrm>
+            <a:prstGeom prst="rect">
+              <a:avLst/>
+            </a:prstGeom>
+          </p:spPr>
+        </p:pic>
+      </p:grpSp>
+      <p:grpSp>
+        <p:nvGrpSpPr>
+          <p:cNvPr id="44" name="Group 43">
+            <a:extLst>
+              <a:ext uri="{FF2B5EF4-FFF2-40B4-BE49-F238E27FC236}">
+                <a16:creationId xmlns:a16="http://schemas.microsoft.com/office/drawing/2014/main" id="{9765D7F5-1A20-B82E-E764-1BA272CA4E11}"/>
+              </a:ext>
+            </a:extLst>
+          </p:cNvPr>
+          <p:cNvGrpSpPr/>
+          <p:nvPr/>
+        </p:nvGrpSpPr>
+        <p:grpSpPr>
+          <a:xfrm>
+            <a:off x="4520574" y="4921414"/>
+            <a:ext cx="478999" cy="445200"/>
+            <a:chOff x="8042321" y="1072838"/>
+            <a:chExt cx="914400" cy="914400"/>
+          </a:xfrm>
+        </p:grpSpPr>
+        <p:pic>
+          <p:nvPicPr>
+            <p:cNvPr id="45" name="Graphic 44" descr="Binary with solid fill">
+              <a:extLst>
+                <a:ext uri="{FF2B5EF4-FFF2-40B4-BE49-F238E27FC236}">
+                  <a16:creationId xmlns:a16="http://schemas.microsoft.com/office/drawing/2014/main" id="{890549DC-BD51-ABBC-81FD-9AC39DE455AF}"/>
+                </a:ext>
+              </a:extLst>
+            </p:cNvPr>
+            <p:cNvPicPr>
+              <a:picLocks noChangeAspect="1"/>
+            </p:cNvPicPr>
+            <p:nvPr/>
+          </p:nvPicPr>
+          <p:blipFill>
+            <a:blip r:embed="rId5">
+              <a:extLst>
+                <a:ext uri="{96DAC541-7B7A-43D3-8B79-37D633B846F1}">
+                  <asvg:svgBlip xmlns:asvg="http://schemas.microsoft.com/office/drawing/2016/SVG/main" r:embed="rId6"/>
+                </a:ext>
+              </a:extLst>
+            </a:blip>
+            <a:stretch>
+              <a:fillRect/>
+            </a:stretch>
+          </p:blipFill>
+          <p:spPr>
+            <a:xfrm>
+              <a:off x="8228753" y="1356919"/>
+              <a:ext cx="501712" cy="501712"/>
+            </a:xfrm>
+            <a:prstGeom prst="rect">
+              <a:avLst/>
+            </a:prstGeom>
+          </p:spPr>
+        </p:pic>
+        <p:pic>
+          <p:nvPicPr>
+            <p:cNvPr id="46" name="Graphic 45" descr="Paper outline">
+              <a:extLst>
+                <a:ext uri="{FF2B5EF4-FFF2-40B4-BE49-F238E27FC236}">
+                  <a16:creationId xmlns:a16="http://schemas.microsoft.com/office/drawing/2014/main" id="{60481AC8-2A42-3231-F869-BC8066DFABFB}"/>
+                </a:ext>
+              </a:extLst>
+            </p:cNvPr>
+            <p:cNvPicPr>
+              <a:picLocks noChangeAspect="1"/>
+            </p:cNvPicPr>
+            <p:nvPr/>
+          </p:nvPicPr>
+          <p:blipFill>
+            <a:blip r:embed="rId7">
+              <a:extLst>
+                <a:ext uri="{96DAC541-7B7A-43D3-8B79-37D633B846F1}">
+                  <asvg:svgBlip xmlns:asvg="http://schemas.microsoft.com/office/drawing/2016/SVG/main" r:embed="rId8"/>
+                </a:ext>
+              </a:extLst>
+            </a:blip>
+            <a:stretch>
+              <a:fillRect/>
+            </a:stretch>
+          </p:blipFill>
+          <p:spPr>
+            <a:xfrm>
+              <a:off x="8042321" y="1072838"/>
+              <a:ext cx="914400" cy="914400"/>
+            </a:xfrm>
+            <a:prstGeom prst="rect">
+              <a:avLst/>
+            </a:prstGeom>
+          </p:spPr>
+        </p:pic>
+      </p:grpSp>
     </p:spTree>
     <p:extLst>
       <p:ext uri="{BB962C8B-B14F-4D97-AF65-F5344CB8AC3E}">
@@ -33742,18 +36266,18 @@
 </file>
 
 <file path=customXml/item2.xml><?xml version="1.0" encoding="utf-8"?>
+<p:properties xmlns:p="http://schemas.microsoft.com/office/2006/metadata/properties" xmlns:xsi="http://www.w3.org/2001/XMLSchema-instance" xmlns:pc="http://schemas.microsoft.com/office/infopath/2007/PartnerControls">
+  <documentManagement/>
+</p:properties>
+</file>
+
+<file path=customXml/item3.xml><?xml version="1.0" encoding="utf-8"?>
 <?mso-contentType ?>
 <FormTemplates xmlns="http://schemas.microsoft.com/sharepoint/v3/contenttype/forms">
   <Display>DocumentLibraryForm</Display>
   <Edit>DocumentLibraryForm</Edit>
   <New>DocumentLibraryForm</New>
 </FormTemplates>
-</file>
-
-<file path=customXml/item3.xml><?xml version="1.0" encoding="utf-8"?>
-<p:properties xmlns:p="http://schemas.microsoft.com/office/2006/metadata/properties" xmlns:xsi="http://www.w3.org/2001/XMLSchema-instance" xmlns:pc="http://schemas.microsoft.com/office/infopath/2007/PartnerControls">
-  <documentManagement/>
-</p:properties>
 </file>
 
 <file path=customXml/itemProps1.xml><?xml version="1.0" encoding="utf-8"?>
@@ -33773,14 +36297,6 @@
 </file>
 
 <file path=customXml/itemProps2.xml><?xml version="1.0" encoding="utf-8"?>
-<ds:datastoreItem xmlns:ds="http://schemas.openxmlformats.org/officeDocument/2006/customXml" ds:itemID="{A2F4DB20-F02C-4139-BE14-4D908EF1BA88}">
-  <ds:schemaRefs>
-    <ds:schemaRef ds:uri="http://schemas.microsoft.com/sharepoint/v3/contenttype/forms"/>
-  </ds:schemaRefs>
-</ds:datastoreItem>
-</file>
-
-<file path=customXml/itemProps3.xml><?xml version="1.0" encoding="utf-8"?>
 <ds:datastoreItem xmlns:ds="http://schemas.openxmlformats.org/officeDocument/2006/customXml" ds:itemID="{3546F3D9-27DD-4F07-9983-380B33535F9E}">
   <ds:schemaRefs>
     <ds:schemaRef ds:uri="http://purl.org/dc/terms/"/>
@@ -33793,4 +36309,12 @@
     <ds:schemaRef ds:uri="http://purl.org/dc/dcmitype/"/>
   </ds:schemaRefs>
 </ds:datastoreItem>
+</file>
+
+<file path=customXml/itemProps3.xml><?xml version="1.0" encoding="utf-8"?>
+<ds:datastoreItem xmlns:ds="http://schemas.openxmlformats.org/officeDocument/2006/customXml" ds:itemID="{A2F4DB20-F02C-4139-BE14-4D908EF1BA88}">
+  <ds:schemaRefs>
+    <ds:schemaRef ds:uri="http://schemas.microsoft.com/sharepoint/v3/contenttype/forms"/>
+  </ds:schemaRefs>
+</ds:datastoreItem>
 </file>